--- a/docs/songs_2026-03-18.pptx
+++ b/docs/songs_2026-03-18.pptx
@@ -5,7 +5,7 @@
     <p:sldMasterId id="2147483648" r:id="rId1"/>
   </p:sldMasterIdLst>
   <p:notesMasterIdLst>
-    <p:notesMasterId r:id="rId58"/>
+    <p:notesMasterId r:id="rId53"/>
   </p:notesMasterIdLst>
   <p:sldIdLst>
     <p:sldId id="421" r:id="rId2"/>
@@ -34,36 +34,31 @@
     <p:sldId id="1229" r:id="rId25"/>
     <p:sldId id="1230" r:id="rId26"/>
     <p:sldId id="1226" r:id="rId27"/>
-    <p:sldId id="518" r:id="rId28"/>
-    <p:sldId id="521" r:id="rId29"/>
-    <p:sldId id="522" r:id="rId30"/>
-    <p:sldId id="524" r:id="rId31"/>
-    <p:sldId id="1305" r:id="rId32"/>
-    <p:sldId id="1306" r:id="rId33"/>
-    <p:sldId id="519" r:id="rId34"/>
-    <p:sldId id="520" r:id="rId35"/>
-    <p:sldId id="1307" r:id="rId36"/>
-    <p:sldId id="526" r:id="rId37"/>
-    <p:sldId id="1308" r:id="rId38"/>
-    <p:sldId id="1309" r:id="rId39"/>
-    <p:sldId id="527" r:id="rId40"/>
-    <p:sldId id="1492" r:id="rId41"/>
-    <p:sldId id="1493" r:id="rId42"/>
-    <p:sldId id="1496" r:id="rId43"/>
-    <p:sldId id="1494" r:id="rId44"/>
-    <p:sldId id="1500" r:id="rId45"/>
-    <p:sldId id="1495" r:id="rId46"/>
-    <p:sldId id="1501" r:id="rId47"/>
-    <p:sldId id="1497" r:id="rId48"/>
-    <p:sldId id="1498" r:id="rId49"/>
-    <p:sldId id="1502" r:id="rId50"/>
-    <p:sldId id="1503" r:id="rId51"/>
-    <p:sldId id="1504" r:id="rId52"/>
-    <p:sldId id="1505" r:id="rId53"/>
-    <p:sldId id="1506" r:id="rId54"/>
-    <p:sldId id="1507" r:id="rId55"/>
-    <p:sldId id="523" r:id="rId56"/>
-    <p:sldId id="525" r:id="rId57"/>
+    <p:sldId id="1306" r:id="rId28"/>
+    <p:sldId id="519" r:id="rId29"/>
+    <p:sldId id="520" r:id="rId30"/>
+    <p:sldId id="1307" r:id="rId31"/>
+    <p:sldId id="526" r:id="rId32"/>
+    <p:sldId id="1308" r:id="rId33"/>
+    <p:sldId id="1309" r:id="rId34"/>
+    <p:sldId id="527" r:id="rId35"/>
+    <p:sldId id="1492" r:id="rId36"/>
+    <p:sldId id="1493" r:id="rId37"/>
+    <p:sldId id="1496" r:id="rId38"/>
+    <p:sldId id="1494" r:id="rId39"/>
+    <p:sldId id="1500" r:id="rId40"/>
+    <p:sldId id="1495" r:id="rId41"/>
+    <p:sldId id="1501" r:id="rId42"/>
+    <p:sldId id="1497" r:id="rId43"/>
+    <p:sldId id="1498" r:id="rId44"/>
+    <p:sldId id="1502" r:id="rId45"/>
+    <p:sldId id="1503" r:id="rId46"/>
+    <p:sldId id="1504" r:id="rId47"/>
+    <p:sldId id="1505" r:id="rId48"/>
+    <p:sldId id="1506" r:id="rId49"/>
+    <p:sldId id="1507" r:id="rId50"/>
+    <p:sldId id="523" r:id="rId51"/>
+    <p:sldId id="525" r:id="rId52"/>
   </p:sldIdLst>
   <p:sldSz cx="9144000" cy="6858000" type="screen4x3"/>
   <p:notesSz cx="6858000" cy="9144000"/>
@@ -263,7 +258,7 @@
           <a:p>
             <a:fld id="{C57EAEFC-A9C7-464E-BE3F-33D4DD72E122}" type="datetimeFigureOut">
               <a:rPr lang="en-GB" smtClean="0"/>
-              <a:t>06/03/2026</a:t>
+              <a:t>15/03/2026</a:t>
             </a:fld>
             <a:endParaRPr lang="en-GB"/>
           </a:p>
@@ -596,7 +591,7 @@
           <a:p>
             <a:fld id="{E79B61DE-1D46-4752-AF65-FA2C4EB0D1D0}" type="slidenum">
               <a:rPr lang="en-GB" smtClean="0"/>
-              <a:t>48</a:t>
+              <a:t>43</a:t>
             </a:fld>
             <a:endParaRPr lang="en-GB"/>
           </a:p>
@@ -800,7 +795,7 @@
             <a:fld id="{26EA1CF3-4A15-4CBF-9A5A-6A56C368BE71}" type="datetimeFigureOut">
               <a:rPr lang="en-GB" smtClean="0"/>
               <a:pPr/>
-              <a:t>06/03/2026</a:t>
+              <a:t>15/03/2026</a:t>
             </a:fld>
             <a:endParaRPr lang="en-GB"/>
           </a:p>
@@ -965,7 +960,7 @@
             <a:fld id="{26EA1CF3-4A15-4CBF-9A5A-6A56C368BE71}" type="datetimeFigureOut">
               <a:rPr lang="en-GB" smtClean="0"/>
               <a:pPr/>
-              <a:t>06/03/2026</a:t>
+              <a:t>15/03/2026</a:t>
             </a:fld>
             <a:endParaRPr lang="en-GB"/>
           </a:p>
@@ -1140,7 +1135,7 @@
             <a:fld id="{26EA1CF3-4A15-4CBF-9A5A-6A56C368BE71}" type="datetimeFigureOut">
               <a:rPr lang="en-GB" smtClean="0"/>
               <a:pPr/>
-              <a:t>06/03/2026</a:t>
+              <a:t>15/03/2026</a:t>
             </a:fld>
             <a:endParaRPr lang="en-GB"/>
           </a:p>
@@ -1307,7 +1302,7 @@
             <a:fld id="{26EA1CF3-4A15-4CBF-9A5A-6A56C368BE71}" type="datetimeFigureOut">
               <a:rPr lang="en-GB" smtClean="0"/>
               <a:pPr/>
-              <a:t>06/03/2026</a:t>
+              <a:t>15/03/2026</a:t>
             </a:fld>
             <a:endParaRPr lang="en-GB"/>
           </a:p>
@@ -1549,7 +1544,7 @@
             <a:fld id="{26EA1CF3-4A15-4CBF-9A5A-6A56C368BE71}" type="datetimeFigureOut">
               <a:rPr lang="en-GB" smtClean="0"/>
               <a:pPr/>
-              <a:t>06/03/2026</a:t>
+              <a:t>15/03/2026</a:t>
             </a:fld>
             <a:endParaRPr lang="en-GB"/>
           </a:p>
@@ -1831,7 +1826,7 @@
             <a:fld id="{26EA1CF3-4A15-4CBF-9A5A-6A56C368BE71}" type="datetimeFigureOut">
               <a:rPr lang="en-GB" smtClean="0"/>
               <a:pPr/>
-              <a:t>06/03/2026</a:t>
+              <a:t>15/03/2026</a:t>
             </a:fld>
             <a:endParaRPr lang="en-GB"/>
           </a:p>
@@ -2247,7 +2242,7 @@
             <a:fld id="{26EA1CF3-4A15-4CBF-9A5A-6A56C368BE71}" type="datetimeFigureOut">
               <a:rPr lang="en-GB" smtClean="0"/>
               <a:pPr/>
-              <a:t>06/03/2026</a:t>
+              <a:t>15/03/2026</a:t>
             </a:fld>
             <a:endParaRPr lang="en-GB"/>
           </a:p>
@@ -2361,7 +2356,7 @@
             <a:fld id="{26EA1CF3-4A15-4CBF-9A5A-6A56C368BE71}" type="datetimeFigureOut">
               <a:rPr lang="en-GB" smtClean="0"/>
               <a:pPr/>
-              <a:t>06/03/2026</a:t>
+              <a:t>15/03/2026</a:t>
             </a:fld>
             <a:endParaRPr lang="en-GB"/>
           </a:p>
@@ -2453,7 +2448,7 @@
             <a:fld id="{26EA1CF3-4A15-4CBF-9A5A-6A56C368BE71}" type="datetimeFigureOut">
               <a:rPr lang="en-GB" smtClean="0"/>
               <a:pPr/>
-              <a:t>06/03/2026</a:t>
+              <a:t>15/03/2026</a:t>
             </a:fld>
             <a:endParaRPr lang="en-GB"/>
           </a:p>
@@ -2725,7 +2720,7 @@
             <a:fld id="{26EA1CF3-4A15-4CBF-9A5A-6A56C368BE71}" type="datetimeFigureOut">
               <a:rPr lang="en-GB" smtClean="0"/>
               <a:pPr/>
-              <a:t>06/03/2026</a:t>
+              <a:t>15/03/2026</a:t>
             </a:fld>
             <a:endParaRPr lang="en-GB"/>
           </a:p>
@@ -2977,7 +2972,7 @@
             <a:fld id="{26EA1CF3-4A15-4CBF-9A5A-6A56C368BE71}" type="datetimeFigureOut">
               <a:rPr lang="en-GB" smtClean="0"/>
               <a:pPr/>
-              <a:t>06/03/2026</a:t>
+              <a:t>15/03/2026</a:t>
             </a:fld>
             <a:endParaRPr lang="en-GB"/>
           </a:p>
@@ -3186,7 +3181,7 @@
             <a:fld id="{26EA1CF3-4A15-4CBF-9A5A-6A56C368BE71}" type="datetimeFigureOut">
               <a:rPr lang="en-GB" smtClean="0"/>
               <a:pPr/>
-              <a:t>06/03/2026</a:t>
+              <a:t>15/03/2026</a:t>
             </a:fld>
             <a:endParaRPr lang="en-GB"/>
           </a:p>
@@ -6573,7 +6568,7 @@
                 <a:effectLst/>
                 <a:latin typeface="akagi_probook"/>
               </a:rPr>
-              <a:t>Because He Lives</a:t>
+              <a:t>Abide With Me</a:t>
             </a:r>
           </a:p>
           <a:p>
@@ -6584,38 +6579,21 @@
                 </a:solidFill>
               </a:rPr>
             </a:br>
-            <a:r>
+            <a:br>
               <a:rPr lang="en-GB" sz="1200" dirty="0">
                 <a:solidFill>
                   <a:schemeClr val="bg1"/>
                 </a:solidFill>
               </a:rPr>
-              <a:t>CCLI Song # 16880</a:t>
-            </a:r>
-          </a:p>
-          <a:p>
-            <a:endParaRPr lang="en-GB" sz="1200" dirty="0">
-              <a:solidFill>
-                <a:schemeClr val="bg1"/>
-              </a:solidFill>
-            </a:endParaRPr>
-          </a:p>
-          <a:p>
+            </a:br>
             <a:r>
               <a:rPr lang="en-GB" sz="1200" dirty="0">
                 <a:solidFill>
                   <a:schemeClr val="bg1"/>
                 </a:solidFill>
               </a:rPr>
-              <a:t>Gloria Gaither | William J. Gaither</a:t>
-            </a:r>
-          </a:p>
-          <a:p>
-            <a:endParaRPr lang="en-GB" sz="1200" dirty="0">
-              <a:solidFill>
-                <a:schemeClr val="bg1"/>
-              </a:solidFill>
-            </a:endParaRPr>
+              <a:t>CCLI Song # 7038447</a:t>
+            </a:r>
           </a:p>
           <a:p>
             <a:r>
@@ -6624,7 +6602,7 @@
                   <a:schemeClr val="bg1"/>
                 </a:solidFill>
               </a:rPr>
-              <a:t>© 1971 Hanna Street Music (Admin. by Gaither Copyright Management)</a:t>
+              <a:t>David Crowder | Jason Ingram | Matt Maher | Matt Redman</a:t>
             </a:r>
           </a:p>
           <a:p>
@@ -6634,6 +6612,48 @@
                   <a:schemeClr val="bg1"/>
                 </a:solidFill>
               </a:rPr>
+              <a:t>© </a:t>
+            </a:r>
+            <a:r>
+              <a:rPr lang="en-GB" sz="1200" dirty="0" err="1">
+                <a:solidFill>
+                  <a:schemeClr val="bg1"/>
+                </a:solidFill>
+              </a:rPr>
+              <a:t>Inot</a:t>
+            </a:r>
+            <a:r>
+              <a:rPr lang="en-GB" sz="1200" dirty="0">
+                <a:solidFill>
+                  <a:schemeClr val="bg1"/>
+                </a:solidFill>
+              </a:rPr>
+              <a:t> Music; </a:t>
+            </a:r>
+            <a:r>
+              <a:rPr lang="en-GB" sz="1200" dirty="0" err="1">
+                <a:solidFill>
+                  <a:schemeClr val="bg1"/>
+                </a:solidFill>
+              </a:rPr>
+              <a:t>sixsteps</a:t>
+            </a:r>
+            <a:r>
+              <a:rPr lang="en-GB" sz="1200" dirty="0">
+                <a:solidFill>
+                  <a:schemeClr val="bg1"/>
+                </a:solidFill>
+              </a:rPr>
+              <a:t> Music; worshiptogether.com songs; Be Essential Songs; I Am A Pilgrim Songs; Open Hands Music; So Essential Tunes; Said And Done Music; Thankyou Music Ltd</a:t>
+            </a:r>
+          </a:p>
+          <a:p>
+            <a:r>
+              <a:rPr lang="en-GB" sz="1200" dirty="0">
+                <a:solidFill>
+                  <a:schemeClr val="bg1"/>
+                </a:solidFill>
+              </a:rPr>
               <a:t>For use solely with the </a:t>
             </a:r>
             <a:r>
@@ -6652,13 +6672,6 @@
               </a:rPr>
               <a:t>® Terms of Use. All rights reserved. www.ccli.com</a:t>
             </a:r>
-          </a:p>
-          <a:p>
-            <a:endParaRPr lang="en-GB" sz="1200" dirty="0">
-              <a:solidFill>
-                <a:schemeClr val="bg1"/>
-              </a:solidFill>
-            </a:endParaRPr>
           </a:p>
           <a:p>
             <a:r>
@@ -6675,7 +6688,7 @@
     </p:spTree>
     <p:extLst>
       <p:ext uri="{BB962C8B-B14F-4D97-AF65-F5344CB8AC3E}">
-        <p14:creationId xmlns:p14="http://schemas.microsoft.com/office/powerpoint/2010/main" val="2940382954"/>
+        <p14:creationId xmlns:p14="http://schemas.microsoft.com/office/powerpoint/2010/main" val="1409846879"/>
       </p:ext>
     </p:extLst>
   </p:cSld>
@@ -6714,7 +6727,7 @@
         </p:nvSpPr>
         <p:spPr>
           <a:xfrm>
-            <a:off x="203118" y="764704"/>
+            <a:off x="251520" y="836712"/>
             <a:ext cx="8640960" cy="6480720"/>
           </a:xfrm>
         </p:spPr>
@@ -6730,47 +6743,47 @@
                   <a:schemeClr val="bg1"/>
                 </a:solidFill>
               </a:rPr>
-              <a:t>God sent His Son they called Him Jesus</a:t>
-            </a:r>
-          </a:p>
-          <a:p>
-            <a:r>
-              <a:rPr lang="en-GB" sz="3600" dirty="0">
-                <a:solidFill>
-                  <a:schemeClr val="bg1"/>
-                </a:solidFill>
-              </a:rPr>
-              <a:t>He came to love heal and forgive</a:t>
-            </a:r>
-          </a:p>
-          <a:p>
-            <a:r>
-              <a:rPr lang="en-GB" sz="3600" dirty="0">
-                <a:solidFill>
-                  <a:schemeClr val="bg1"/>
-                </a:solidFill>
-              </a:rPr>
-              <a:t>He bled and died to buy my pardon</a:t>
-            </a:r>
-          </a:p>
-          <a:p>
-            <a:r>
-              <a:rPr lang="en-GB" sz="3600" dirty="0">
-                <a:solidFill>
-                  <a:schemeClr val="bg1"/>
-                </a:solidFill>
-              </a:rPr>
-              <a:t>An empty grave is there to prove</a:t>
-            </a:r>
-          </a:p>
-          <a:p>
-            <a:r>
-              <a:rPr lang="en-GB" sz="3600" dirty="0">
-                <a:solidFill>
-                  <a:schemeClr val="bg1"/>
-                </a:solidFill>
-              </a:rPr>
-              <a:t>My Saviour lives</a:t>
+              <a:t>I have a home eternal home</a:t>
+            </a:r>
+          </a:p>
+          <a:p>
+            <a:r>
+              <a:rPr lang="en-GB" sz="3600" dirty="0">
+                <a:solidFill>
+                  <a:schemeClr val="bg1"/>
+                </a:solidFill>
+              </a:rPr>
+              <a:t>But for now I walk this broken world</a:t>
+            </a:r>
+          </a:p>
+          <a:p>
+            <a:r>
+              <a:rPr lang="en-GB" sz="3600" dirty="0">
+                <a:solidFill>
+                  <a:schemeClr val="bg1"/>
+                </a:solidFill>
+              </a:rPr>
+              <a:t>You walked it first You know our pain</a:t>
+            </a:r>
+          </a:p>
+          <a:p>
+            <a:r>
+              <a:rPr lang="en-GB" sz="3600" dirty="0">
+                <a:solidFill>
+                  <a:schemeClr val="bg1"/>
+                </a:solidFill>
+              </a:rPr>
+              <a:t>But You show hope can rise</a:t>
+            </a:r>
+          </a:p>
+          <a:p>
+            <a:r>
+              <a:rPr lang="en-GB" sz="3600" dirty="0">
+                <a:solidFill>
+                  <a:schemeClr val="bg1"/>
+                </a:solidFill>
+              </a:rPr>
+              <a:t>Again up from the grave</a:t>
             </a:r>
           </a:p>
         </p:txBody>
@@ -6803,7 +6816,7 @@
                   <a:schemeClr val="bg1"/>
                 </a:solidFill>
               </a:rPr>
-              <a:t>1/4</a:t>
+              <a:t>1/7</a:t>
             </a:r>
           </a:p>
         </p:txBody>
@@ -6811,7 +6824,7 @@
     </p:spTree>
     <p:extLst>
       <p:ext uri="{BB962C8B-B14F-4D97-AF65-F5344CB8AC3E}">
-        <p14:creationId xmlns:p14="http://schemas.microsoft.com/office/powerpoint/2010/main" val="1337383463"/>
+        <p14:creationId xmlns:p14="http://schemas.microsoft.com/office/powerpoint/2010/main" val="2175635830"/>
       </p:ext>
     </p:extLst>
   </p:cSld>
@@ -6850,7 +6863,7 @@
         </p:nvSpPr>
         <p:spPr>
           <a:xfrm>
-            <a:off x="203118" y="692696"/>
+            <a:off x="251520" y="764704"/>
             <a:ext cx="8640960" cy="6480720"/>
           </a:xfrm>
         </p:spPr>
@@ -6866,47 +6879,37 @@
                   <a:schemeClr val="bg1"/>
                 </a:solidFill>
               </a:rPr>
-              <a:t>Because He lives I can face tomorrow</a:t>
-            </a:r>
-          </a:p>
-          <a:p>
-            <a:r>
-              <a:rPr lang="en-GB" sz="3600" dirty="0">
-                <a:solidFill>
-                  <a:schemeClr val="bg1"/>
-                </a:solidFill>
-              </a:rPr>
-              <a:t>Because He lives all fear is gone</a:t>
-            </a:r>
-          </a:p>
-          <a:p>
-            <a:r>
-              <a:rPr lang="en-GB" sz="3600" dirty="0">
-                <a:solidFill>
-                  <a:schemeClr val="bg1"/>
-                </a:solidFill>
-              </a:rPr>
-              <a:t>Because I know He holds the future</a:t>
-            </a:r>
-          </a:p>
-          <a:p>
-            <a:r>
-              <a:rPr lang="en-GB" sz="3600" dirty="0">
-                <a:solidFill>
-                  <a:schemeClr val="bg1"/>
-                </a:solidFill>
-              </a:rPr>
-              <a:t>And life is worth the living</a:t>
-            </a:r>
-          </a:p>
-          <a:p>
-            <a:r>
-              <a:rPr lang="en-GB" sz="3600" dirty="0">
-                <a:solidFill>
-                  <a:schemeClr val="bg1"/>
-                </a:solidFill>
-              </a:rPr>
-              <a:t>Just because He lives</a:t>
+              <a:t>Abide with me abide with me</a:t>
+            </a:r>
+          </a:p>
+          <a:p>
+            <a:r>
+              <a:rPr lang="en-GB" sz="3600" dirty="0">
+                <a:solidFill>
+                  <a:schemeClr val="bg1"/>
+                </a:solidFill>
+              </a:rPr>
+              <a:t>Don't let me fall and don't let go</a:t>
+            </a:r>
+          </a:p>
+          <a:p>
+            <a:r>
+              <a:rPr lang="en-GB" sz="3600" dirty="0">
+                <a:solidFill>
+                  <a:schemeClr val="bg1"/>
+                </a:solidFill>
+              </a:rPr>
+              <a:t>Walk with me and never leave</a:t>
+            </a:r>
+          </a:p>
+          <a:p>
+            <a:r>
+              <a:rPr lang="en-GB" sz="3600" dirty="0">
+                <a:solidFill>
+                  <a:schemeClr val="bg1"/>
+                </a:solidFill>
+              </a:rPr>
+              <a:t>Ever close God abide with me</a:t>
             </a:r>
           </a:p>
         </p:txBody>
@@ -6939,7 +6942,7 @@
                   <a:schemeClr val="bg1"/>
                 </a:solidFill>
               </a:rPr>
-              <a:t>2/4</a:t>
+              <a:t>2/7</a:t>
             </a:r>
           </a:p>
         </p:txBody>
@@ -6947,7 +6950,7 @@
     </p:spTree>
     <p:extLst>
       <p:ext uri="{BB962C8B-B14F-4D97-AF65-F5344CB8AC3E}">
-        <p14:creationId xmlns:p14="http://schemas.microsoft.com/office/powerpoint/2010/main" val="2680165942"/>
+        <p14:creationId xmlns:p14="http://schemas.microsoft.com/office/powerpoint/2010/main" val="365095133"/>
       </p:ext>
     </p:extLst>
   </p:cSld>
@@ -7112,7 +7115,7 @@
         </p:nvSpPr>
         <p:spPr>
           <a:xfrm>
-            <a:off x="251520" y="692696"/>
+            <a:off x="251520" y="764704"/>
             <a:ext cx="8640960" cy="6480720"/>
           </a:xfrm>
         </p:spPr>
@@ -7128,60 +7131,47 @@
                   <a:schemeClr val="bg1"/>
                 </a:solidFill>
               </a:rPr>
-              <a:t>And then one day I'll cross that river</a:t>
-            </a:r>
-          </a:p>
-          <a:p>
-            <a:r>
-              <a:rPr lang="en-GB" sz="3600" dirty="0">
-                <a:solidFill>
-                  <a:schemeClr val="bg1"/>
-                </a:solidFill>
-              </a:rPr>
-              <a:t>I'll fight life's final war with pain</a:t>
-            </a:r>
-          </a:p>
-          <a:p>
-            <a:r>
-              <a:rPr lang="en-GB" sz="3600" dirty="0">
-                <a:solidFill>
-                  <a:schemeClr val="bg1"/>
-                </a:solidFill>
-              </a:rPr>
-              <a:t>And then as death gives way to </a:t>
-            </a:r>
-            <a:r>
-              <a:rPr lang="en-GB" sz="3600" dirty="0" err="1">
-                <a:solidFill>
-                  <a:schemeClr val="bg1"/>
-                </a:solidFill>
-              </a:rPr>
-              <a:t>vict'ry</a:t>
-            </a:r>
-            <a:endParaRPr lang="en-GB" sz="3600" dirty="0">
-              <a:solidFill>
-                <a:schemeClr val="bg1"/>
-              </a:solidFill>
-            </a:endParaRPr>
-          </a:p>
-          <a:p>
-            <a:r>
-              <a:rPr lang="en-GB" sz="3600" dirty="0">
-                <a:solidFill>
-                  <a:schemeClr val="bg1"/>
-                </a:solidFill>
-              </a:rPr>
-              <a:t>I'll see the lights of glory</a:t>
-            </a:r>
-          </a:p>
-          <a:p>
-            <a:r>
-              <a:rPr lang="en-GB" sz="3600" dirty="0">
-                <a:solidFill>
-                  <a:schemeClr val="bg1"/>
-                </a:solidFill>
-              </a:rPr>
-              <a:t>And I'll know He reigns</a:t>
+              <a:t>There in the night Gethsemane</a:t>
+            </a:r>
+          </a:p>
+          <a:p>
+            <a:r>
+              <a:rPr lang="en-GB" sz="3600" dirty="0">
+                <a:solidFill>
+                  <a:schemeClr val="bg1"/>
+                </a:solidFill>
+              </a:rPr>
+              <a:t>Before the cross before the nails</a:t>
+            </a:r>
+          </a:p>
+          <a:p>
+            <a:r>
+              <a:rPr lang="en-GB" sz="3600" dirty="0">
+                <a:solidFill>
+                  <a:schemeClr val="bg1"/>
+                </a:solidFill>
+              </a:rPr>
+              <a:t>Overwhelmed alone You prayed</a:t>
+            </a:r>
+          </a:p>
+          <a:p>
+            <a:r>
+              <a:rPr lang="en-GB" sz="3600" dirty="0">
+                <a:solidFill>
+                  <a:schemeClr val="bg1"/>
+                </a:solidFill>
+              </a:rPr>
+              <a:t>You met us in our suffering</a:t>
+            </a:r>
+          </a:p>
+          <a:p>
+            <a:r>
+              <a:rPr lang="en-GB" sz="3600" dirty="0">
+                <a:solidFill>
+                  <a:schemeClr val="bg1"/>
+                </a:solidFill>
+              </a:rPr>
+              <a:t>And bore our shame</a:t>
             </a:r>
           </a:p>
         </p:txBody>
@@ -7214,7 +7204,7 @@
                   <a:schemeClr val="bg1"/>
                 </a:solidFill>
               </a:rPr>
-              <a:t>3/4</a:t>
+              <a:t>3/7</a:t>
             </a:r>
           </a:p>
         </p:txBody>
@@ -7222,7 +7212,7 @@
     </p:spTree>
     <p:extLst>
       <p:ext uri="{BB962C8B-B14F-4D97-AF65-F5344CB8AC3E}">
-        <p14:creationId xmlns:p14="http://schemas.microsoft.com/office/powerpoint/2010/main" val="4292213899"/>
+        <p14:creationId xmlns:p14="http://schemas.microsoft.com/office/powerpoint/2010/main" val="2878598093"/>
       </p:ext>
     </p:extLst>
   </p:cSld>
@@ -7240,7 +7230,7 @@
         <p:cNvPr id="1" name="">
           <a:extLst>
             <a:ext uri="{FF2B5EF4-FFF2-40B4-BE49-F238E27FC236}">
-              <a16:creationId xmlns:a16="http://schemas.microsoft.com/office/drawing/2014/main" id="{A80502D0-F019-DF97-24AA-BBFD05A0A57F}"/>
+              <a16:creationId xmlns:a16="http://schemas.microsoft.com/office/drawing/2014/main" id="{FB6BC496-FC87-8E1E-64AA-1F013CF68738}"/>
             </a:ext>
           </a:extLst>
         </p:cNvPr>
@@ -7260,7 +7250,7 @@
           <p:cNvPr id="3" name="Subtitle 2">
             <a:extLst>
               <a:ext uri="{FF2B5EF4-FFF2-40B4-BE49-F238E27FC236}">
-                <a16:creationId xmlns:a16="http://schemas.microsoft.com/office/drawing/2014/main" id="{92F34367-E149-4343-6CB5-06AF20846180}"/>
+                <a16:creationId xmlns:a16="http://schemas.microsoft.com/office/drawing/2014/main" id="{643CC7BE-92CA-0354-ADCB-7ED005CC7E27}"/>
               </a:ext>
             </a:extLst>
           </p:cNvPr>
@@ -7273,7 +7263,7 @@
         </p:nvSpPr>
         <p:spPr>
           <a:xfrm>
-            <a:off x="203118" y="692696"/>
+            <a:off x="251520" y="764704"/>
             <a:ext cx="8640960" cy="6480720"/>
           </a:xfrm>
         </p:spPr>
@@ -7289,47 +7279,37 @@
                   <a:schemeClr val="bg1"/>
                 </a:solidFill>
               </a:rPr>
-              <a:t>Because He lives I can face tomorrow</a:t>
-            </a:r>
-          </a:p>
-          <a:p>
-            <a:r>
-              <a:rPr lang="en-GB" sz="3600" dirty="0">
-                <a:solidFill>
-                  <a:schemeClr val="bg1"/>
-                </a:solidFill>
-              </a:rPr>
-              <a:t>Because He lives all fear is gone</a:t>
-            </a:r>
-          </a:p>
-          <a:p>
-            <a:r>
-              <a:rPr lang="en-GB" sz="3600" dirty="0">
-                <a:solidFill>
-                  <a:schemeClr val="bg1"/>
-                </a:solidFill>
-              </a:rPr>
-              <a:t>Because I know He holds the future</a:t>
-            </a:r>
-          </a:p>
-          <a:p>
-            <a:r>
-              <a:rPr lang="en-GB" sz="3600" dirty="0">
-                <a:solidFill>
-                  <a:schemeClr val="bg1"/>
-                </a:solidFill>
-              </a:rPr>
-              <a:t>And life is worth the living</a:t>
-            </a:r>
-          </a:p>
-          <a:p>
-            <a:r>
-              <a:rPr lang="en-GB" sz="3600" dirty="0">
-                <a:solidFill>
-                  <a:schemeClr val="bg1"/>
-                </a:solidFill>
-              </a:rPr>
-              <a:t>Just because He lives</a:t>
+              <a:t>Abide with me abide with me</a:t>
+            </a:r>
+          </a:p>
+          <a:p>
+            <a:r>
+              <a:rPr lang="en-GB" sz="3600" dirty="0">
+                <a:solidFill>
+                  <a:schemeClr val="bg1"/>
+                </a:solidFill>
+              </a:rPr>
+              <a:t>Don't let me fall and don't let go</a:t>
+            </a:r>
+          </a:p>
+          <a:p>
+            <a:r>
+              <a:rPr lang="en-GB" sz="3600" dirty="0">
+                <a:solidFill>
+                  <a:schemeClr val="bg1"/>
+                </a:solidFill>
+              </a:rPr>
+              <a:t>Walk with me and never leave</a:t>
+            </a:r>
+          </a:p>
+          <a:p>
+            <a:r>
+              <a:rPr lang="en-GB" sz="3600" dirty="0">
+                <a:solidFill>
+                  <a:schemeClr val="bg1"/>
+                </a:solidFill>
+              </a:rPr>
+              <a:t>Ever close God abide with me</a:t>
             </a:r>
           </a:p>
         </p:txBody>
@@ -7339,7 +7319,7 @@
           <p:cNvPr id="4" name="TextBox 3">
             <a:extLst>
               <a:ext uri="{FF2B5EF4-FFF2-40B4-BE49-F238E27FC236}">
-                <a16:creationId xmlns:a16="http://schemas.microsoft.com/office/drawing/2014/main" id="{3CD1E6FD-A1EB-80DD-7438-9D037ADA199C}"/>
+                <a16:creationId xmlns:a16="http://schemas.microsoft.com/office/drawing/2014/main" id="{ED4041DC-0661-6DFD-ED4A-0A5AC9565E29}"/>
               </a:ext>
             </a:extLst>
           </p:cNvPr>
@@ -7368,7 +7348,7 @@
                   <a:schemeClr val="bg1"/>
                 </a:solidFill>
               </a:rPr>
-              <a:t>4/4</a:t>
+              <a:t>4/7</a:t>
             </a:r>
           </a:p>
         </p:txBody>
@@ -7376,7 +7356,7 @@
     </p:spTree>
     <p:extLst>
       <p:ext uri="{BB962C8B-B14F-4D97-AF65-F5344CB8AC3E}">
-        <p14:creationId xmlns:p14="http://schemas.microsoft.com/office/powerpoint/2010/main" val="3360406463"/>
+        <p14:creationId xmlns:p14="http://schemas.microsoft.com/office/powerpoint/2010/main" val="2865740119"/>
       </p:ext>
     </p:extLst>
   </p:cSld>
@@ -7415,7 +7395,7 @@
         </p:nvSpPr>
         <p:spPr>
           <a:xfrm>
-            <a:off x="323528" y="188640"/>
+            <a:off x="395536" y="764704"/>
             <a:ext cx="8640960" cy="6480720"/>
           </a:xfrm>
         </p:spPr>
@@ -7425,134 +7405,76 @@
           </a:bodyPr>
           <a:lstStyle/>
           <a:p>
-            <a:endParaRPr lang="en-GB" sz="5400" dirty="0">
-              <a:solidFill>
-                <a:schemeClr val="bg1"/>
-              </a:solidFill>
-            </a:endParaRPr>
-          </a:p>
-          <a:p>
-            <a:r>
-              <a:rPr lang="en-GB" sz="4400" b="0" i="0" dirty="0">
-                <a:solidFill>
-                  <a:srgbClr val="00A3E0"/>
-                </a:solidFill>
-                <a:effectLst/>
-                <a:latin typeface="akagi_probook"/>
-              </a:rPr>
-              <a:t>Abide With Me</a:t>
-            </a:r>
-          </a:p>
-          <a:p>
-            <a:br>
-              <a:rPr lang="en-GB" sz="1200" dirty="0">
-                <a:solidFill>
-                  <a:schemeClr val="bg1"/>
-                </a:solidFill>
-              </a:rPr>
-            </a:br>
-            <a:br>
-              <a:rPr lang="en-GB" sz="1200" dirty="0">
-                <a:solidFill>
-                  <a:schemeClr val="bg1"/>
-                </a:solidFill>
-              </a:rPr>
-            </a:br>
-            <a:r>
-              <a:rPr lang="en-GB" sz="1200" dirty="0">
-                <a:solidFill>
-                  <a:schemeClr val="bg1"/>
-                </a:solidFill>
-              </a:rPr>
-              <a:t>CCLI Song # 7038447</a:t>
-            </a:r>
-          </a:p>
-          <a:p>
-            <a:r>
-              <a:rPr lang="en-GB" sz="1200" dirty="0">
-                <a:solidFill>
-                  <a:schemeClr val="bg1"/>
-                </a:solidFill>
-              </a:rPr>
-              <a:t>David Crowder | Jason Ingram | Matt Maher | Matt Redman</a:t>
-            </a:r>
-          </a:p>
-          <a:p>
-            <a:r>
-              <a:rPr lang="en-GB" sz="1200" dirty="0">
-                <a:solidFill>
-                  <a:schemeClr val="bg1"/>
-                </a:solidFill>
-              </a:rPr>
-              <a:t>© </a:t>
-            </a:r>
-            <a:r>
-              <a:rPr lang="en-GB" sz="1200" dirty="0" err="1">
-                <a:solidFill>
-                  <a:schemeClr val="bg1"/>
-                </a:solidFill>
-              </a:rPr>
-              <a:t>Inot</a:t>
-            </a:r>
-            <a:r>
-              <a:rPr lang="en-GB" sz="1200" dirty="0">
-                <a:solidFill>
-                  <a:schemeClr val="bg1"/>
-                </a:solidFill>
-              </a:rPr>
-              <a:t> Music; </a:t>
-            </a:r>
-            <a:r>
-              <a:rPr lang="en-GB" sz="1200" dirty="0" err="1">
-                <a:solidFill>
-                  <a:schemeClr val="bg1"/>
-                </a:solidFill>
-              </a:rPr>
-              <a:t>sixsteps</a:t>
-            </a:r>
-            <a:r>
-              <a:rPr lang="en-GB" sz="1200" dirty="0">
-                <a:solidFill>
-                  <a:schemeClr val="bg1"/>
-                </a:solidFill>
-              </a:rPr>
-              <a:t> Music; worshiptogether.com songs; Be Essential Songs; I Am A Pilgrim Songs; Open Hands Music; So Essential Tunes; Said And Done Music; Thankyou Music Ltd</a:t>
-            </a:r>
-          </a:p>
-          <a:p>
-            <a:r>
-              <a:rPr lang="en-GB" sz="1200" dirty="0">
-                <a:solidFill>
-                  <a:schemeClr val="bg1"/>
-                </a:solidFill>
-              </a:rPr>
-              <a:t>For use solely with the </a:t>
-            </a:r>
-            <a:r>
-              <a:rPr lang="en-GB" sz="1200" dirty="0" err="1">
-                <a:solidFill>
-                  <a:schemeClr val="bg1"/>
-                </a:solidFill>
-              </a:rPr>
-              <a:t>SongSelect</a:t>
-            </a:r>
-            <a:r>
-              <a:rPr lang="en-GB" sz="1200" dirty="0">
-                <a:solidFill>
-                  <a:schemeClr val="bg1"/>
-                </a:solidFill>
-              </a:rPr>
-              <a:t>® Terms of Use. All rights reserved. www.ccli.com</a:t>
-            </a:r>
-          </a:p>
-          <a:p>
-            <a:r>
-              <a:rPr lang="en-GB" sz="1200" dirty="0">
-                <a:solidFill>
-                  <a:schemeClr val="bg1"/>
-                </a:solidFill>
-              </a:rPr>
-              <a:t>CCLI Licence No. 33265</a:t>
+            <a:r>
+              <a:rPr lang="en-GB" sz="3600" dirty="0">
+                <a:solidFill>
+                  <a:schemeClr val="bg1"/>
+                </a:solidFill>
+              </a:rPr>
+              <a:t>Oh love that will not ever let me go</a:t>
+            </a:r>
+          </a:p>
+          <a:p>
+            <a:r>
+              <a:rPr lang="en-GB" sz="3600" dirty="0">
+                <a:solidFill>
+                  <a:schemeClr val="bg1"/>
+                </a:solidFill>
+              </a:rPr>
+              <a:t>Love that will not ever let me go</a:t>
+            </a:r>
+          </a:p>
+          <a:p>
+            <a:r>
+              <a:rPr lang="en-GB" sz="3600" dirty="0">
+                <a:solidFill>
+                  <a:schemeClr val="bg1"/>
+                </a:solidFill>
+              </a:rPr>
+              <a:t>You never let me go</a:t>
+            </a:r>
+          </a:p>
+          <a:p>
+            <a:r>
+              <a:rPr lang="en-GB" sz="3600" dirty="0">
+                <a:solidFill>
+                  <a:schemeClr val="bg1"/>
+                </a:solidFill>
+              </a:rPr>
+              <a:t>Love that will not ever let me go</a:t>
+            </a:r>
+          </a:p>
+        </p:txBody>
+      </p:sp>
+      <p:sp>
+        <p:nvSpPr>
+          <p:cNvPr id="4" name="TextBox 3"/>
+          <p:cNvSpPr txBox="1"/>
+          <p:nvPr/>
+        </p:nvSpPr>
+        <p:spPr>
+          <a:xfrm>
+            <a:off x="8529729" y="0"/>
+            <a:ext cx="628698" cy="461665"/>
+          </a:xfrm>
+          <a:prstGeom prst="rect">
+            <a:avLst/>
+          </a:prstGeom>
+          <a:noFill/>
+        </p:spPr>
+        <p:txBody>
+          <a:bodyPr wrap="none" rtlCol="0">
+            <a:spAutoFit/>
+          </a:bodyPr>
+          <a:lstStyle/>
+          <a:p>
+            <a:r>
+              <a:rPr lang="en-GB" sz="2400" b="1" dirty="0">
+                <a:solidFill>
+                  <a:schemeClr val="bg1"/>
+                </a:solidFill>
+              </a:rPr>
+              <a:t>5/7</a:t>
             </a:r>
           </a:p>
         </p:txBody>
@@ -7560,7 +7482,7 @@
     </p:spTree>
     <p:extLst>
       <p:ext uri="{BB962C8B-B14F-4D97-AF65-F5344CB8AC3E}">
-        <p14:creationId xmlns:p14="http://schemas.microsoft.com/office/powerpoint/2010/main" val="1409846879"/>
+        <p14:creationId xmlns:p14="http://schemas.microsoft.com/office/powerpoint/2010/main" val="323061136"/>
       </p:ext>
     </p:extLst>
   </p:cSld>
@@ -7599,7 +7521,7 @@
         </p:nvSpPr>
         <p:spPr>
           <a:xfrm>
-            <a:off x="251520" y="836712"/>
+            <a:off x="231698" y="764704"/>
             <a:ext cx="8640960" cy="6480720"/>
           </a:xfrm>
         </p:spPr>
@@ -7615,47 +7537,27 @@
                   <a:schemeClr val="bg1"/>
                 </a:solidFill>
               </a:rPr>
-              <a:t>I have a home eternal home</a:t>
-            </a:r>
-          </a:p>
-          <a:p>
-            <a:r>
-              <a:rPr lang="en-GB" sz="3600" dirty="0">
-                <a:solidFill>
-                  <a:schemeClr val="bg1"/>
-                </a:solidFill>
-              </a:rPr>
-              <a:t>But for now I walk this broken world</a:t>
-            </a:r>
-          </a:p>
-          <a:p>
-            <a:r>
-              <a:rPr lang="en-GB" sz="3600" dirty="0">
-                <a:solidFill>
-                  <a:schemeClr val="bg1"/>
-                </a:solidFill>
-              </a:rPr>
-              <a:t>You walked it first You know our pain</a:t>
-            </a:r>
-          </a:p>
-          <a:p>
-            <a:r>
-              <a:rPr lang="en-GB" sz="3600" dirty="0">
-                <a:solidFill>
-                  <a:schemeClr val="bg1"/>
-                </a:solidFill>
-              </a:rPr>
-              <a:t>But You show hope can rise</a:t>
-            </a:r>
-          </a:p>
-          <a:p>
-            <a:r>
-              <a:rPr lang="en-GB" sz="3600" dirty="0">
-                <a:solidFill>
-                  <a:schemeClr val="bg1"/>
-                </a:solidFill>
-              </a:rPr>
-              <a:t>Again up from the grave</a:t>
+              <a:t>And up ahead eternity</a:t>
+            </a:r>
+          </a:p>
+          <a:p>
+            <a:r>
+              <a:rPr lang="en-GB" sz="3600" dirty="0">
+                <a:solidFill>
+                  <a:schemeClr val="bg1"/>
+                </a:solidFill>
+              </a:rPr>
+              <a:t>We'll weep no more we'll sing for joy</a:t>
+            </a:r>
+          </a:p>
+          <a:p>
+            <a:r>
+              <a:rPr lang="en-GB" sz="3600" dirty="0">
+                <a:solidFill>
+                  <a:schemeClr val="bg1"/>
+                </a:solidFill>
+              </a:rPr>
+              <a:t>Abide with me</a:t>
             </a:r>
           </a:p>
         </p:txBody>
@@ -7688,7 +7590,7 @@
                   <a:schemeClr val="bg1"/>
                 </a:solidFill>
               </a:rPr>
-              <a:t>1/7</a:t>
+              <a:t>6/7</a:t>
             </a:r>
           </a:p>
         </p:txBody>
@@ -7696,7 +7598,7 @@
     </p:spTree>
     <p:extLst>
       <p:ext uri="{BB962C8B-B14F-4D97-AF65-F5344CB8AC3E}">
-        <p14:creationId xmlns:p14="http://schemas.microsoft.com/office/powerpoint/2010/main" val="2175635830"/>
+        <p14:creationId xmlns:p14="http://schemas.microsoft.com/office/powerpoint/2010/main" val="3491371723"/>
       </p:ext>
     </p:extLst>
   </p:cSld>
@@ -7711,7 +7613,13 @@
   <p:cSld>
     <p:spTree>
       <p:nvGrpSpPr>
-        <p:cNvPr id="1" name=""/>
+        <p:cNvPr id="1" name="">
+          <a:extLst>
+            <a:ext uri="{FF2B5EF4-FFF2-40B4-BE49-F238E27FC236}">
+              <a16:creationId xmlns:a16="http://schemas.microsoft.com/office/drawing/2014/main" id="{F00E7D48-1168-DE63-5A45-FEAF7915DFF7}"/>
+            </a:ext>
+          </a:extLst>
+        </p:cNvPr>
         <p:cNvGrpSpPr/>
         <p:nvPr/>
       </p:nvGrpSpPr>
@@ -7725,7 +7633,13 @@
       </p:grpSpPr>
       <p:sp>
         <p:nvSpPr>
-          <p:cNvPr id="3" name="Subtitle 2"/>
+          <p:cNvPr id="3" name="Subtitle 2">
+            <a:extLst>
+              <a:ext uri="{FF2B5EF4-FFF2-40B4-BE49-F238E27FC236}">
+                <a16:creationId xmlns:a16="http://schemas.microsoft.com/office/drawing/2014/main" id="{99733510-3923-2217-4DE2-9A0D6B61C7AA}"/>
+              </a:ext>
+            </a:extLst>
+          </p:cNvPr>
           <p:cNvSpPr>
             <a:spLocks noGrp="1"/>
           </p:cNvSpPr>
@@ -7788,7 +7702,13 @@
       </p:sp>
       <p:sp>
         <p:nvSpPr>
-          <p:cNvPr id="4" name="TextBox 3"/>
+          <p:cNvPr id="4" name="TextBox 3">
+            <a:extLst>
+              <a:ext uri="{FF2B5EF4-FFF2-40B4-BE49-F238E27FC236}">
+                <a16:creationId xmlns:a16="http://schemas.microsoft.com/office/drawing/2014/main" id="{AEB2B5D7-EB7E-2DC6-06FE-29BB9F8C6B9E}"/>
+              </a:ext>
+            </a:extLst>
+          </p:cNvPr>
           <p:cNvSpPr txBox="1"/>
           <p:nvPr/>
         </p:nvSpPr>
@@ -7814,7 +7734,7 @@
                   <a:schemeClr val="bg1"/>
                 </a:solidFill>
               </a:rPr>
-              <a:t>2/7</a:t>
+              <a:t>7/7</a:t>
             </a:r>
           </a:p>
         </p:txBody>
@@ -7822,7 +7742,7 @@
     </p:spTree>
     <p:extLst>
       <p:ext uri="{BB962C8B-B14F-4D97-AF65-F5344CB8AC3E}">
-        <p14:creationId xmlns:p14="http://schemas.microsoft.com/office/powerpoint/2010/main" val="365095133"/>
+        <p14:creationId xmlns:p14="http://schemas.microsoft.com/office/powerpoint/2010/main" val="3200596202"/>
       </p:ext>
     </p:extLst>
   </p:cSld>
@@ -7861,7 +7781,7 @@
         </p:nvSpPr>
         <p:spPr>
           <a:xfrm>
-            <a:off x="251520" y="764704"/>
+            <a:off x="323528" y="188640"/>
             <a:ext cx="8640960" cy="6480720"/>
           </a:xfrm>
         </p:spPr>
@@ -7871,86 +7791,115 @@
           </a:bodyPr>
           <a:lstStyle/>
           <a:p>
-            <a:r>
-              <a:rPr lang="en-GB" sz="3600" dirty="0">
-                <a:solidFill>
-                  <a:schemeClr val="bg1"/>
-                </a:solidFill>
-              </a:rPr>
-              <a:t>There in the night Gethsemane</a:t>
-            </a:r>
-          </a:p>
-          <a:p>
-            <a:r>
-              <a:rPr lang="en-GB" sz="3600" dirty="0">
-                <a:solidFill>
-                  <a:schemeClr val="bg1"/>
-                </a:solidFill>
-              </a:rPr>
-              <a:t>Before the cross before the nails</a:t>
-            </a:r>
-          </a:p>
-          <a:p>
-            <a:r>
-              <a:rPr lang="en-GB" sz="3600" dirty="0">
-                <a:solidFill>
-                  <a:schemeClr val="bg1"/>
-                </a:solidFill>
-              </a:rPr>
-              <a:t>Overwhelmed alone You prayed</a:t>
-            </a:r>
-          </a:p>
-          <a:p>
-            <a:r>
-              <a:rPr lang="en-GB" sz="3600" dirty="0">
-                <a:solidFill>
-                  <a:schemeClr val="bg1"/>
-                </a:solidFill>
-              </a:rPr>
-              <a:t>You met us in our suffering</a:t>
-            </a:r>
-          </a:p>
-          <a:p>
-            <a:r>
-              <a:rPr lang="en-GB" sz="3600" dirty="0">
-                <a:solidFill>
-                  <a:schemeClr val="bg1"/>
-                </a:solidFill>
-              </a:rPr>
-              <a:t>And bore our shame</a:t>
-            </a:r>
-          </a:p>
-        </p:txBody>
-      </p:sp>
-      <p:sp>
-        <p:nvSpPr>
-          <p:cNvPr id="4" name="TextBox 3"/>
-          <p:cNvSpPr txBox="1"/>
-          <p:nvPr/>
-        </p:nvSpPr>
-        <p:spPr>
-          <a:xfrm>
-            <a:off x="8529729" y="0"/>
-            <a:ext cx="628698" cy="461665"/>
-          </a:xfrm>
-          <a:prstGeom prst="rect">
-            <a:avLst/>
-          </a:prstGeom>
-          <a:noFill/>
-        </p:spPr>
-        <p:txBody>
-          <a:bodyPr wrap="none" rtlCol="0">
-            <a:spAutoFit/>
-          </a:bodyPr>
-          <a:lstStyle/>
-          <a:p>
-            <a:r>
-              <a:rPr lang="en-GB" sz="2400" b="1" dirty="0">
-                <a:solidFill>
-                  <a:schemeClr val="bg1"/>
-                </a:solidFill>
-              </a:rPr>
-              <a:t>3/7</a:t>
+            <a:endParaRPr lang="en-GB" sz="5400" dirty="0">
+              <a:solidFill>
+                <a:schemeClr val="bg1"/>
+              </a:solidFill>
+            </a:endParaRPr>
+          </a:p>
+          <a:p>
+            <a:r>
+              <a:rPr lang="en-GB" sz="4400" b="0" i="0" dirty="0">
+                <a:solidFill>
+                  <a:srgbClr val="00A3E0"/>
+                </a:solidFill>
+                <a:effectLst/>
+                <a:latin typeface="akagi_probook"/>
+              </a:rPr>
+              <a:t>Endless Hallelujah</a:t>
+            </a:r>
+          </a:p>
+          <a:p>
+            <a:br>
+              <a:rPr lang="en-GB" sz="1200" dirty="0">
+                <a:solidFill>
+                  <a:schemeClr val="bg1"/>
+                </a:solidFill>
+              </a:rPr>
+            </a:br>
+            <a:br>
+              <a:rPr lang="en-GB" sz="1200" dirty="0">
+                <a:solidFill>
+                  <a:schemeClr val="bg1"/>
+                </a:solidFill>
+              </a:rPr>
+            </a:br>
+            <a:r>
+              <a:rPr lang="en-GB" sz="1200" dirty="0">
+                <a:solidFill>
+                  <a:schemeClr val="bg1"/>
+                </a:solidFill>
+              </a:rPr>
+              <a:t>CCLI Song # 6016557</a:t>
+            </a:r>
+          </a:p>
+          <a:p>
+            <a:r>
+              <a:rPr lang="en-GB" sz="1200" dirty="0">
+                <a:solidFill>
+                  <a:schemeClr val="bg1"/>
+                </a:solidFill>
+              </a:rPr>
+              <a:t>Chris Tomlin | Jonas Myrin | Matt Redman | Tim </a:t>
+            </a:r>
+            <a:r>
+              <a:rPr lang="en-GB" sz="1200" dirty="0" err="1">
+                <a:solidFill>
+                  <a:schemeClr val="bg1"/>
+                </a:solidFill>
+              </a:rPr>
+              <a:t>Wanstall</a:t>
+            </a:r>
+            <a:endParaRPr lang="en-GB" sz="1200" dirty="0">
+              <a:solidFill>
+                <a:schemeClr val="bg1"/>
+              </a:solidFill>
+            </a:endParaRPr>
+          </a:p>
+          <a:p>
+            <a:r>
+              <a:rPr lang="en-GB" sz="1200" dirty="0">
+                <a:solidFill>
+                  <a:schemeClr val="bg1"/>
+                </a:solidFill>
+              </a:rPr>
+              <a:t>© 2011 Chrysalis Music Ltd.; Atlas Mountain Songs; S. D. G. Publishing; Twelve Lions Music; Worship Together Music; Thankyou Music Ltd</a:t>
+            </a:r>
+          </a:p>
+          <a:p>
+            <a:r>
+              <a:rPr lang="en-GB" sz="1200" dirty="0">
+                <a:solidFill>
+                  <a:schemeClr val="bg1"/>
+                </a:solidFill>
+              </a:rPr>
+              <a:t>For use solely with the </a:t>
+            </a:r>
+            <a:r>
+              <a:rPr lang="en-GB" sz="1200" dirty="0" err="1">
+                <a:solidFill>
+                  <a:schemeClr val="bg1"/>
+                </a:solidFill>
+              </a:rPr>
+              <a:t>SongSelect</a:t>
+            </a:r>
+            <a:r>
+              <a:rPr lang="en-GB" sz="1200" dirty="0">
+                <a:solidFill>
+                  <a:schemeClr val="bg1"/>
+                </a:solidFill>
+              </a:rPr>
+              <a:t>® Terms of Use. All rights reserved. www.ccli.com</a:t>
+            </a:r>
+          </a:p>
+          <a:p>
+            <a:r>
+              <a:rPr lang="en-GB" sz="1200" dirty="0">
+                <a:solidFill>
+                  <a:schemeClr val="bg1"/>
+                </a:solidFill>
+              </a:rPr>
+              <a:t>CCLI Licence No. 33265</a:t>
             </a:r>
           </a:p>
         </p:txBody>
@@ -7958,7 +7907,7 @@
     </p:spTree>
     <p:extLst>
       <p:ext uri="{BB962C8B-B14F-4D97-AF65-F5344CB8AC3E}">
-        <p14:creationId xmlns:p14="http://schemas.microsoft.com/office/powerpoint/2010/main" val="2878598093"/>
+        <p14:creationId xmlns:p14="http://schemas.microsoft.com/office/powerpoint/2010/main" val="743776499"/>
       </p:ext>
     </p:extLst>
   </p:cSld>
@@ -7969,150 +7918,6 @@
 </file>
 
 <file path=ppt/slides/slide36.xml><?xml version="1.0" encoding="utf-8"?>
-<p:sld xmlns:a="http://schemas.openxmlformats.org/drawingml/2006/main" xmlns:r="http://schemas.openxmlformats.org/officeDocument/2006/relationships" xmlns:p="http://schemas.openxmlformats.org/presentationml/2006/main">
-  <p:cSld>
-    <p:spTree>
-      <p:nvGrpSpPr>
-        <p:cNvPr id="1" name="">
-          <a:extLst>
-            <a:ext uri="{FF2B5EF4-FFF2-40B4-BE49-F238E27FC236}">
-              <a16:creationId xmlns:a16="http://schemas.microsoft.com/office/drawing/2014/main" id="{FB6BC496-FC87-8E1E-64AA-1F013CF68738}"/>
-            </a:ext>
-          </a:extLst>
-        </p:cNvPr>
-        <p:cNvGrpSpPr/>
-        <p:nvPr/>
-      </p:nvGrpSpPr>
-      <p:grpSpPr>
-        <a:xfrm>
-          <a:off x="0" y="0"/>
-          <a:ext cx="0" cy="0"/>
-          <a:chOff x="0" y="0"/>
-          <a:chExt cx="0" cy="0"/>
-        </a:xfrm>
-      </p:grpSpPr>
-      <p:sp>
-        <p:nvSpPr>
-          <p:cNvPr id="3" name="Subtitle 2">
-            <a:extLst>
-              <a:ext uri="{FF2B5EF4-FFF2-40B4-BE49-F238E27FC236}">
-                <a16:creationId xmlns:a16="http://schemas.microsoft.com/office/drawing/2014/main" id="{643CC7BE-92CA-0354-ADCB-7ED005CC7E27}"/>
-              </a:ext>
-            </a:extLst>
-          </p:cNvPr>
-          <p:cNvSpPr>
-            <a:spLocks noGrp="1"/>
-          </p:cNvSpPr>
-          <p:nvPr>
-            <p:ph type="subTitle" idx="1"/>
-          </p:nvPr>
-        </p:nvSpPr>
-        <p:spPr>
-          <a:xfrm>
-            <a:off x="251520" y="764704"/>
-            <a:ext cx="8640960" cy="6480720"/>
-          </a:xfrm>
-        </p:spPr>
-        <p:txBody>
-          <a:bodyPr>
-            <a:noAutofit/>
-          </a:bodyPr>
-          <a:lstStyle/>
-          <a:p>
-            <a:r>
-              <a:rPr lang="en-GB" sz="3600" dirty="0">
-                <a:solidFill>
-                  <a:schemeClr val="bg1"/>
-                </a:solidFill>
-              </a:rPr>
-              <a:t>Abide with me abide with me</a:t>
-            </a:r>
-          </a:p>
-          <a:p>
-            <a:r>
-              <a:rPr lang="en-GB" sz="3600" dirty="0">
-                <a:solidFill>
-                  <a:schemeClr val="bg1"/>
-                </a:solidFill>
-              </a:rPr>
-              <a:t>Don't let me fall and don't let go</a:t>
-            </a:r>
-          </a:p>
-          <a:p>
-            <a:r>
-              <a:rPr lang="en-GB" sz="3600" dirty="0">
-                <a:solidFill>
-                  <a:schemeClr val="bg1"/>
-                </a:solidFill>
-              </a:rPr>
-              <a:t>Walk with me and never leave</a:t>
-            </a:r>
-          </a:p>
-          <a:p>
-            <a:r>
-              <a:rPr lang="en-GB" sz="3600" dirty="0">
-                <a:solidFill>
-                  <a:schemeClr val="bg1"/>
-                </a:solidFill>
-              </a:rPr>
-              <a:t>Ever close God abide with me</a:t>
-            </a:r>
-          </a:p>
-        </p:txBody>
-      </p:sp>
-      <p:sp>
-        <p:nvSpPr>
-          <p:cNvPr id="4" name="TextBox 3">
-            <a:extLst>
-              <a:ext uri="{FF2B5EF4-FFF2-40B4-BE49-F238E27FC236}">
-                <a16:creationId xmlns:a16="http://schemas.microsoft.com/office/drawing/2014/main" id="{ED4041DC-0661-6DFD-ED4A-0A5AC9565E29}"/>
-              </a:ext>
-            </a:extLst>
-          </p:cNvPr>
-          <p:cNvSpPr txBox="1"/>
-          <p:nvPr/>
-        </p:nvSpPr>
-        <p:spPr>
-          <a:xfrm>
-            <a:off x="8529729" y="0"/>
-            <a:ext cx="628698" cy="461665"/>
-          </a:xfrm>
-          <a:prstGeom prst="rect">
-            <a:avLst/>
-          </a:prstGeom>
-          <a:noFill/>
-        </p:spPr>
-        <p:txBody>
-          <a:bodyPr wrap="none" rtlCol="0">
-            <a:spAutoFit/>
-          </a:bodyPr>
-          <a:lstStyle/>
-          <a:p>
-            <a:r>
-              <a:rPr lang="en-GB" sz="2400" b="1" dirty="0">
-                <a:solidFill>
-                  <a:schemeClr val="bg1"/>
-                </a:solidFill>
-              </a:rPr>
-              <a:t>4/7</a:t>
-            </a:r>
-          </a:p>
-        </p:txBody>
-      </p:sp>
-    </p:spTree>
-    <p:extLst>
-      <p:ext uri="{BB962C8B-B14F-4D97-AF65-F5344CB8AC3E}">
-        <p14:creationId xmlns:p14="http://schemas.microsoft.com/office/powerpoint/2010/main" val="2865740119"/>
-      </p:ext>
-    </p:extLst>
-  </p:cSld>
-  <p:clrMapOvr>
-    <a:masterClrMapping/>
-  </p:clrMapOvr>
-</p:sld>
-</file>
-
-<file path=ppt/slides/slide37.xml><?xml version="1.0" encoding="utf-8"?>
 <p:sld xmlns:a="http://schemas.openxmlformats.org/drawingml/2006/main" xmlns:r="http://schemas.openxmlformats.org/officeDocument/2006/relationships" xmlns:p="http://schemas.openxmlformats.org/presentationml/2006/main">
   <p:cSld>
     <p:spTree>
@@ -8141,7 +7946,7 @@
         </p:nvSpPr>
         <p:spPr>
           <a:xfrm>
-            <a:off x="395536" y="764704"/>
+            <a:off x="0" y="692696"/>
             <a:ext cx="8640960" cy="6480720"/>
           </a:xfrm>
         </p:spPr>
@@ -8157,37 +7962,65 @@
                   <a:schemeClr val="bg1"/>
                 </a:solidFill>
               </a:rPr>
-              <a:t>Oh love that will not ever let me go</a:t>
-            </a:r>
-          </a:p>
-          <a:p>
-            <a:r>
-              <a:rPr lang="en-GB" sz="3600" dirty="0">
-                <a:solidFill>
-                  <a:schemeClr val="bg1"/>
-                </a:solidFill>
-              </a:rPr>
-              <a:t>Love that will not ever let me go</a:t>
-            </a:r>
-          </a:p>
-          <a:p>
-            <a:r>
-              <a:rPr lang="en-GB" sz="3600" dirty="0">
-                <a:solidFill>
-                  <a:schemeClr val="bg1"/>
-                </a:solidFill>
-              </a:rPr>
-              <a:t>You never let me go</a:t>
-            </a:r>
-          </a:p>
-          <a:p>
-            <a:r>
-              <a:rPr lang="en-GB" sz="3600" dirty="0">
-                <a:solidFill>
-                  <a:schemeClr val="bg1"/>
-                </a:solidFill>
-              </a:rPr>
-              <a:t>Love that will not ever let me go</a:t>
+              <a:t>When I stand before Your throne</a:t>
+            </a:r>
+          </a:p>
+          <a:p>
+            <a:r>
+              <a:rPr lang="en-GB" sz="3600" dirty="0">
+                <a:solidFill>
+                  <a:schemeClr val="bg1"/>
+                </a:solidFill>
+              </a:rPr>
+              <a:t>Dressed in glory not my own</a:t>
+            </a:r>
+          </a:p>
+          <a:p>
+            <a:r>
+              <a:rPr lang="en-GB" sz="3600" dirty="0">
+                <a:solidFill>
+                  <a:schemeClr val="bg1"/>
+                </a:solidFill>
+              </a:rPr>
+              <a:t>What a joy I'll sing of on that day</a:t>
+            </a:r>
+          </a:p>
+          <a:p>
+            <a:r>
+              <a:rPr lang="en-GB" sz="3600" dirty="0">
+                <a:solidFill>
+                  <a:schemeClr val="bg1"/>
+                </a:solidFill>
+              </a:rPr>
+              <a:t>No more tears or broken dreams</a:t>
+            </a:r>
+          </a:p>
+          <a:p>
+            <a:r>
+              <a:rPr lang="en-GB" sz="3600" dirty="0">
+                <a:solidFill>
+                  <a:schemeClr val="bg1"/>
+                </a:solidFill>
+              </a:rPr>
+              <a:t>Forgotten is the minor key</a:t>
+            </a:r>
+          </a:p>
+          <a:p>
+            <a:r>
+              <a:rPr lang="en-GB" sz="3600" dirty="0" err="1">
+                <a:solidFill>
+                  <a:schemeClr val="bg1"/>
+                </a:solidFill>
+              </a:rPr>
+              <a:t>Ev'rything</a:t>
+            </a:r>
+            <a:r>
+              <a:rPr lang="en-GB" sz="3600" dirty="0">
+                <a:solidFill>
+                  <a:schemeClr val="bg1"/>
+                </a:solidFill>
+              </a:rPr>
+              <a:t> as it was meant to be</a:t>
             </a:r>
           </a:p>
         </p:txBody>
@@ -8220,7 +8053,7 @@
                   <a:schemeClr val="bg1"/>
                 </a:solidFill>
               </a:rPr>
-              <a:t>5/7</a:t>
+              <a:t>1/8</a:t>
             </a:r>
           </a:p>
         </p:txBody>
@@ -8228,7 +8061,151 @@
     </p:spTree>
     <p:extLst>
       <p:ext uri="{BB962C8B-B14F-4D97-AF65-F5344CB8AC3E}">
-        <p14:creationId xmlns:p14="http://schemas.microsoft.com/office/powerpoint/2010/main" val="323061136"/>
+        <p14:creationId xmlns:p14="http://schemas.microsoft.com/office/powerpoint/2010/main" val="3281651247"/>
+      </p:ext>
+    </p:extLst>
+  </p:cSld>
+  <p:clrMapOvr>
+    <a:masterClrMapping/>
+  </p:clrMapOvr>
+</p:sld>
+</file>
+
+<file path=ppt/slides/slide37.xml><?xml version="1.0" encoding="utf-8"?>
+<p:sld xmlns:a="http://schemas.openxmlformats.org/drawingml/2006/main" xmlns:r="http://schemas.openxmlformats.org/officeDocument/2006/relationships" xmlns:p="http://schemas.openxmlformats.org/presentationml/2006/main">
+  <p:cSld>
+    <p:spTree>
+      <p:nvGrpSpPr>
+        <p:cNvPr id="1" name="">
+          <a:extLst>
+            <a:ext uri="{FF2B5EF4-FFF2-40B4-BE49-F238E27FC236}">
+              <a16:creationId xmlns:a16="http://schemas.microsoft.com/office/drawing/2014/main" id="{CF2E76D7-371A-4EB5-412B-61D0D217E0D2}"/>
+            </a:ext>
+          </a:extLst>
+        </p:cNvPr>
+        <p:cNvGrpSpPr/>
+        <p:nvPr/>
+      </p:nvGrpSpPr>
+      <p:grpSpPr>
+        <a:xfrm>
+          <a:off x="0" y="0"/>
+          <a:ext cx="0" cy="0"/>
+          <a:chOff x="0" y="0"/>
+          <a:chExt cx="0" cy="0"/>
+        </a:xfrm>
+      </p:grpSpPr>
+      <p:sp>
+        <p:nvSpPr>
+          <p:cNvPr id="3" name="Subtitle 2">
+            <a:extLst>
+              <a:ext uri="{FF2B5EF4-FFF2-40B4-BE49-F238E27FC236}">
+                <a16:creationId xmlns:a16="http://schemas.microsoft.com/office/drawing/2014/main" id="{DC2FD82B-E55F-55A4-77FE-466169404257}"/>
+              </a:ext>
+            </a:extLst>
+          </p:cNvPr>
+          <p:cNvSpPr>
+            <a:spLocks noGrp="1"/>
+          </p:cNvSpPr>
+          <p:nvPr>
+            <p:ph type="subTitle" idx="1"/>
+          </p:nvPr>
+        </p:nvSpPr>
+        <p:spPr>
+          <a:xfrm>
+            <a:off x="0" y="692696"/>
+            <a:ext cx="8640960" cy="6480720"/>
+          </a:xfrm>
+        </p:spPr>
+        <p:txBody>
+          <a:bodyPr>
+            <a:noAutofit/>
+          </a:bodyPr>
+          <a:lstStyle/>
+          <a:p>
+            <a:r>
+              <a:rPr lang="en-GB" sz="3600" dirty="0">
+                <a:solidFill>
+                  <a:schemeClr val="bg1"/>
+                </a:solidFill>
+              </a:rPr>
+              <a:t>And we will worship, worship</a:t>
+            </a:r>
+          </a:p>
+          <a:p>
+            <a:r>
+              <a:rPr lang="en-GB" sz="3600" dirty="0">
+                <a:solidFill>
+                  <a:schemeClr val="bg1"/>
+                </a:solidFill>
+              </a:rPr>
+              <a:t>Forever in Your presence we will sing</a:t>
+            </a:r>
+          </a:p>
+          <a:p>
+            <a:r>
+              <a:rPr lang="en-GB" sz="3600" dirty="0">
+                <a:solidFill>
+                  <a:schemeClr val="bg1"/>
+                </a:solidFill>
+              </a:rPr>
+              <a:t>We will worship, worship You</a:t>
+            </a:r>
+          </a:p>
+          <a:p>
+            <a:r>
+              <a:rPr lang="en-GB" sz="3600" dirty="0">
+                <a:solidFill>
+                  <a:schemeClr val="bg1"/>
+                </a:solidFill>
+              </a:rPr>
+              <a:t>An endless hallelujah to the King</a:t>
+            </a:r>
+          </a:p>
+        </p:txBody>
+      </p:sp>
+      <p:sp>
+        <p:nvSpPr>
+          <p:cNvPr id="4" name="TextBox 3">
+            <a:extLst>
+              <a:ext uri="{FF2B5EF4-FFF2-40B4-BE49-F238E27FC236}">
+                <a16:creationId xmlns:a16="http://schemas.microsoft.com/office/drawing/2014/main" id="{F2F7189C-71E5-2F7D-459A-71EE182BBC70}"/>
+              </a:ext>
+            </a:extLst>
+          </p:cNvPr>
+          <p:cNvSpPr txBox="1"/>
+          <p:nvPr/>
+        </p:nvSpPr>
+        <p:spPr>
+          <a:xfrm>
+            <a:off x="8529729" y="0"/>
+            <a:ext cx="628698" cy="461665"/>
+          </a:xfrm>
+          <a:prstGeom prst="rect">
+            <a:avLst/>
+          </a:prstGeom>
+          <a:noFill/>
+        </p:spPr>
+        <p:txBody>
+          <a:bodyPr wrap="none" rtlCol="0">
+            <a:spAutoFit/>
+          </a:bodyPr>
+          <a:lstStyle/>
+          <a:p>
+            <a:r>
+              <a:rPr lang="en-GB" sz="2400" b="1" dirty="0">
+                <a:solidFill>
+                  <a:schemeClr val="bg1"/>
+                </a:solidFill>
+              </a:rPr>
+              <a:t>2/8</a:t>
+            </a:r>
+          </a:p>
+        </p:txBody>
+      </p:sp>
+    </p:spTree>
+    <p:extLst>
+      <p:ext uri="{BB962C8B-B14F-4D97-AF65-F5344CB8AC3E}">
+        <p14:creationId xmlns:p14="http://schemas.microsoft.com/office/powerpoint/2010/main" val="2673392440"/>
       </p:ext>
     </p:extLst>
   </p:cSld>
@@ -8243,7 +8220,13 @@
   <p:cSld>
     <p:spTree>
       <p:nvGrpSpPr>
-        <p:cNvPr id="1" name=""/>
+        <p:cNvPr id="1" name="">
+          <a:extLst>
+            <a:ext uri="{FF2B5EF4-FFF2-40B4-BE49-F238E27FC236}">
+              <a16:creationId xmlns:a16="http://schemas.microsoft.com/office/drawing/2014/main" id="{1F4268A6-FCF8-9407-99CE-A6F7B623C4FC}"/>
+            </a:ext>
+          </a:extLst>
+        </p:cNvPr>
         <p:cNvGrpSpPr/>
         <p:nvPr/>
       </p:nvGrpSpPr>
@@ -8257,7 +8240,13 @@
       </p:grpSpPr>
       <p:sp>
         <p:nvSpPr>
-          <p:cNvPr id="3" name="Subtitle 2"/>
+          <p:cNvPr id="3" name="Subtitle 2">
+            <a:extLst>
+              <a:ext uri="{FF2B5EF4-FFF2-40B4-BE49-F238E27FC236}">
+                <a16:creationId xmlns:a16="http://schemas.microsoft.com/office/drawing/2014/main" id="{E276D78E-1E0E-481E-0E41-158A748F8982}"/>
+              </a:ext>
+            </a:extLst>
+          </p:cNvPr>
           <p:cNvSpPr>
             <a:spLocks noGrp="1"/>
           </p:cNvSpPr>
@@ -8267,7 +8256,7 @@
         </p:nvSpPr>
         <p:spPr>
           <a:xfrm>
-            <a:off x="231698" y="764704"/>
+            <a:off x="0" y="692696"/>
             <a:ext cx="8640960" cy="6480720"/>
           </a:xfrm>
         </p:spPr>
@@ -8283,34 +8272,78 @@
                   <a:schemeClr val="bg1"/>
                 </a:solidFill>
               </a:rPr>
-              <a:t>And up ahead eternity</a:t>
-            </a:r>
-          </a:p>
-          <a:p>
-            <a:r>
-              <a:rPr lang="en-GB" sz="3600" dirty="0">
-                <a:solidFill>
-                  <a:schemeClr val="bg1"/>
-                </a:solidFill>
-              </a:rPr>
-              <a:t>We'll weep no more we'll sing for joy</a:t>
-            </a:r>
-          </a:p>
-          <a:p>
-            <a:r>
-              <a:rPr lang="en-GB" sz="3600" dirty="0">
-                <a:solidFill>
-                  <a:schemeClr val="bg1"/>
-                </a:solidFill>
-              </a:rPr>
-              <a:t>Abide with me</a:t>
-            </a:r>
-          </a:p>
-        </p:txBody>
-      </p:sp>
-      <p:sp>
-        <p:nvSpPr>
-          <p:cNvPr id="4" name="TextBox 3"/>
+              <a:t>I will see You as You are</a:t>
+            </a:r>
+          </a:p>
+          <a:p>
+            <a:r>
+              <a:rPr lang="en-GB" sz="3600" dirty="0">
+                <a:solidFill>
+                  <a:schemeClr val="bg1"/>
+                </a:solidFill>
+              </a:rPr>
+              <a:t>Love You with un-sinning heart</a:t>
+            </a:r>
+          </a:p>
+          <a:p>
+            <a:r>
+              <a:rPr lang="en-GB" sz="3600" dirty="0">
+                <a:solidFill>
+                  <a:schemeClr val="bg1"/>
+                </a:solidFill>
+              </a:rPr>
+              <a:t>See how much You paid to bring me home</a:t>
+            </a:r>
+          </a:p>
+          <a:p>
+            <a:r>
+              <a:rPr lang="en-GB" sz="3600" dirty="0">
+                <a:solidFill>
+                  <a:schemeClr val="bg1"/>
+                </a:solidFill>
+              </a:rPr>
+              <a:t>Not 'til then Lord shall I know</a:t>
+            </a:r>
+          </a:p>
+          <a:p>
+            <a:r>
+              <a:rPr lang="en-GB" sz="3600" dirty="0">
+                <a:solidFill>
+                  <a:schemeClr val="bg1"/>
+                </a:solidFill>
+              </a:rPr>
+              <a:t>Not 'til then how much I owe</a:t>
+            </a:r>
+          </a:p>
+          <a:p>
+            <a:r>
+              <a:rPr lang="en-GB" sz="3600" dirty="0" err="1">
+                <a:solidFill>
+                  <a:schemeClr val="bg1"/>
+                </a:solidFill>
+              </a:rPr>
+              <a:t>Ev'rything</a:t>
+            </a:r>
+            <a:r>
+              <a:rPr lang="en-GB" sz="3600" dirty="0">
+                <a:solidFill>
+                  <a:schemeClr val="bg1"/>
+                </a:solidFill>
+              </a:rPr>
+              <a:t> I am before Your throne</a:t>
+            </a:r>
+          </a:p>
+        </p:txBody>
+      </p:sp>
+      <p:sp>
+        <p:nvSpPr>
+          <p:cNvPr id="4" name="TextBox 3">
+            <a:extLst>
+              <a:ext uri="{FF2B5EF4-FFF2-40B4-BE49-F238E27FC236}">
+                <a16:creationId xmlns:a16="http://schemas.microsoft.com/office/drawing/2014/main" id="{60AA8FDC-C9D5-0635-FD78-B0B35BB31994}"/>
+              </a:ext>
+            </a:extLst>
+          </p:cNvPr>
           <p:cNvSpPr txBox="1"/>
           <p:nvPr/>
         </p:nvSpPr>
@@ -8336,7 +8369,7 @@
                   <a:schemeClr val="bg1"/>
                 </a:solidFill>
               </a:rPr>
-              <a:t>6/7</a:t>
+              <a:t>3/8</a:t>
             </a:r>
           </a:p>
         </p:txBody>
@@ -8344,7 +8377,7 @@
     </p:spTree>
     <p:extLst>
       <p:ext uri="{BB962C8B-B14F-4D97-AF65-F5344CB8AC3E}">
-        <p14:creationId xmlns:p14="http://schemas.microsoft.com/office/powerpoint/2010/main" val="3491371723"/>
+        <p14:creationId xmlns:p14="http://schemas.microsoft.com/office/powerpoint/2010/main" val="2849577497"/>
       </p:ext>
     </p:extLst>
   </p:cSld>
@@ -8362,7 +8395,7 @@
         <p:cNvPr id="1" name="">
           <a:extLst>
             <a:ext uri="{FF2B5EF4-FFF2-40B4-BE49-F238E27FC236}">
-              <a16:creationId xmlns:a16="http://schemas.microsoft.com/office/drawing/2014/main" id="{F00E7D48-1168-DE63-5A45-FEAF7915DFF7}"/>
+              <a16:creationId xmlns:a16="http://schemas.microsoft.com/office/drawing/2014/main" id="{169CB519-994A-5E94-5A98-54ED7689416B}"/>
             </a:ext>
           </a:extLst>
         </p:cNvPr>
@@ -8382,7 +8415,7 @@
           <p:cNvPr id="3" name="Subtitle 2">
             <a:extLst>
               <a:ext uri="{FF2B5EF4-FFF2-40B4-BE49-F238E27FC236}">
-                <a16:creationId xmlns:a16="http://schemas.microsoft.com/office/drawing/2014/main" id="{99733510-3923-2217-4DE2-9A0D6B61C7AA}"/>
+                <a16:creationId xmlns:a16="http://schemas.microsoft.com/office/drawing/2014/main" id="{D5F9ECA2-C86C-64D3-6CED-77CEBDF4E3BE}"/>
               </a:ext>
             </a:extLst>
           </p:cNvPr>
@@ -8395,7 +8428,7 @@
         </p:nvSpPr>
         <p:spPr>
           <a:xfrm>
-            <a:off x="251520" y="764704"/>
+            <a:off x="0" y="692696"/>
             <a:ext cx="8640960" cy="6480720"/>
           </a:xfrm>
         </p:spPr>
@@ -8411,37 +8444,37 @@
                   <a:schemeClr val="bg1"/>
                 </a:solidFill>
               </a:rPr>
-              <a:t>Abide with me abide with me</a:t>
-            </a:r>
-          </a:p>
-          <a:p>
-            <a:r>
-              <a:rPr lang="en-GB" sz="3600" dirty="0">
-                <a:solidFill>
-                  <a:schemeClr val="bg1"/>
-                </a:solidFill>
-              </a:rPr>
-              <a:t>Don't let me fall and don't let go</a:t>
-            </a:r>
-          </a:p>
-          <a:p>
-            <a:r>
-              <a:rPr lang="en-GB" sz="3600" dirty="0">
-                <a:solidFill>
-                  <a:schemeClr val="bg1"/>
-                </a:solidFill>
-              </a:rPr>
-              <a:t>Walk with me and never leave</a:t>
-            </a:r>
-          </a:p>
-          <a:p>
-            <a:r>
-              <a:rPr lang="en-GB" sz="3600" dirty="0">
-                <a:solidFill>
-                  <a:schemeClr val="bg1"/>
-                </a:solidFill>
-              </a:rPr>
-              <a:t>Ever close God abide with me</a:t>
+              <a:t>And we will worship, worship</a:t>
+            </a:r>
+          </a:p>
+          <a:p>
+            <a:r>
+              <a:rPr lang="en-GB" sz="3600" dirty="0">
+                <a:solidFill>
+                  <a:schemeClr val="bg1"/>
+                </a:solidFill>
+              </a:rPr>
+              <a:t>Forever in Your presence we will sing</a:t>
+            </a:r>
+          </a:p>
+          <a:p>
+            <a:r>
+              <a:rPr lang="en-GB" sz="3600" dirty="0">
+                <a:solidFill>
+                  <a:schemeClr val="bg1"/>
+                </a:solidFill>
+              </a:rPr>
+              <a:t>We will worship, worship You</a:t>
+            </a:r>
+          </a:p>
+          <a:p>
+            <a:r>
+              <a:rPr lang="en-GB" sz="3600" dirty="0">
+                <a:solidFill>
+                  <a:schemeClr val="bg1"/>
+                </a:solidFill>
+              </a:rPr>
+              <a:t>An endless hallelujah to the King</a:t>
             </a:r>
           </a:p>
         </p:txBody>
@@ -8451,7 +8484,7 @@
           <p:cNvPr id="4" name="TextBox 3">
             <a:extLst>
               <a:ext uri="{FF2B5EF4-FFF2-40B4-BE49-F238E27FC236}">
-                <a16:creationId xmlns:a16="http://schemas.microsoft.com/office/drawing/2014/main" id="{AEB2B5D7-EB7E-2DC6-06FE-29BB9F8C6B9E}"/>
+                <a16:creationId xmlns:a16="http://schemas.microsoft.com/office/drawing/2014/main" id="{E75FB08D-5770-5319-3C96-100CF7F6AFD0}"/>
               </a:ext>
             </a:extLst>
           </p:cNvPr>
@@ -8480,7 +8513,7 @@
                   <a:schemeClr val="bg1"/>
                 </a:solidFill>
               </a:rPr>
-              <a:t>7/7</a:t>
+              <a:t>4/8</a:t>
             </a:r>
           </a:p>
         </p:txBody>
@@ -8488,7 +8521,7 @@
     </p:spTree>
     <p:extLst>
       <p:ext uri="{BB962C8B-B14F-4D97-AF65-F5344CB8AC3E}">
-        <p14:creationId xmlns:p14="http://schemas.microsoft.com/office/powerpoint/2010/main" val="3200596202"/>
+        <p14:creationId xmlns:p14="http://schemas.microsoft.com/office/powerpoint/2010/main" val="2624784699"/>
       </p:ext>
     </p:extLst>
   </p:cSld>
@@ -8639,785 +8672,6 @@
   <p:cSld>
     <p:spTree>
       <p:nvGrpSpPr>
-        <p:cNvPr id="1" name=""/>
-        <p:cNvGrpSpPr/>
-        <p:nvPr/>
-      </p:nvGrpSpPr>
-      <p:grpSpPr>
-        <a:xfrm>
-          <a:off x="0" y="0"/>
-          <a:ext cx="0" cy="0"/>
-          <a:chOff x="0" y="0"/>
-          <a:chExt cx="0" cy="0"/>
-        </a:xfrm>
-      </p:grpSpPr>
-      <p:sp>
-        <p:nvSpPr>
-          <p:cNvPr id="3" name="Subtitle 2"/>
-          <p:cNvSpPr>
-            <a:spLocks noGrp="1"/>
-          </p:cNvSpPr>
-          <p:nvPr>
-            <p:ph type="subTitle" idx="1"/>
-          </p:nvPr>
-        </p:nvSpPr>
-        <p:spPr>
-          <a:xfrm>
-            <a:off x="323528" y="188640"/>
-            <a:ext cx="8640960" cy="6480720"/>
-          </a:xfrm>
-        </p:spPr>
-        <p:txBody>
-          <a:bodyPr>
-            <a:noAutofit/>
-          </a:bodyPr>
-          <a:lstStyle/>
-          <a:p>
-            <a:endParaRPr lang="en-GB" sz="5400" dirty="0">
-              <a:solidFill>
-                <a:schemeClr val="bg1"/>
-              </a:solidFill>
-            </a:endParaRPr>
-          </a:p>
-          <a:p>
-            <a:r>
-              <a:rPr lang="en-GB" sz="4400" b="0" i="0" dirty="0">
-                <a:solidFill>
-                  <a:srgbClr val="00A3E0"/>
-                </a:solidFill>
-                <a:effectLst/>
-                <a:latin typeface="akagi_probook"/>
-              </a:rPr>
-              <a:t>Endless Hallelujah</a:t>
-            </a:r>
-          </a:p>
-          <a:p>
-            <a:br>
-              <a:rPr lang="en-GB" sz="1200" dirty="0">
-                <a:solidFill>
-                  <a:schemeClr val="bg1"/>
-                </a:solidFill>
-              </a:rPr>
-            </a:br>
-            <a:br>
-              <a:rPr lang="en-GB" sz="1200" dirty="0">
-                <a:solidFill>
-                  <a:schemeClr val="bg1"/>
-                </a:solidFill>
-              </a:rPr>
-            </a:br>
-            <a:r>
-              <a:rPr lang="en-GB" sz="1200" dirty="0">
-                <a:solidFill>
-                  <a:schemeClr val="bg1"/>
-                </a:solidFill>
-              </a:rPr>
-              <a:t>CCLI Song # 6016557</a:t>
-            </a:r>
-          </a:p>
-          <a:p>
-            <a:r>
-              <a:rPr lang="en-GB" sz="1200" dirty="0">
-                <a:solidFill>
-                  <a:schemeClr val="bg1"/>
-                </a:solidFill>
-              </a:rPr>
-              <a:t>Chris Tomlin | Jonas Myrin | Matt Redman | Tim </a:t>
-            </a:r>
-            <a:r>
-              <a:rPr lang="en-GB" sz="1200" dirty="0" err="1">
-                <a:solidFill>
-                  <a:schemeClr val="bg1"/>
-                </a:solidFill>
-              </a:rPr>
-              <a:t>Wanstall</a:t>
-            </a:r>
-            <a:endParaRPr lang="en-GB" sz="1200" dirty="0">
-              <a:solidFill>
-                <a:schemeClr val="bg1"/>
-              </a:solidFill>
-            </a:endParaRPr>
-          </a:p>
-          <a:p>
-            <a:r>
-              <a:rPr lang="en-GB" sz="1200" dirty="0">
-                <a:solidFill>
-                  <a:schemeClr val="bg1"/>
-                </a:solidFill>
-              </a:rPr>
-              <a:t>© 2011 Chrysalis Music Ltd.; Atlas Mountain Songs; S. D. G. Publishing; Twelve Lions Music; Worship Together Music; Thankyou Music Ltd</a:t>
-            </a:r>
-          </a:p>
-          <a:p>
-            <a:r>
-              <a:rPr lang="en-GB" sz="1200" dirty="0">
-                <a:solidFill>
-                  <a:schemeClr val="bg1"/>
-                </a:solidFill>
-              </a:rPr>
-              <a:t>For use solely with the </a:t>
-            </a:r>
-            <a:r>
-              <a:rPr lang="en-GB" sz="1200" dirty="0" err="1">
-                <a:solidFill>
-                  <a:schemeClr val="bg1"/>
-                </a:solidFill>
-              </a:rPr>
-              <a:t>SongSelect</a:t>
-            </a:r>
-            <a:r>
-              <a:rPr lang="en-GB" sz="1200" dirty="0">
-                <a:solidFill>
-                  <a:schemeClr val="bg1"/>
-                </a:solidFill>
-              </a:rPr>
-              <a:t>® Terms of Use. All rights reserved. www.ccli.com</a:t>
-            </a:r>
-          </a:p>
-          <a:p>
-            <a:r>
-              <a:rPr lang="en-GB" sz="1200" dirty="0">
-                <a:solidFill>
-                  <a:schemeClr val="bg1"/>
-                </a:solidFill>
-              </a:rPr>
-              <a:t>CCLI Licence No. 33265</a:t>
-            </a:r>
-          </a:p>
-        </p:txBody>
-      </p:sp>
-    </p:spTree>
-    <p:extLst>
-      <p:ext uri="{BB962C8B-B14F-4D97-AF65-F5344CB8AC3E}">
-        <p14:creationId xmlns:p14="http://schemas.microsoft.com/office/powerpoint/2010/main" val="743776499"/>
-      </p:ext>
-    </p:extLst>
-  </p:cSld>
-  <p:clrMapOvr>
-    <a:masterClrMapping/>
-  </p:clrMapOvr>
-</p:sld>
-</file>
-
-<file path=ppt/slides/slide41.xml><?xml version="1.0" encoding="utf-8"?>
-<p:sld xmlns:a="http://schemas.openxmlformats.org/drawingml/2006/main" xmlns:r="http://schemas.openxmlformats.org/officeDocument/2006/relationships" xmlns:p="http://schemas.openxmlformats.org/presentationml/2006/main">
-  <p:cSld>
-    <p:spTree>
-      <p:nvGrpSpPr>
-        <p:cNvPr id="1" name=""/>
-        <p:cNvGrpSpPr/>
-        <p:nvPr/>
-      </p:nvGrpSpPr>
-      <p:grpSpPr>
-        <a:xfrm>
-          <a:off x="0" y="0"/>
-          <a:ext cx="0" cy="0"/>
-          <a:chOff x="0" y="0"/>
-          <a:chExt cx="0" cy="0"/>
-        </a:xfrm>
-      </p:grpSpPr>
-      <p:sp>
-        <p:nvSpPr>
-          <p:cNvPr id="3" name="Subtitle 2"/>
-          <p:cNvSpPr>
-            <a:spLocks noGrp="1"/>
-          </p:cNvSpPr>
-          <p:nvPr>
-            <p:ph type="subTitle" idx="1"/>
-          </p:nvPr>
-        </p:nvSpPr>
-        <p:spPr>
-          <a:xfrm>
-            <a:off x="0" y="692696"/>
-            <a:ext cx="8640960" cy="6480720"/>
-          </a:xfrm>
-        </p:spPr>
-        <p:txBody>
-          <a:bodyPr>
-            <a:noAutofit/>
-          </a:bodyPr>
-          <a:lstStyle/>
-          <a:p>
-            <a:r>
-              <a:rPr lang="en-GB" sz="3600" dirty="0">
-                <a:solidFill>
-                  <a:schemeClr val="bg1"/>
-                </a:solidFill>
-              </a:rPr>
-              <a:t>When I stand before Your throne</a:t>
-            </a:r>
-          </a:p>
-          <a:p>
-            <a:r>
-              <a:rPr lang="en-GB" sz="3600" dirty="0">
-                <a:solidFill>
-                  <a:schemeClr val="bg1"/>
-                </a:solidFill>
-              </a:rPr>
-              <a:t>Dressed in glory not my own</a:t>
-            </a:r>
-          </a:p>
-          <a:p>
-            <a:r>
-              <a:rPr lang="en-GB" sz="3600" dirty="0">
-                <a:solidFill>
-                  <a:schemeClr val="bg1"/>
-                </a:solidFill>
-              </a:rPr>
-              <a:t>What a joy I'll sing of on that day</a:t>
-            </a:r>
-          </a:p>
-          <a:p>
-            <a:r>
-              <a:rPr lang="en-GB" sz="3600" dirty="0">
-                <a:solidFill>
-                  <a:schemeClr val="bg1"/>
-                </a:solidFill>
-              </a:rPr>
-              <a:t>No more tears or broken dreams</a:t>
-            </a:r>
-          </a:p>
-          <a:p>
-            <a:r>
-              <a:rPr lang="en-GB" sz="3600" dirty="0">
-                <a:solidFill>
-                  <a:schemeClr val="bg1"/>
-                </a:solidFill>
-              </a:rPr>
-              <a:t>Forgotten is the minor key</a:t>
-            </a:r>
-          </a:p>
-          <a:p>
-            <a:r>
-              <a:rPr lang="en-GB" sz="3600" dirty="0" err="1">
-                <a:solidFill>
-                  <a:schemeClr val="bg1"/>
-                </a:solidFill>
-              </a:rPr>
-              <a:t>Ev'rything</a:t>
-            </a:r>
-            <a:r>
-              <a:rPr lang="en-GB" sz="3600" dirty="0">
-                <a:solidFill>
-                  <a:schemeClr val="bg1"/>
-                </a:solidFill>
-              </a:rPr>
-              <a:t> as it was meant to be</a:t>
-            </a:r>
-          </a:p>
-        </p:txBody>
-      </p:sp>
-      <p:sp>
-        <p:nvSpPr>
-          <p:cNvPr id="4" name="TextBox 3"/>
-          <p:cNvSpPr txBox="1"/>
-          <p:nvPr/>
-        </p:nvSpPr>
-        <p:spPr>
-          <a:xfrm>
-            <a:off x="8529729" y="0"/>
-            <a:ext cx="628698" cy="461665"/>
-          </a:xfrm>
-          <a:prstGeom prst="rect">
-            <a:avLst/>
-          </a:prstGeom>
-          <a:noFill/>
-        </p:spPr>
-        <p:txBody>
-          <a:bodyPr wrap="none" rtlCol="0">
-            <a:spAutoFit/>
-          </a:bodyPr>
-          <a:lstStyle/>
-          <a:p>
-            <a:r>
-              <a:rPr lang="en-GB" sz="2400" b="1" dirty="0">
-                <a:solidFill>
-                  <a:schemeClr val="bg1"/>
-                </a:solidFill>
-              </a:rPr>
-              <a:t>1/8</a:t>
-            </a:r>
-          </a:p>
-        </p:txBody>
-      </p:sp>
-    </p:spTree>
-    <p:extLst>
-      <p:ext uri="{BB962C8B-B14F-4D97-AF65-F5344CB8AC3E}">
-        <p14:creationId xmlns:p14="http://schemas.microsoft.com/office/powerpoint/2010/main" val="3281651247"/>
-      </p:ext>
-    </p:extLst>
-  </p:cSld>
-  <p:clrMapOvr>
-    <a:masterClrMapping/>
-  </p:clrMapOvr>
-</p:sld>
-</file>
-
-<file path=ppt/slides/slide42.xml><?xml version="1.0" encoding="utf-8"?>
-<p:sld xmlns:a="http://schemas.openxmlformats.org/drawingml/2006/main" xmlns:r="http://schemas.openxmlformats.org/officeDocument/2006/relationships" xmlns:p="http://schemas.openxmlformats.org/presentationml/2006/main">
-  <p:cSld>
-    <p:spTree>
-      <p:nvGrpSpPr>
-        <p:cNvPr id="1" name="">
-          <a:extLst>
-            <a:ext uri="{FF2B5EF4-FFF2-40B4-BE49-F238E27FC236}">
-              <a16:creationId xmlns:a16="http://schemas.microsoft.com/office/drawing/2014/main" id="{CF2E76D7-371A-4EB5-412B-61D0D217E0D2}"/>
-            </a:ext>
-          </a:extLst>
-        </p:cNvPr>
-        <p:cNvGrpSpPr/>
-        <p:nvPr/>
-      </p:nvGrpSpPr>
-      <p:grpSpPr>
-        <a:xfrm>
-          <a:off x="0" y="0"/>
-          <a:ext cx="0" cy="0"/>
-          <a:chOff x="0" y="0"/>
-          <a:chExt cx="0" cy="0"/>
-        </a:xfrm>
-      </p:grpSpPr>
-      <p:sp>
-        <p:nvSpPr>
-          <p:cNvPr id="3" name="Subtitle 2">
-            <a:extLst>
-              <a:ext uri="{FF2B5EF4-FFF2-40B4-BE49-F238E27FC236}">
-                <a16:creationId xmlns:a16="http://schemas.microsoft.com/office/drawing/2014/main" id="{DC2FD82B-E55F-55A4-77FE-466169404257}"/>
-              </a:ext>
-            </a:extLst>
-          </p:cNvPr>
-          <p:cNvSpPr>
-            <a:spLocks noGrp="1"/>
-          </p:cNvSpPr>
-          <p:nvPr>
-            <p:ph type="subTitle" idx="1"/>
-          </p:nvPr>
-        </p:nvSpPr>
-        <p:spPr>
-          <a:xfrm>
-            <a:off x="0" y="692696"/>
-            <a:ext cx="8640960" cy="6480720"/>
-          </a:xfrm>
-        </p:spPr>
-        <p:txBody>
-          <a:bodyPr>
-            <a:noAutofit/>
-          </a:bodyPr>
-          <a:lstStyle/>
-          <a:p>
-            <a:r>
-              <a:rPr lang="en-GB" sz="3600" dirty="0">
-                <a:solidFill>
-                  <a:schemeClr val="bg1"/>
-                </a:solidFill>
-              </a:rPr>
-              <a:t>And we will worship, worship</a:t>
-            </a:r>
-          </a:p>
-          <a:p>
-            <a:r>
-              <a:rPr lang="en-GB" sz="3600" dirty="0">
-                <a:solidFill>
-                  <a:schemeClr val="bg1"/>
-                </a:solidFill>
-              </a:rPr>
-              <a:t>Forever in Your presence we will sing</a:t>
-            </a:r>
-          </a:p>
-          <a:p>
-            <a:r>
-              <a:rPr lang="en-GB" sz="3600" dirty="0">
-                <a:solidFill>
-                  <a:schemeClr val="bg1"/>
-                </a:solidFill>
-              </a:rPr>
-              <a:t>We will worship, worship You</a:t>
-            </a:r>
-          </a:p>
-          <a:p>
-            <a:r>
-              <a:rPr lang="en-GB" sz="3600" dirty="0">
-                <a:solidFill>
-                  <a:schemeClr val="bg1"/>
-                </a:solidFill>
-              </a:rPr>
-              <a:t>An endless hallelujah to the King</a:t>
-            </a:r>
-          </a:p>
-        </p:txBody>
-      </p:sp>
-      <p:sp>
-        <p:nvSpPr>
-          <p:cNvPr id="4" name="TextBox 3">
-            <a:extLst>
-              <a:ext uri="{FF2B5EF4-FFF2-40B4-BE49-F238E27FC236}">
-                <a16:creationId xmlns:a16="http://schemas.microsoft.com/office/drawing/2014/main" id="{F2F7189C-71E5-2F7D-459A-71EE182BBC70}"/>
-              </a:ext>
-            </a:extLst>
-          </p:cNvPr>
-          <p:cNvSpPr txBox="1"/>
-          <p:nvPr/>
-        </p:nvSpPr>
-        <p:spPr>
-          <a:xfrm>
-            <a:off x="8529729" y="0"/>
-            <a:ext cx="628698" cy="461665"/>
-          </a:xfrm>
-          <a:prstGeom prst="rect">
-            <a:avLst/>
-          </a:prstGeom>
-          <a:noFill/>
-        </p:spPr>
-        <p:txBody>
-          <a:bodyPr wrap="none" rtlCol="0">
-            <a:spAutoFit/>
-          </a:bodyPr>
-          <a:lstStyle/>
-          <a:p>
-            <a:r>
-              <a:rPr lang="en-GB" sz="2400" b="1" dirty="0">
-                <a:solidFill>
-                  <a:schemeClr val="bg1"/>
-                </a:solidFill>
-              </a:rPr>
-              <a:t>2/8</a:t>
-            </a:r>
-          </a:p>
-        </p:txBody>
-      </p:sp>
-    </p:spTree>
-    <p:extLst>
-      <p:ext uri="{BB962C8B-B14F-4D97-AF65-F5344CB8AC3E}">
-        <p14:creationId xmlns:p14="http://schemas.microsoft.com/office/powerpoint/2010/main" val="2673392440"/>
-      </p:ext>
-    </p:extLst>
-  </p:cSld>
-  <p:clrMapOvr>
-    <a:masterClrMapping/>
-  </p:clrMapOvr>
-</p:sld>
-</file>
-
-<file path=ppt/slides/slide43.xml><?xml version="1.0" encoding="utf-8"?>
-<p:sld xmlns:a="http://schemas.openxmlformats.org/drawingml/2006/main" xmlns:r="http://schemas.openxmlformats.org/officeDocument/2006/relationships" xmlns:p="http://schemas.openxmlformats.org/presentationml/2006/main">
-  <p:cSld>
-    <p:spTree>
-      <p:nvGrpSpPr>
-        <p:cNvPr id="1" name="">
-          <a:extLst>
-            <a:ext uri="{FF2B5EF4-FFF2-40B4-BE49-F238E27FC236}">
-              <a16:creationId xmlns:a16="http://schemas.microsoft.com/office/drawing/2014/main" id="{1F4268A6-FCF8-9407-99CE-A6F7B623C4FC}"/>
-            </a:ext>
-          </a:extLst>
-        </p:cNvPr>
-        <p:cNvGrpSpPr/>
-        <p:nvPr/>
-      </p:nvGrpSpPr>
-      <p:grpSpPr>
-        <a:xfrm>
-          <a:off x="0" y="0"/>
-          <a:ext cx="0" cy="0"/>
-          <a:chOff x="0" y="0"/>
-          <a:chExt cx="0" cy="0"/>
-        </a:xfrm>
-      </p:grpSpPr>
-      <p:sp>
-        <p:nvSpPr>
-          <p:cNvPr id="3" name="Subtitle 2">
-            <a:extLst>
-              <a:ext uri="{FF2B5EF4-FFF2-40B4-BE49-F238E27FC236}">
-                <a16:creationId xmlns:a16="http://schemas.microsoft.com/office/drawing/2014/main" id="{E276D78E-1E0E-481E-0E41-158A748F8982}"/>
-              </a:ext>
-            </a:extLst>
-          </p:cNvPr>
-          <p:cNvSpPr>
-            <a:spLocks noGrp="1"/>
-          </p:cNvSpPr>
-          <p:nvPr>
-            <p:ph type="subTitle" idx="1"/>
-          </p:nvPr>
-        </p:nvSpPr>
-        <p:spPr>
-          <a:xfrm>
-            <a:off x="0" y="692696"/>
-            <a:ext cx="8640960" cy="6480720"/>
-          </a:xfrm>
-        </p:spPr>
-        <p:txBody>
-          <a:bodyPr>
-            <a:noAutofit/>
-          </a:bodyPr>
-          <a:lstStyle/>
-          <a:p>
-            <a:r>
-              <a:rPr lang="en-GB" sz="3600" dirty="0">
-                <a:solidFill>
-                  <a:schemeClr val="bg1"/>
-                </a:solidFill>
-              </a:rPr>
-              <a:t>I will see You as You are</a:t>
-            </a:r>
-          </a:p>
-          <a:p>
-            <a:r>
-              <a:rPr lang="en-GB" sz="3600" dirty="0">
-                <a:solidFill>
-                  <a:schemeClr val="bg1"/>
-                </a:solidFill>
-              </a:rPr>
-              <a:t>Love You with un-sinning heart</a:t>
-            </a:r>
-          </a:p>
-          <a:p>
-            <a:r>
-              <a:rPr lang="en-GB" sz="3600" dirty="0">
-                <a:solidFill>
-                  <a:schemeClr val="bg1"/>
-                </a:solidFill>
-              </a:rPr>
-              <a:t>See how much You paid to bring me home</a:t>
-            </a:r>
-          </a:p>
-          <a:p>
-            <a:r>
-              <a:rPr lang="en-GB" sz="3600" dirty="0">
-                <a:solidFill>
-                  <a:schemeClr val="bg1"/>
-                </a:solidFill>
-              </a:rPr>
-              <a:t>Not 'til then Lord shall I know</a:t>
-            </a:r>
-          </a:p>
-          <a:p>
-            <a:r>
-              <a:rPr lang="en-GB" sz="3600" dirty="0">
-                <a:solidFill>
-                  <a:schemeClr val="bg1"/>
-                </a:solidFill>
-              </a:rPr>
-              <a:t>Not 'til then how much I owe</a:t>
-            </a:r>
-          </a:p>
-          <a:p>
-            <a:r>
-              <a:rPr lang="en-GB" sz="3600" dirty="0" err="1">
-                <a:solidFill>
-                  <a:schemeClr val="bg1"/>
-                </a:solidFill>
-              </a:rPr>
-              <a:t>Ev'rything</a:t>
-            </a:r>
-            <a:r>
-              <a:rPr lang="en-GB" sz="3600" dirty="0">
-                <a:solidFill>
-                  <a:schemeClr val="bg1"/>
-                </a:solidFill>
-              </a:rPr>
-              <a:t> I am before Your throne</a:t>
-            </a:r>
-          </a:p>
-        </p:txBody>
-      </p:sp>
-      <p:sp>
-        <p:nvSpPr>
-          <p:cNvPr id="4" name="TextBox 3">
-            <a:extLst>
-              <a:ext uri="{FF2B5EF4-FFF2-40B4-BE49-F238E27FC236}">
-                <a16:creationId xmlns:a16="http://schemas.microsoft.com/office/drawing/2014/main" id="{60AA8FDC-C9D5-0635-FD78-B0B35BB31994}"/>
-              </a:ext>
-            </a:extLst>
-          </p:cNvPr>
-          <p:cNvSpPr txBox="1"/>
-          <p:nvPr/>
-        </p:nvSpPr>
-        <p:spPr>
-          <a:xfrm>
-            <a:off x="8529729" y="0"/>
-            <a:ext cx="628698" cy="461665"/>
-          </a:xfrm>
-          <a:prstGeom prst="rect">
-            <a:avLst/>
-          </a:prstGeom>
-          <a:noFill/>
-        </p:spPr>
-        <p:txBody>
-          <a:bodyPr wrap="none" rtlCol="0">
-            <a:spAutoFit/>
-          </a:bodyPr>
-          <a:lstStyle/>
-          <a:p>
-            <a:r>
-              <a:rPr lang="en-GB" sz="2400" b="1" dirty="0">
-                <a:solidFill>
-                  <a:schemeClr val="bg1"/>
-                </a:solidFill>
-              </a:rPr>
-              <a:t>3/8</a:t>
-            </a:r>
-          </a:p>
-        </p:txBody>
-      </p:sp>
-    </p:spTree>
-    <p:extLst>
-      <p:ext uri="{BB962C8B-B14F-4D97-AF65-F5344CB8AC3E}">
-        <p14:creationId xmlns:p14="http://schemas.microsoft.com/office/powerpoint/2010/main" val="2849577497"/>
-      </p:ext>
-    </p:extLst>
-  </p:cSld>
-  <p:clrMapOvr>
-    <a:masterClrMapping/>
-  </p:clrMapOvr>
-</p:sld>
-</file>
-
-<file path=ppt/slides/slide44.xml><?xml version="1.0" encoding="utf-8"?>
-<p:sld xmlns:a="http://schemas.openxmlformats.org/drawingml/2006/main" xmlns:r="http://schemas.openxmlformats.org/officeDocument/2006/relationships" xmlns:p="http://schemas.openxmlformats.org/presentationml/2006/main">
-  <p:cSld>
-    <p:spTree>
-      <p:nvGrpSpPr>
-        <p:cNvPr id="1" name="">
-          <a:extLst>
-            <a:ext uri="{FF2B5EF4-FFF2-40B4-BE49-F238E27FC236}">
-              <a16:creationId xmlns:a16="http://schemas.microsoft.com/office/drawing/2014/main" id="{169CB519-994A-5E94-5A98-54ED7689416B}"/>
-            </a:ext>
-          </a:extLst>
-        </p:cNvPr>
-        <p:cNvGrpSpPr/>
-        <p:nvPr/>
-      </p:nvGrpSpPr>
-      <p:grpSpPr>
-        <a:xfrm>
-          <a:off x="0" y="0"/>
-          <a:ext cx="0" cy="0"/>
-          <a:chOff x="0" y="0"/>
-          <a:chExt cx="0" cy="0"/>
-        </a:xfrm>
-      </p:grpSpPr>
-      <p:sp>
-        <p:nvSpPr>
-          <p:cNvPr id="3" name="Subtitle 2">
-            <a:extLst>
-              <a:ext uri="{FF2B5EF4-FFF2-40B4-BE49-F238E27FC236}">
-                <a16:creationId xmlns:a16="http://schemas.microsoft.com/office/drawing/2014/main" id="{D5F9ECA2-C86C-64D3-6CED-77CEBDF4E3BE}"/>
-              </a:ext>
-            </a:extLst>
-          </p:cNvPr>
-          <p:cNvSpPr>
-            <a:spLocks noGrp="1"/>
-          </p:cNvSpPr>
-          <p:nvPr>
-            <p:ph type="subTitle" idx="1"/>
-          </p:nvPr>
-        </p:nvSpPr>
-        <p:spPr>
-          <a:xfrm>
-            <a:off x="0" y="692696"/>
-            <a:ext cx="8640960" cy="6480720"/>
-          </a:xfrm>
-        </p:spPr>
-        <p:txBody>
-          <a:bodyPr>
-            <a:noAutofit/>
-          </a:bodyPr>
-          <a:lstStyle/>
-          <a:p>
-            <a:r>
-              <a:rPr lang="en-GB" sz="3600" dirty="0">
-                <a:solidFill>
-                  <a:schemeClr val="bg1"/>
-                </a:solidFill>
-              </a:rPr>
-              <a:t>And we will worship, worship</a:t>
-            </a:r>
-          </a:p>
-          <a:p>
-            <a:r>
-              <a:rPr lang="en-GB" sz="3600" dirty="0">
-                <a:solidFill>
-                  <a:schemeClr val="bg1"/>
-                </a:solidFill>
-              </a:rPr>
-              <a:t>Forever in Your presence we will sing</a:t>
-            </a:r>
-          </a:p>
-          <a:p>
-            <a:r>
-              <a:rPr lang="en-GB" sz="3600" dirty="0">
-                <a:solidFill>
-                  <a:schemeClr val="bg1"/>
-                </a:solidFill>
-              </a:rPr>
-              <a:t>We will worship, worship You</a:t>
-            </a:r>
-          </a:p>
-          <a:p>
-            <a:r>
-              <a:rPr lang="en-GB" sz="3600" dirty="0">
-                <a:solidFill>
-                  <a:schemeClr val="bg1"/>
-                </a:solidFill>
-              </a:rPr>
-              <a:t>An endless hallelujah to the King</a:t>
-            </a:r>
-          </a:p>
-        </p:txBody>
-      </p:sp>
-      <p:sp>
-        <p:nvSpPr>
-          <p:cNvPr id="4" name="TextBox 3">
-            <a:extLst>
-              <a:ext uri="{FF2B5EF4-FFF2-40B4-BE49-F238E27FC236}">
-                <a16:creationId xmlns:a16="http://schemas.microsoft.com/office/drawing/2014/main" id="{E75FB08D-5770-5319-3C96-100CF7F6AFD0}"/>
-              </a:ext>
-            </a:extLst>
-          </p:cNvPr>
-          <p:cNvSpPr txBox="1"/>
-          <p:nvPr/>
-        </p:nvSpPr>
-        <p:spPr>
-          <a:xfrm>
-            <a:off x="8529729" y="0"/>
-            <a:ext cx="628698" cy="461665"/>
-          </a:xfrm>
-          <a:prstGeom prst="rect">
-            <a:avLst/>
-          </a:prstGeom>
-          <a:noFill/>
-        </p:spPr>
-        <p:txBody>
-          <a:bodyPr wrap="none" rtlCol="0">
-            <a:spAutoFit/>
-          </a:bodyPr>
-          <a:lstStyle/>
-          <a:p>
-            <a:r>
-              <a:rPr lang="en-GB" sz="2400" b="1" dirty="0">
-                <a:solidFill>
-                  <a:schemeClr val="bg1"/>
-                </a:solidFill>
-              </a:rPr>
-              <a:t>4/8</a:t>
-            </a:r>
-          </a:p>
-        </p:txBody>
-      </p:sp>
-    </p:spTree>
-    <p:extLst>
-      <p:ext uri="{BB962C8B-B14F-4D97-AF65-F5344CB8AC3E}">
-        <p14:creationId xmlns:p14="http://schemas.microsoft.com/office/powerpoint/2010/main" val="2624784699"/>
-      </p:ext>
-    </p:extLst>
-  </p:cSld>
-  <p:clrMapOvr>
-    <a:masterClrMapping/>
-  </p:clrMapOvr>
-</p:sld>
-</file>
-
-<file path=ppt/slides/slide45.xml><?xml version="1.0" encoding="utf-8"?>
-<p:sld xmlns:a="http://schemas.openxmlformats.org/drawingml/2006/main" xmlns:r="http://schemas.openxmlformats.org/officeDocument/2006/relationships" xmlns:p="http://schemas.openxmlformats.org/presentationml/2006/main">
-  <p:cSld>
-    <p:spTree>
-      <p:nvGrpSpPr>
         <p:cNvPr id="1" name="">
           <a:extLst>
             <a:ext uri="{FF2B5EF4-FFF2-40B4-BE49-F238E27FC236}">
@@ -9567,7 +8821,7 @@
 </p:sld>
 </file>
 
-<file path=ppt/slides/slide46.xml><?xml version="1.0" encoding="utf-8"?>
+<file path=ppt/slides/slide41.xml><?xml version="1.0" encoding="utf-8"?>
 <p:sld xmlns:a="http://schemas.openxmlformats.org/drawingml/2006/main" xmlns:r="http://schemas.openxmlformats.org/officeDocument/2006/relationships" xmlns:p="http://schemas.openxmlformats.org/presentationml/2006/main">
   <p:cSld>
     <p:spTree>
@@ -9711,7 +8965,7 @@
 </p:sld>
 </file>
 
-<file path=ppt/slides/slide47.xml><?xml version="1.0" encoding="utf-8"?>
+<file path=ppt/slides/slide42.xml><?xml version="1.0" encoding="utf-8"?>
 <p:sld xmlns:a="http://schemas.openxmlformats.org/drawingml/2006/main" xmlns:r="http://schemas.openxmlformats.org/officeDocument/2006/relationships" xmlns:p="http://schemas.openxmlformats.org/presentationml/2006/main">
   <p:cSld>
     <p:spTree>
@@ -9860,7 +9114,7 @@
 </p:sld>
 </file>
 
-<file path=ppt/slides/slide48.xml><?xml version="1.0" encoding="utf-8"?>
+<file path=ppt/slides/slide43.xml><?xml version="1.0" encoding="utf-8"?>
 <p:sld xmlns:a="http://schemas.openxmlformats.org/drawingml/2006/main" xmlns:r="http://schemas.openxmlformats.org/officeDocument/2006/relationships" xmlns:p="http://schemas.openxmlformats.org/presentationml/2006/main">
   <p:cSld>
     <p:spTree>
@@ -10015,6 +9269,722 @@
     <p:extLst>
       <p:ext uri="{BB962C8B-B14F-4D97-AF65-F5344CB8AC3E}">
         <p14:creationId xmlns:p14="http://schemas.microsoft.com/office/powerpoint/2010/main" val="506950916"/>
+      </p:ext>
+    </p:extLst>
+  </p:cSld>
+  <p:clrMapOvr>
+    <a:masterClrMapping/>
+  </p:clrMapOvr>
+</p:sld>
+</file>
+
+<file path=ppt/slides/slide44.xml><?xml version="1.0" encoding="utf-8"?>
+<p:sld xmlns:a="http://schemas.openxmlformats.org/drawingml/2006/main" xmlns:r="http://schemas.openxmlformats.org/officeDocument/2006/relationships" xmlns:p="http://schemas.openxmlformats.org/presentationml/2006/main">
+  <p:cSld>
+    <p:spTree>
+      <p:nvGrpSpPr>
+        <p:cNvPr id="1" name=""/>
+        <p:cNvGrpSpPr/>
+        <p:nvPr/>
+      </p:nvGrpSpPr>
+      <p:grpSpPr>
+        <a:xfrm>
+          <a:off x="0" y="0"/>
+          <a:ext cx="0" cy="0"/>
+          <a:chOff x="0" y="0"/>
+          <a:chExt cx="0" cy="0"/>
+        </a:xfrm>
+      </p:grpSpPr>
+      <p:sp>
+        <p:nvSpPr>
+          <p:cNvPr id="3" name="Subtitle 2"/>
+          <p:cNvSpPr>
+            <a:spLocks noGrp="1"/>
+          </p:cNvSpPr>
+          <p:nvPr>
+            <p:ph type="subTitle" idx="1"/>
+          </p:nvPr>
+        </p:nvSpPr>
+        <p:spPr>
+          <a:xfrm>
+            <a:off x="323528" y="188640"/>
+            <a:ext cx="8640960" cy="6480720"/>
+          </a:xfrm>
+        </p:spPr>
+        <p:txBody>
+          <a:bodyPr>
+            <a:noAutofit/>
+          </a:bodyPr>
+          <a:lstStyle/>
+          <a:p>
+            <a:endParaRPr lang="en-GB" sz="5400" dirty="0">
+              <a:solidFill>
+                <a:schemeClr val="bg1"/>
+              </a:solidFill>
+            </a:endParaRPr>
+          </a:p>
+          <a:p>
+            <a:r>
+              <a:rPr lang="en-GB" sz="4400" b="0" i="0" dirty="0">
+                <a:solidFill>
+                  <a:srgbClr val="00A3E0"/>
+                </a:solidFill>
+                <a:effectLst/>
+                <a:latin typeface="akagi_probook"/>
+              </a:rPr>
+              <a:t>It Is Well</a:t>
+            </a:r>
+          </a:p>
+          <a:p>
+            <a:br>
+              <a:rPr lang="en-GB" sz="1200" dirty="0">
+                <a:solidFill>
+                  <a:schemeClr val="bg1"/>
+                </a:solidFill>
+              </a:rPr>
+            </a:br>
+            <a:br>
+              <a:rPr lang="en-GB" sz="1200" dirty="0">
+                <a:solidFill>
+                  <a:schemeClr val="bg1"/>
+                </a:solidFill>
+              </a:rPr>
+            </a:br>
+            <a:r>
+              <a:rPr lang="en-GB" sz="1200" dirty="0">
+                <a:solidFill>
+                  <a:schemeClr val="bg1"/>
+                </a:solidFill>
+              </a:rPr>
+              <a:t>CCLI Song # 7021972</a:t>
+            </a:r>
+          </a:p>
+          <a:p>
+            <a:r>
+              <a:rPr lang="en-GB" sz="1200" dirty="0">
+                <a:solidFill>
+                  <a:schemeClr val="bg1"/>
+                </a:solidFill>
+              </a:rPr>
+              <a:t>Horatio Gates Spafford | Kristene DiMarco | Philip Paul Bliss</a:t>
+            </a:r>
+          </a:p>
+          <a:p>
+            <a:r>
+              <a:rPr lang="en-GB" sz="1200" dirty="0">
+                <a:solidFill>
+                  <a:schemeClr val="bg1"/>
+                </a:solidFill>
+              </a:rPr>
+              <a:t>© 2013 Bethel Music Publishing</a:t>
+            </a:r>
+          </a:p>
+          <a:p>
+            <a:r>
+              <a:rPr lang="en-GB" sz="1200" dirty="0">
+                <a:solidFill>
+                  <a:schemeClr val="bg1"/>
+                </a:solidFill>
+              </a:rPr>
+              <a:t>For use solely with the </a:t>
+            </a:r>
+            <a:r>
+              <a:rPr lang="en-GB" sz="1200" dirty="0" err="1">
+                <a:solidFill>
+                  <a:schemeClr val="bg1"/>
+                </a:solidFill>
+              </a:rPr>
+              <a:t>SongSelect</a:t>
+            </a:r>
+            <a:r>
+              <a:rPr lang="en-GB" sz="1200" dirty="0">
+                <a:solidFill>
+                  <a:schemeClr val="bg1"/>
+                </a:solidFill>
+              </a:rPr>
+              <a:t>® Terms of Use. All rights reserved. www.ccli.com</a:t>
+            </a:r>
+          </a:p>
+          <a:p>
+            <a:r>
+              <a:rPr lang="en-GB" sz="1200" dirty="0">
+                <a:solidFill>
+                  <a:schemeClr val="bg1"/>
+                </a:solidFill>
+              </a:rPr>
+              <a:t>CCLI Licence No. 33265</a:t>
+            </a:r>
+          </a:p>
+        </p:txBody>
+      </p:sp>
+    </p:spTree>
+    <p:extLst>
+      <p:ext uri="{BB962C8B-B14F-4D97-AF65-F5344CB8AC3E}">
+        <p14:creationId xmlns:p14="http://schemas.microsoft.com/office/powerpoint/2010/main" val="2692585411"/>
+      </p:ext>
+    </p:extLst>
+  </p:cSld>
+  <p:clrMapOvr>
+    <a:masterClrMapping/>
+  </p:clrMapOvr>
+</p:sld>
+</file>
+
+<file path=ppt/slides/slide45.xml><?xml version="1.0" encoding="utf-8"?>
+<p:sld xmlns:a="http://schemas.openxmlformats.org/drawingml/2006/main" xmlns:r="http://schemas.openxmlformats.org/officeDocument/2006/relationships" xmlns:p="http://schemas.openxmlformats.org/presentationml/2006/main">
+  <p:cSld>
+    <p:spTree>
+      <p:nvGrpSpPr>
+        <p:cNvPr id="1" name=""/>
+        <p:cNvGrpSpPr/>
+        <p:nvPr/>
+      </p:nvGrpSpPr>
+      <p:grpSpPr>
+        <a:xfrm>
+          <a:off x="0" y="0"/>
+          <a:ext cx="0" cy="0"/>
+          <a:chOff x="0" y="0"/>
+          <a:chExt cx="0" cy="0"/>
+        </a:xfrm>
+      </p:grpSpPr>
+      <p:sp>
+        <p:nvSpPr>
+          <p:cNvPr id="3" name="Subtitle 2"/>
+          <p:cNvSpPr>
+            <a:spLocks noGrp="1"/>
+          </p:cNvSpPr>
+          <p:nvPr>
+            <p:ph type="subTitle" idx="1"/>
+          </p:nvPr>
+        </p:nvSpPr>
+        <p:spPr>
+          <a:xfrm>
+            <a:off x="251520" y="836712"/>
+            <a:ext cx="8640960" cy="6480720"/>
+          </a:xfrm>
+        </p:spPr>
+        <p:txBody>
+          <a:bodyPr>
+            <a:noAutofit/>
+          </a:bodyPr>
+          <a:lstStyle/>
+          <a:p>
+            <a:r>
+              <a:rPr lang="en-GB" sz="3600" dirty="0">
+                <a:solidFill>
+                  <a:schemeClr val="bg1"/>
+                </a:solidFill>
+              </a:rPr>
+              <a:t>Grander earth has quaked before</a:t>
+            </a:r>
+          </a:p>
+          <a:p>
+            <a:r>
+              <a:rPr lang="en-GB" sz="3600" dirty="0">
+                <a:solidFill>
+                  <a:schemeClr val="bg1"/>
+                </a:solidFill>
+              </a:rPr>
+              <a:t>Moved by the sound of His voice</a:t>
+            </a:r>
+          </a:p>
+          <a:p>
+            <a:r>
+              <a:rPr lang="en-GB" sz="3600" dirty="0">
+                <a:solidFill>
+                  <a:schemeClr val="bg1"/>
+                </a:solidFill>
+              </a:rPr>
+              <a:t>Seas that are shaken and stirred</a:t>
+            </a:r>
+          </a:p>
+          <a:p>
+            <a:r>
+              <a:rPr lang="en-GB" sz="3600" dirty="0">
+                <a:solidFill>
+                  <a:schemeClr val="bg1"/>
+                </a:solidFill>
+              </a:rPr>
+              <a:t>Can be calmed and broken for my regard</a:t>
+            </a:r>
+          </a:p>
+        </p:txBody>
+      </p:sp>
+      <p:sp>
+        <p:nvSpPr>
+          <p:cNvPr id="4" name="TextBox 3"/>
+          <p:cNvSpPr txBox="1"/>
+          <p:nvPr/>
+        </p:nvSpPr>
+        <p:spPr>
+          <a:xfrm>
+            <a:off x="8529729" y="0"/>
+            <a:ext cx="628698" cy="461665"/>
+          </a:xfrm>
+          <a:prstGeom prst="rect">
+            <a:avLst/>
+          </a:prstGeom>
+          <a:noFill/>
+        </p:spPr>
+        <p:txBody>
+          <a:bodyPr wrap="none" rtlCol="0">
+            <a:spAutoFit/>
+          </a:bodyPr>
+          <a:lstStyle/>
+          <a:p>
+            <a:r>
+              <a:rPr lang="en-GB" sz="2400" b="1" dirty="0">
+                <a:solidFill>
+                  <a:schemeClr val="bg1"/>
+                </a:solidFill>
+              </a:rPr>
+              <a:t>1/7</a:t>
+            </a:r>
+          </a:p>
+        </p:txBody>
+      </p:sp>
+    </p:spTree>
+    <p:extLst>
+      <p:ext uri="{BB962C8B-B14F-4D97-AF65-F5344CB8AC3E}">
+        <p14:creationId xmlns:p14="http://schemas.microsoft.com/office/powerpoint/2010/main" val="1635143327"/>
+      </p:ext>
+    </p:extLst>
+  </p:cSld>
+  <p:clrMapOvr>
+    <a:masterClrMapping/>
+  </p:clrMapOvr>
+</p:sld>
+</file>
+
+<file path=ppt/slides/slide46.xml><?xml version="1.0" encoding="utf-8"?>
+<p:sld xmlns:a="http://schemas.openxmlformats.org/drawingml/2006/main" xmlns:r="http://schemas.openxmlformats.org/officeDocument/2006/relationships" xmlns:p="http://schemas.openxmlformats.org/presentationml/2006/main">
+  <p:cSld>
+    <p:spTree>
+      <p:nvGrpSpPr>
+        <p:cNvPr id="1" name=""/>
+        <p:cNvGrpSpPr/>
+        <p:nvPr/>
+      </p:nvGrpSpPr>
+      <p:grpSpPr>
+        <a:xfrm>
+          <a:off x="0" y="0"/>
+          <a:ext cx="0" cy="0"/>
+          <a:chOff x="0" y="0"/>
+          <a:chExt cx="0" cy="0"/>
+        </a:xfrm>
+      </p:grpSpPr>
+      <p:sp>
+        <p:nvSpPr>
+          <p:cNvPr id="3" name="Subtitle 2"/>
+          <p:cNvSpPr>
+            <a:spLocks noGrp="1"/>
+          </p:cNvSpPr>
+          <p:nvPr>
+            <p:ph type="subTitle" idx="1"/>
+          </p:nvPr>
+        </p:nvSpPr>
+        <p:spPr>
+          <a:xfrm>
+            <a:off x="251520" y="764704"/>
+            <a:ext cx="8640960" cy="6480720"/>
+          </a:xfrm>
+        </p:spPr>
+        <p:txBody>
+          <a:bodyPr>
+            <a:noAutofit/>
+          </a:bodyPr>
+          <a:lstStyle/>
+          <a:p>
+            <a:r>
+              <a:rPr lang="en-GB" sz="3600" dirty="0">
+                <a:solidFill>
+                  <a:schemeClr val="bg1"/>
+                </a:solidFill>
+              </a:rPr>
+              <a:t>Through it all through it all</a:t>
+            </a:r>
+          </a:p>
+          <a:p>
+            <a:r>
+              <a:rPr lang="en-GB" sz="3600" dirty="0">
+                <a:solidFill>
+                  <a:schemeClr val="bg1"/>
+                </a:solidFill>
+              </a:rPr>
+              <a:t>My eyes are on You</a:t>
+            </a:r>
+          </a:p>
+          <a:p>
+            <a:r>
+              <a:rPr lang="en-GB" sz="3600" dirty="0">
+                <a:solidFill>
+                  <a:schemeClr val="bg1"/>
+                </a:solidFill>
+              </a:rPr>
+              <a:t>Through it all through it all</a:t>
+            </a:r>
+          </a:p>
+          <a:p>
+            <a:r>
+              <a:rPr lang="en-GB" sz="3600" dirty="0">
+                <a:solidFill>
+                  <a:schemeClr val="bg1"/>
+                </a:solidFill>
+              </a:rPr>
+              <a:t>It is well</a:t>
+            </a:r>
+          </a:p>
+          <a:p>
+            <a:r>
+              <a:rPr lang="en-GB" sz="3600" dirty="0">
+                <a:solidFill>
+                  <a:schemeClr val="bg1"/>
+                </a:solidFill>
+              </a:rPr>
+              <a:t>Through it all through it all</a:t>
+            </a:r>
+          </a:p>
+          <a:p>
+            <a:r>
+              <a:rPr lang="en-GB" sz="3600" dirty="0">
+                <a:solidFill>
+                  <a:schemeClr val="bg1"/>
+                </a:solidFill>
+              </a:rPr>
+              <a:t>My eyes are on You</a:t>
+            </a:r>
+          </a:p>
+          <a:p>
+            <a:r>
+              <a:rPr lang="en-GB" sz="3600" dirty="0">
+                <a:solidFill>
+                  <a:schemeClr val="bg1"/>
+                </a:solidFill>
+              </a:rPr>
+              <a:t>And it is well with me</a:t>
+            </a:r>
+          </a:p>
+        </p:txBody>
+      </p:sp>
+      <p:sp>
+        <p:nvSpPr>
+          <p:cNvPr id="4" name="TextBox 3"/>
+          <p:cNvSpPr txBox="1"/>
+          <p:nvPr/>
+        </p:nvSpPr>
+        <p:spPr>
+          <a:xfrm>
+            <a:off x="8529729" y="0"/>
+            <a:ext cx="628698" cy="461665"/>
+          </a:xfrm>
+          <a:prstGeom prst="rect">
+            <a:avLst/>
+          </a:prstGeom>
+          <a:noFill/>
+        </p:spPr>
+        <p:txBody>
+          <a:bodyPr wrap="none" rtlCol="0">
+            <a:spAutoFit/>
+          </a:bodyPr>
+          <a:lstStyle/>
+          <a:p>
+            <a:r>
+              <a:rPr lang="en-GB" sz="2400" b="1" dirty="0">
+                <a:solidFill>
+                  <a:schemeClr val="bg1"/>
+                </a:solidFill>
+              </a:rPr>
+              <a:t>2/7</a:t>
+            </a:r>
+          </a:p>
+        </p:txBody>
+      </p:sp>
+    </p:spTree>
+    <p:extLst>
+      <p:ext uri="{BB962C8B-B14F-4D97-AF65-F5344CB8AC3E}">
+        <p14:creationId xmlns:p14="http://schemas.microsoft.com/office/powerpoint/2010/main" val="1986311286"/>
+      </p:ext>
+    </p:extLst>
+  </p:cSld>
+  <p:clrMapOvr>
+    <a:masterClrMapping/>
+  </p:clrMapOvr>
+</p:sld>
+</file>
+
+<file path=ppt/slides/slide47.xml><?xml version="1.0" encoding="utf-8"?>
+<p:sld xmlns:a="http://schemas.openxmlformats.org/drawingml/2006/main" xmlns:r="http://schemas.openxmlformats.org/officeDocument/2006/relationships" xmlns:p="http://schemas.openxmlformats.org/presentationml/2006/main">
+  <p:cSld>
+    <p:spTree>
+      <p:nvGrpSpPr>
+        <p:cNvPr id="1" name=""/>
+        <p:cNvGrpSpPr/>
+        <p:nvPr/>
+      </p:nvGrpSpPr>
+      <p:grpSpPr>
+        <a:xfrm>
+          <a:off x="0" y="0"/>
+          <a:ext cx="0" cy="0"/>
+          <a:chOff x="0" y="0"/>
+          <a:chExt cx="0" cy="0"/>
+        </a:xfrm>
+      </p:grpSpPr>
+      <p:sp>
+        <p:nvSpPr>
+          <p:cNvPr id="3" name="Subtitle 2"/>
+          <p:cNvSpPr>
+            <a:spLocks noGrp="1"/>
+          </p:cNvSpPr>
+          <p:nvPr>
+            <p:ph type="subTitle" idx="1"/>
+          </p:nvPr>
+        </p:nvSpPr>
+        <p:spPr>
+          <a:xfrm>
+            <a:off x="251520" y="764704"/>
+            <a:ext cx="8640960" cy="6480720"/>
+          </a:xfrm>
+        </p:spPr>
+        <p:txBody>
+          <a:bodyPr>
+            <a:noAutofit/>
+          </a:bodyPr>
+          <a:lstStyle/>
+          <a:p>
+            <a:r>
+              <a:rPr lang="en-GB" sz="3600" dirty="0">
+                <a:solidFill>
+                  <a:schemeClr val="bg1"/>
+                </a:solidFill>
+              </a:rPr>
+              <a:t>Far be it from me to not believe</a:t>
+            </a:r>
+          </a:p>
+          <a:p>
+            <a:r>
+              <a:rPr lang="en-GB" sz="3600" dirty="0">
+                <a:solidFill>
+                  <a:schemeClr val="bg1"/>
+                </a:solidFill>
+              </a:rPr>
+              <a:t>Even when my eyes can't see</a:t>
+            </a:r>
+          </a:p>
+          <a:p>
+            <a:r>
+              <a:rPr lang="en-GB" sz="3600" dirty="0">
+                <a:solidFill>
+                  <a:schemeClr val="bg1"/>
+                </a:solidFill>
+              </a:rPr>
+              <a:t>And this mountain that's in front of me</a:t>
+            </a:r>
+          </a:p>
+          <a:p>
+            <a:r>
+              <a:rPr lang="en-GB" sz="3600" dirty="0">
+                <a:solidFill>
+                  <a:schemeClr val="bg1"/>
+                </a:solidFill>
+              </a:rPr>
+              <a:t>Will be thrown into the midst of the sea</a:t>
+            </a:r>
+          </a:p>
+        </p:txBody>
+      </p:sp>
+      <p:sp>
+        <p:nvSpPr>
+          <p:cNvPr id="4" name="TextBox 3"/>
+          <p:cNvSpPr txBox="1"/>
+          <p:nvPr/>
+        </p:nvSpPr>
+        <p:spPr>
+          <a:xfrm>
+            <a:off x="8529729" y="0"/>
+            <a:ext cx="628698" cy="461665"/>
+          </a:xfrm>
+          <a:prstGeom prst="rect">
+            <a:avLst/>
+          </a:prstGeom>
+          <a:noFill/>
+        </p:spPr>
+        <p:txBody>
+          <a:bodyPr wrap="none" rtlCol="0">
+            <a:spAutoFit/>
+          </a:bodyPr>
+          <a:lstStyle/>
+          <a:p>
+            <a:r>
+              <a:rPr lang="en-GB" sz="2400" b="1" dirty="0">
+                <a:solidFill>
+                  <a:schemeClr val="bg1"/>
+                </a:solidFill>
+              </a:rPr>
+              <a:t>3/7</a:t>
+            </a:r>
+          </a:p>
+        </p:txBody>
+      </p:sp>
+    </p:spTree>
+    <p:extLst>
+      <p:ext uri="{BB962C8B-B14F-4D97-AF65-F5344CB8AC3E}">
+        <p14:creationId xmlns:p14="http://schemas.microsoft.com/office/powerpoint/2010/main" val="3117841770"/>
+      </p:ext>
+    </p:extLst>
+  </p:cSld>
+  <p:clrMapOvr>
+    <a:masterClrMapping/>
+  </p:clrMapOvr>
+</p:sld>
+</file>
+
+<file path=ppt/slides/slide48.xml><?xml version="1.0" encoding="utf-8"?>
+<p:sld xmlns:a="http://schemas.openxmlformats.org/drawingml/2006/main" xmlns:r="http://schemas.openxmlformats.org/officeDocument/2006/relationships" xmlns:p="http://schemas.openxmlformats.org/presentationml/2006/main">
+  <p:cSld>
+    <p:spTree>
+      <p:nvGrpSpPr>
+        <p:cNvPr id="1" name=""/>
+        <p:cNvGrpSpPr/>
+        <p:nvPr/>
+      </p:nvGrpSpPr>
+      <p:grpSpPr>
+        <a:xfrm>
+          <a:off x="0" y="0"/>
+          <a:ext cx="0" cy="0"/>
+          <a:chOff x="0" y="0"/>
+          <a:chExt cx="0" cy="0"/>
+        </a:xfrm>
+      </p:grpSpPr>
+      <p:sp>
+        <p:nvSpPr>
+          <p:cNvPr id="3" name="Subtitle 2"/>
+          <p:cNvSpPr>
+            <a:spLocks noGrp="1"/>
+          </p:cNvSpPr>
+          <p:nvPr>
+            <p:ph type="subTitle" idx="1"/>
+          </p:nvPr>
+        </p:nvSpPr>
+        <p:spPr>
+          <a:xfrm>
+            <a:off x="395536" y="764704"/>
+            <a:ext cx="8640960" cy="6480720"/>
+          </a:xfrm>
+        </p:spPr>
+        <p:txBody>
+          <a:bodyPr>
+            <a:noAutofit/>
+          </a:bodyPr>
+          <a:lstStyle/>
+          <a:p>
+            <a:r>
+              <a:rPr lang="en-GB" sz="3600" dirty="0">
+                <a:solidFill>
+                  <a:schemeClr val="bg1"/>
+                </a:solidFill>
+              </a:rPr>
+              <a:t>Through it all through it all</a:t>
+            </a:r>
+          </a:p>
+          <a:p>
+            <a:r>
+              <a:rPr lang="en-GB" sz="3600" dirty="0">
+                <a:solidFill>
+                  <a:schemeClr val="bg1"/>
+                </a:solidFill>
+              </a:rPr>
+              <a:t>My eyes are on You</a:t>
+            </a:r>
+          </a:p>
+          <a:p>
+            <a:r>
+              <a:rPr lang="en-GB" sz="3600" dirty="0">
+                <a:solidFill>
+                  <a:schemeClr val="bg1"/>
+                </a:solidFill>
+              </a:rPr>
+              <a:t>Through it all through it all</a:t>
+            </a:r>
+          </a:p>
+          <a:p>
+            <a:r>
+              <a:rPr lang="en-GB" sz="3600" dirty="0">
+                <a:solidFill>
+                  <a:schemeClr val="bg1"/>
+                </a:solidFill>
+              </a:rPr>
+              <a:t>It is well</a:t>
+            </a:r>
+          </a:p>
+          <a:p>
+            <a:r>
+              <a:rPr lang="en-GB" sz="3600" dirty="0">
+                <a:solidFill>
+                  <a:schemeClr val="bg1"/>
+                </a:solidFill>
+              </a:rPr>
+              <a:t>Through it all through it all</a:t>
+            </a:r>
+          </a:p>
+          <a:p>
+            <a:r>
+              <a:rPr lang="en-GB" sz="3600" dirty="0">
+                <a:solidFill>
+                  <a:schemeClr val="bg1"/>
+                </a:solidFill>
+              </a:rPr>
+              <a:t>My eyes are on You</a:t>
+            </a:r>
+          </a:p>
+          <a:p>
+            <a:r>
+              <a:rPr lang="en-GB" sz="3600" dirty="0">
+                <a:solidFill>
+                  <a:schemeClr val="bg1"/>
+                </a:solidFill>
+              </a:rPr>
+              <a:t>And it is well it is well</a:t>
+            </a:r>
+          </a:p>
+        </p:txBody>
+      </p:sp>
+      <p:sp>
+        <p:nvSpPr>
+          <p:cNvPr id="4" name="TextBox 3"/>
+          <p:cNvSpPr txBox="1"/>
+          <p:nvPr/>
+        </p:nvSpPr>
+        <p:spPr>
+          <a:xfrm>
+            <a:off x="8529729" y="0"/>
+            <a:ext cx="628698" cy="461665"/>
+          </a:xfrm>
+          <a:prstGeom prst="rect">
+            <a:avLst/>
+          </a:prstGeom>
+          <a:noFill/>
+        </p:spPr>
+        <p:txBody>
+          <a:bodyPr wrap="none" rtlCol="0">
+            <a:spAutoFit/>
+          </a:bodyPr>
+          <a:lstStyle/>
+          <a:p>
+            <a:r>
+              <a:rPr lang="en-GB" sz="2400" b="1" dirty="0">
+                <a:solidFill>
+                  <a:schemeClr val="bg1"/>
+                </a:solidFill>
+              </a:rPr>
+              <a:t>4/7</a:t>
+            </a:r>
+          </a:p>
+        </p:txBody>
+      </p:sp>
+    </p:spTree>
+    <p:extLst>
+      <p:ext uri="{BB962C8B-B14F-4D97-AF65-F5344CB8AC3E}">
+        <p14:creationId xmlns:p14="http://schemas.microsoft.com/office/powerpoint/2010/main" val="2277284100"/>
       </p:ext>
     </p:extLst>
   </p:cSld>
@@ -10053,7 +10023,7 @@
         </p:nvSpPr>
         <p:spPr>
           <a:xfrm>
-            <a:off x="323528" y="188640"/>
+            <a:off x="231698" y="764704"/>
             <a:ext cx="8640960" cy="6480720"/>
           </a:xfrm>
         </p:spPr>
@@ -10063,7 +10033,37 @@
           </a:bodyPr>
           <a:lstStyle/>
           <a:p>
-            <a:endParaRPr lang="en-GB" sz="5400" dirty="0">
+            <a:r>
+              <a:rPr lang="en-GB" sz="3600" dirty="0">
+                <a:solidFill>
+                  <a:schemeClr val="bg1"/>
+                </a:solidFill>
+              </a:rPr>
+              <a:t>So let go my soul and trust in Him</a:t>
+            </a:r>
+          </a:p>
+          <a:p>
+            <a:r>
+              <a:rPr lang="en-GB" sz="3600" dirty="0">
+                <a:solidFill>
+                  <a:schemeClr val="bg1"/>
+                </a:solidFill>
+              </a:rPr>
+              <a:t>The waves and wind still know His Name</a:t>
+            </a:r>
+          </a:p>
+          <a:p>
+            <a:r>
+              <a:rPr lang="en-GB" sz="3600" dirty="0">
+                <a:solidFill>
+                  <a:schemeClr val="bg1"/>
+                </a:solidFill>
+              </a:rPr>
+              <a:t>(REPEAT)</a:t>
+            </a:r>
+          </a:p>
+          <a:p>
+            <a:endParaRPr lang="en-GB" sz="3600" dirty="0">
               <a:solidFill>
                 <a:schemeClr val="bg1"/>
               </a:solidFill>
@@ -10071,94 +10071,45 @@
           </a:p>
           <a:p>
             <a:r>
-              <a:rPr lang="en-GB" sz="4400" b="0" i="0" dirty="0">
-                <a:solidFill>
-                  <a:srgbClr val="00A3E0"/>
-                </a:solidFill>
-                <a:effectLst/>
-                <a:latin typeface="akagi_probook"/>
-              </a:rPr>
-              <a:t>It Is Well</a:t>
-            </a:r>
-          </a:p>
-          <a:p>
-            <a:br>
-              <a:rPr lang="en-GB" sz="1200" dirty="0">
-                <a:solidFill>
-                  <a:schemeClr val="bg1"/>
-                </a:solidFill>
-              </a:rPr>
-            </a:br>
-            <a:br>
-              <a:rPr lang="en-GB" sz="1200" dirty="0">
-                <a:solidFill>
-                  <a:schemeClr val="bg1"/>
-                </a:solidFill>
-              </a:rPr>
-            </a:br>
-            <a:r>
-              <a:rPr lang="en-GB" sz="1200" dirty="0">
-                <a:solidFill>
-                  <a:schemeClr val="bg1"/>
-                </a:solidFill>
-              </a:rPr>
-              <a:t>CCLI Song # 7021972</a:t>
-            </a:r>
-          </a:p>
-          <a:p>
-            <a:r>
-              <a:rPr lang="en-GB" sz="1200" dirty="0">
-                <a:solidFill>
-                  <a:schemeClr val="bg1"/>
-                </a:solidFill>
-              </a:rPr>
-              <a:t>Horatio Gates Spafford | Kristene DiMarco | Philip Paul Bliss</a:t>
-            </a:r>
-          </a:p>
-          <a:p>
-            <a:r>
-              <a:rPr lang="en-GB" sz="1200" dirty="0">
-                <a:solidFill>
-                  <a:schemeClr val="bg1"/>
-                </a:solidFill>
-              </a:rPr>
-              <a:t>© 2013 Bethel Music Publishing</a:t>
-            </a:r>
-          </a:p>
-          <a:p>
-            <a:r>
-              <a:rPr lang="en-GB" sz="1200" dirty="0">
-                <a:solidFill>
-                  <a:schemeClr val="bg1"/>
-                </a:solidFill>
-              </a:rPr>
-              <a:t>For use solely with the </a:t>
-            </a:r>
-            <a:r>
-              <a:rPr lang="en-GB" sz="1200" dirty="0" err="1">
-                <a:solidFill>
-                  <a:schemeClr val="bg1"/>
-                </a:solidFill>
-              </a:rPr>
-              <a:t>SongSelect</a:t>
-            </a:r>
-            <a:r>
-              <a:rPr lang="en-GB" sz="1200" dirty="0">
-                <a:solidFill>
-                  <a:schemeClr val="bg1"/>
-                </a:solidFill>
-              </a:rPr>
-              <a:t>® Terms of Use. All rights reserved. www.ccli.com</a:t>
-            </a:r>
-          </a:p>
-          <a:p>
-            <a:r>
-              <a:rPr lang="en-GB" sz="1200" dirty="0">
-                <a:solidFill>
-                  <a:schemeClr val="bg1"/>
-                </a:solidFill>
-              </a:rPr>
-              <a:t>CCLI Licence No. 33265</a:t>
+              <a:rPr lang="en-GB" sz="3600" dirty="0">
+                <a:solidFill>
+                  <a:schemeClr val="bg1"/>
+                </a:solidFill>
+              </a:rPr>
+              <a:t>The waves and wind still know His Name</a:t>
+            </a:r>
+          </a:p>
+        </p:txBody>
+      </p:sp>
+      <p:sp>
+        <p:nvSpPr>
+          <p:cNvPr id="4" name="TextBox 3"/>
+          <p:cNvSpPr txBox="1"/>
+          <p:nvPr/>
+        </p:nvSpPr>
+        <p:spPr>
+          <a:xfrm>
+            <a:off x="8529729" y="0"/>
+            <a:ext cx="628698" cy="461665"/>
+          </a:xfrm>
+          <a:prstGeom prst="rect">
+            <a:avLst/>
+          </a:prstGeom>
+          <a:noFill/>
+        </p:spPr>
+        <p:txBody>
+          <a:bodyPr wrap="none" rtlCol="0">
+            <a:spAutoFit/>
+          </a:bodyPr>
+          <a:lstStyle/>
+          <a:p>
+            <a:r>
+              <a:rPr lang="en-GB" sz="2400" b="1" dirty="0">
+                <a:solidFill>
+                  <a:schemeClr val="bg1"/>
+                </a:solidFill>
+              </a:rPr>
+              <a:t>5/7</a:t>
             </a:r>
           </a:p>
         </p:txBody>
@@ -10166,7 +10117,7 @@
     </p:spTree>
     <p:extLst>
       <p:ext uri="{BB962C8B-B14F-4D97-AF65-F5344CB8AC3E}">
-        <p14:creationId xmlns:p14="http://schemas.microsoft.com/office/powerpoint/2010/main" val="2692585411"/>
+        <p14:creationId xmlns:p14="http://schemas.microsoft.com/office/powerpoint/2010/main" val="2887928867"/>
       </p:ext>
     </p:extLst>
   </p:cSld>
@@ -10331,703 +10282,6 @@
         </p:nvSpPr>
         <p:spPr>
           <a:xfrm>
-            <a:off x="251520" y="836712"/>
-            <a:ext cx="8640960" cy="6480720"/>
-          </a:xfrm>
-        </p:spPr>
-        <p:txBody>
-          <a:bodyPr>
-            <a:noAutofit/>
-          </a:bodyPr>
-          <a:lstStyle/>
-          <a:p>
-            <a:r>
-              <a:rPr lang="en-GB" sz="3600" dirty="0">
-                <a:solidFill>
-                  <a:schemeClr val="bg1"/>
-                </a:solidFill>
-              </a:rPr>
-              <a:t>Grander earth has quaked before</a:t>
-            </a:r>
-          </a:p>
-          <a:p>
-            <a:r>
-              <a:rPr lang="en-GB" sz="3600" dirty="0">
-                <a:solidFill>
-                  <a:schemeClr val="bg1"/>
-                </a:solidFill>
-              </a:rPr>
-              <a:t>Moved by the sound of His voice</a:t>
-            </a:r>
-          </a:p>
-          <a:p>
-            <a:r>
-              <a:rPr lang="en-GB" sz="3600" dirty="0">
-                <a:solidFill>
-                  <a:schemeClr val="bg1"/>
-                </a:solidFill>
-              </a:rPr>
-              <a:t>Seas that are shaken and stirred</a:t>
-            </a:r>
-          </a:p>
-          <a:p>
-            <a:r>
-              <a:rPr lang="en-GB" sz="3600" dirty="0">
-                <a:solidFill>
-                  <a:schemeClr val="bg1"/>
-                </a:solidFill>
-              </a:rPr>
-              <a:t>Can be calmed and broken for my regard</a:t>
-            </a:r>
-          </a:p>
-        </p:txBody>
-      </p:sp>
-      <p:sp>
-        <p:nvSpPr>
-          <p:cNvPr id="4" name="TextBox 3"/>
-          <p:cNvSpPr txBox="1"/>
-          <p:nvPr/>
-        </p:nvSpPr>
-        <p:spPr>
-          <a:xfrm>
-            <a:off x="8529729" y="0"/>
-            <a:ext cx="628698" cy="461665"/>
-          </a:xfrm>
-          <a:prstGeom prst="rect">
-            <a:avLst/>
-          </a:prstGeom>
-          <a:noFill/>
-        </p:spPr>
-        <p:txBody>
-          <a:bodyPr wrap="none" rtlCol="0">
-            <a:spAutoFit/>
-          </a:bodyPr>
-          <a:lstStyle/>
-          <a:p>
-            <a:r>
-              <a:rPr lang="en-GB" sz="2400" b="1" dirty="0">
-                <a:solidFill>
-                  <a:schemeClr val="bg1"/>
-                </a:solidFill>
-              </a:rPr>
-              <a:t>1/7</a:t>
-            </a:r>
-          </a:p>
-        </p:txBody>
-      </p:sp>
-    </p:spTree>
-    <p:extLst>
-      <p:ext uri="{BB962C8B-B14F-4D97-AF65-F5344CB8AC3E}">
-        <p14:creationId xmlns:p14="http://schemas.microsoft.com/office/powerpoint/2010/main" val="1635143327"/>
-      </p:ext>
-    </p:extLst>
-  </p:cSld>
-  <p:clrMapOvr>
-    <a:masterClrMapping/>
-  </p:clrMapOvr>
-</p:sld>
-</file>
-
-<file path=ppt/slides/slide51.xml><?xml version="1.0" encoding="utf-8"?>
-<p:sld xmlns:a="http://schemas.openxmlformats.org/drawingml/2006/main" xmlns:r="http://schemas.openxmlformats.org/officeDocument/2006/relationships" xmlns:p="http://schemas.openxmlformats.org/presentationml/2006/main">
-  <p:cSld>
-    <p:spTree>
-      <p:nvGrpSpPr>
-        <p:cNvPr id="1" name=""/>
-        <p:cNvGrpSpPr/>
-        <p:nvPr/>
-      </p:nvGrpSpPr>
-      <p:grpSpPr>
-        <a:xfrm>
-          <a:off x="0" y="0"/>
-          <a:ext cx="0" cy="0"/>
-          <a:chOff x="0" y="0"/>
-          <a:chExt cx="0" cy="0"/>
-        </a:xfrm>
-      </p:grpSpPr>
-      <p:sp>
-        <p:nvSpPr>
-          <p:cNvPr id="3" name="Subtitle 2"/>
-          <p:cNvSpPr>
-            <a:spLocks noGrp="1"/>
-          </p:cNvSpPr>
-          <p:nvPr>
-            <p:ph type="subTitle" idx="1"/>
-          </p:nvPr>
-        </p:nvSpPr>
-        <p:spPr>
-          <a:xfrm>
-            <a:off x="251520" y="764704"/>
-            <a:ext cx="8640960" cy="6480720"/>
-          </a:xfrm>
-        </p:spPr>
-        <p:txBody>
-          <a:bodyPr>
-            <a:noAutofit/>
-          </a:bodyPr>
-          <a:lstStyle/>
-          <a:p>
-            <a:r>
-              <a:rPr lang="en-GB" sz="3600" dirty="0">
-                <a:solidFill>
-                  <a:schemeClr val="bg1"/>
-                </a:solidFill>
-              </a:rPr>
-              <a:t>Through it all through it all</a:t>
-            </a:r>
-          </a:p>
-          <a:p>
-            <a:r>
-              <a:rPr lang="en-GB" sz="3600" dirty="0">
-                <a:solidFill>
-                  <a:schemeClr val="bg1"/>
-                </a:solidFill>
-              </a:rPr>
-              <a:t>My eyes are on You</a:t>
-            </a:r>
-          </a:p>
-          <a:p>
-            <a:r>
-              <a:rPr lang="en-GB" sz="3600" dirty="0">
-                <a:solidFill>
-                  <a:schemeClr val="bg1"/>
-                </a:solidFill>
-              </a:rPr>
-              <a:t>Through it all through it all</a:t>
-            </a:r>
-          </a:p>
-          <a:p>
-            <a:r>
-              <a:rPr lang="en-GB" sz="3600" dirty="0">
-                <a:solidFill>
-                  <a:schemeClr val="bg1"/>
-                </a:solidFill>
-              </a:rPr>
-              <a:t>It is well</a:t>
-            </a:r>
-          </a:p>
-          <a:p>
-            <a:r>
-              <a:rPr lang="en-GB" sz="3600" dirty="0">
-                <a:solidFill>
-                  <a:schemeClr val="bg1"/>
-                </a:solidFill>
-              </a:rPr>
-              <a:t>Through it all through it all</a:t>
-            </a:r>
-          </a:p>
-          <a:p>
-            <a:r>
-              <a:rPr lang="en-GB" sz="3600" dirty="0">
-                <a:solidFill>
-                  <a:schemeClr val="bg1"/>
-                </a:solidFill>
-              </a:rPr>
-              <a:t>My eyes are on You</a:t>
-            </a:r>
-          </a:p>
-          <a:p>
-            <a:r>
-              <a:rPr lang="en-GB" sz="3600" dirty="0">
-                <a:solidFill>
-                  <a:schemeClr val="bg1"/>
-                </a:solidFill>
-              </a:rPr>
-              <a:t>And it is well with me</a:t>
-            </a:r>
-          </a:p>
-        </p:txBody>
-      </p:sp>
-      <p:sp>
-        <p:nvSpPr>
-          <p:cNvPr id="4" name="TextBox 3"/>
-          <p:cNvSpPr txBox="1"/>
-          <p:nvPr/>
-        </p:nvSpPr>
-        <p:spPr>
-          <a:xfrm>
-            <a:off x="8529729" y="0"/>
-            <a:ext cx="628698" cy="461665"/>
-          </a:xfrm>
-          <a:prstGeom prst="rect">
-            <a:avLst/>
-          </a:prstGeom>
-          <a:noFill/>
-        </p:spPr>
-        <p:txBody>
-          <a:bodyPr wrap="none" rtlCol="0">
-            <a:spAutoFit/>
-          </a:bodyPr>
-          <a:lstStyle/>
-          <a:p>
-            <a:r>
-              <a:rPr lang="en-GB" sz="2400" b="1" dirty="0">
-                <a:solidFill>
-                  <a:schemeClr val="bg1"/>
-                </a:solidFill>
-              </a:rPr>
-              <a:t>2/7</a:t>
-            </a:r>
-          </a:p>
-        </p:txBody>
-      </p:sp>
-    </p:spTree>
-    <p:extLst>
-      <p:ext uri="{BB962C8B-B14F-4D97-AF65-F5344CB8AC3E}">
-        <p14:creationId xmlns:p14="http://schemas.microsoft.com/office/powerpoint/2010/main" val="1986311286"/>
-      </p:ext>
-    </p:extLst>
-  </p:cSld>
-  <p:clrMapOvr>
-    <a:masterClrMapping/>
-  </p:clrMapOvr>
-</p:sld>
-</file>
-
-<file path=ppt/slides/slide52.xml><?xml version="1.0" encoding="utf-8"?>
-<p:sld xmlns:a="http://schemas.openxmlformats.org/drawingml/2006/main" xmlns:r="http://schemas.openxmlformats.org/officeDocument/2006/relationships" xmlns:p="http://schemas.openxmlformats.org/presentationml/2006/main">
-  <p:cSld>
-    <p:spTree>
-      <p:nvGrpSpPr>
-        <p:cNvPr id="1" name=""/>
-        <p:cNvGrpSpPr/>
-        <p:nvPr/>
-      </p:nvGrpSpPr>
-      <p:grpSpPr>
-        <a:xfrm>
-          <a:off x="0" y="0"/>
-          <a:ext cx="0" cy="0"/>
-          <a:chOff x="0" y="0"/>
-          <a:chExt cx="0" cy="0"/>
-        </a:xfrm>
-      </p:grpSpPr>
-      <p:sp>
-        <p:nvSpPr>
-          <p:cNvPr id="3" name="Subtitle 2"/>
-          <p:cNvSpPr>
-            <a:spLocks noGrp="1"/>
-          </p:cNvSpPr>
-          <p:nvPr>
-            <p:ph type="subTitle" idx="1"/>
-          </p:nvPr>
-        </p:nvSpPr>
-        <p:spPr>
-          <a:xfrm>
-            <a:off x="251520" y="764704"/>
-            <a:ext cx="8640960" cy="6480720"/>
-          </a:xfrm>
-        </p:spPr>
-        <p:txBody>
-          <a:bodyPr>
-            <a:noAutofit/>
-          </a:bodyPr>
-          <a:lstStyle/>
-          <a:p>
-            <a:r>
-              <a:rPr lang="en-GB" sz="3600" dirty="0">
-                <a:solidFill>
-                  <a:schemeClr val="bg1"/>
-                </a:solidFill>
-              </a:rPr>
-              <a:t>Far be it from me to not believe</a:t>
-            </a:r>
-          </a:p>
-          <a:p>
-            <a:r>
-              <a:rPr lang="en-GB" sz="3600" dirty="0">
-                <a:solidFill>
-                  <a:schemeClr val="bg1"/>
-                </a:solidFill>
-              </a:rPr>
-              <a:t>Even when my eyes can't see</a:t>
-            </a:r>
-          </a:p>
-          <a:p>
-            <a:r>
-              <a:rPr lang="en-GB" sz="3600" dirty="0">
-                <a:solidFill>
-                  <a:schemeClr val="bg1"/>
-                </a:solidFill>
-              </a:rPr>
-              <a:t>And this mountain that's in front of me</a:t>
-            </a:r>
-          </a:p>
-          <a:p>
-            <a:r>
-              <a:rPr lang="en-GB" sz="3600" dirty="0">
-                <a:solidFill>
-                  <a:schemeClr val="bg1"/>
-                </a:solidFill>
-              </a:rPr>
-              <a:t>Will be thrown into the midst of the sea</a:t>
-            </a:r>
-          </a:p>
-        </p:txBody>
-      </p:sp>
-      <p:sp>
-        <p:nvSpPr>
-          <p:cNvPr id="4" name="TextBox 3"/>
-          <p:cNvSpPr txBox="1"/>
-          <p:nvPr/>
-        </p:nvSpPr>
-        <p:spPr>
-          <a:xfrm>
-            <a:off x="8529729" y="0"/>
-            <a:ext cx="628698" cy="461665"/>
-          </a:xfrm>
-          <a:prstGeom prst="rect">
-            <a:avLst/>
-          </a:prstGeom>
-          <a:noFill/>
-        </p:spPr>
-        <p:txBody>
-          <a:bodyPr wrap="none" rtlCol="0">
-            <a:spAutoFit/>
-          </a:bodyPr>
-          <a:lstStyle/>
-          <a:p>
-            <a:r>
-              <a:rPr lang="en-GB" sz="2400" b="1" dirty="0">
-                <a:solidFill>
-                  <a:schemeClr val="bg1"/>
-                </a:solidFill>
-              </a:rPr>
-              <a:t>3/7</a:t>
-            </a:r>
-          </a:p>
-        </p:txBody>
-      </p:sp>
-    </p:spTree>
-    <p:extLst>
-      <p:ext uri="{BB962C8B-B14F-4D97-AF65-F5344CB8AC3E}">
-        <p14:creationId xmlns:p14="http://schemas.microsoft.com/office/powerpoint/2010/main" val="3117841770"/>
-      </p:ext>
-    </p:extLst>
-  </p:cSld>
-  <p:clrMapOvr>
-    <a:masterClrMapping/>
-  </p:clrMapOvr>
-</p:sld>
-</file>
-
-<file path=ppt/slides/slide53.xml><?xml version="1.0" encoding="utf-8"?>
-<p:sld xmlns:a="http://schemas.openxmlformats.org/drawingml/2006/main" xmlns:r="http://schemas.openxmlformats.org/officeDocument/2006/relationships" xmlns:p="http://schemas.openxmlformats.org/presentationml/2006/main">
-  <p:cSld>
-    <p:spTree>
-      <p:nvGrpSpPr>
-        <p:cNvPr id="1" name=""/>
-        <p:cNvGrpSpPr/>
-        <p:nvPr/>
-      </p:nvGrpSpPr>
-      <p:grpSpPr>
-        <a:xfrm>
-          <a:off x="0" y="0"/>
-          <a:ext cx="0" cy="0"/>
-          <a:chOff x="0" y="0"/>
-          <a:chExt cx="0" cy="0"/>
-        </a:xfrm>
-      </p:grpSpPr>
-      <p:sp>
-        <p:nvSpPr>
-          <p:cNvPr id="3" name="Subtitle 2"/>
-          <p:cNvSpPr>
-            <a:spLocks noGrp="1"/>
-          </p:cNvSpPr>
-          <p:nvPr>
-            <p:ph type="subTitle" idx="1"/>
-          </p:nvPr>
-        </p:nvSpPr>
-        <p:spPr>
-          <a:xfrm>
-            <a:off x="395536" y="764704"/>
-            <a:ext cx="8640960" cy="6480720"/>
-          </a:xfrm>
-        </p:spPr>
-        <p:txBody>
-          <a:bodyPr>
-            <a:noAutofit/>
-          </a:bodyPr>
-          <a:lstStyle/>
-          <a:p>
-            <a:r>
-              <a:rPr lang="en-GB" sz="3600" dirty="0">
-                <a:solidFill>
-                  <a:schemeClr val="bg1"/>
-                </a:solidFill>
-              </a:rPr>
-              <a:t>Through it all through it all</a:t>
-            </a:r>
-          </a:p>
-          <a:p>
-            <a:r>
-              <a:rPr lang="en-GB" sz="3600" dirty="0">
-                <a:solidFill>
-                  <a:schemeClr val="bg1"/>
-                </a:solidFill>
-              </a:rPr>
-              <a:t>My eyes are on You</a:t>
-            </a:r>
-          </a:p>
-          <a:p>
-            <a:r>
-              <a:rPr lang="en-GB" sz="3600" dirty="0">
-                <a:solidFill>
-                  <a:schemeClr val="bg1"/>
-                </a:solidFill>
-              </a:rPr>
-              <a:t>Through it all through it all</a:t>
-            </a:r>
-          </a:p>
-          <a:p>
-            <a:r>
-              <a:rPr lang="en-GB" sz="3600" dirty="0">
-                <a:solidFill>
-                  <a:schemeClr val="bg1"/>
-                </a:solidFill>
-              </a:rPr>
-              <a:t>It is well</a:t>
-            </a:r>
-          </a:p>
-          <a:p>
-            <a:r>
-              <a:rPr lang="en-GB" sz="3600" dirty="0">
-                <a:solidFill>
-                  <a:schemeClr val="bg1"/>
-                </a:solidFill>
-              </a:rPr>
-              <a:t>Through it all through it all</a:t>
-            </a:r>
-          </a:p>
-          <a:p>
-            <a:r>
-              <a:rPr lang="en-GB" sz="3600" dirty="0">
-                <a:solidFill>
-                  <a:schemeClr val="bg1"/>
-                </a:solidFill>
-              </a:rPr>
-              <a:t>My eyes are on You</a:t>
-            </a:r>
-          </a:p>
-          <a:p>
-            <a:r>
-              <a:rPr lang="en-GB" sz="3600" dirty="0">
-                <a:solidFill>
-                  <a:schemeClr val="bg1"/>
-                </a:solidFill>
-              </a:rPr>
-              <a:t>And it is well it is well</a:t>
-            </a:r>
-          </a:p>
-        </p:txBody>
-      </p:sp>
-      <p:sp>
-        <p:nvSpPr>
-          <p:cNvPr id="4" name="TextBox 3"/>
-          <p:cNvSpPr txBox="1"/>
-          <p:nvPr/>
-        </p:nvSpPr>
-        <p:spPr>
-          <a:xfrm>
-            <a:off x="8529729" y="0"/>
-            <a:ext cx="628698" cy="461665"/>
-          </a:xfrm>
-          <a:prstGeom prst="rect">
-            <a:avLst/>
-          </a:prstGeom>
-          <a:noFill/>
-        </p:spPr>
-        <p:txBody>
-          <a:bodyPr wrap="none" rtlCol="0">
-            <a:spAutoFit/>
-          </a:bodyPr>
-          <a:lstStyle/>
-          <a:p>
-            <a:r>
-              <a:rPr lang="en-GB" sz="2400" b="1" dirty="0">
-                <a:solidFill>
-                  <a:schemeClr val="bg1"/>
-                </a:solidFill>
-              </a:rPr>
-              <a:t>4/7</a:t>
-            </a:r>
-          </a:p>
-        </p:txBody>
-      </p:sp>
-    </p:spTree>
-    <p:extLst>
-      <p:ext uri="{BB962C8B-B14F-4D97-AF65-F5344CB8AC3E}">
-        <p14:creationId xmlns:p14="http://schemas.microsoft.com/office/powerpoint/2010/main" val="2277284100"/>
-      </p:ext>
-    </p:extLst>
-  </p:cSld>
-  <p:clrMapOvr>
-    <a:masterClrMapping/>
-  </p:clrMapOvr>
-</p:sld>
-</file>
-
-<file path=ppt/slides/slide54.xml><?xml version="1.0" encoding="utf-8"?>
-<p:sld xmlns:a="http://schemas.openxmlformats.org/drawingml/2006/main" xmlns:r="http://schemas.openxmlformats.org/officeDocument/2006/relationships" xmlns:p="http://schemas.openxmlformats.org/presentationml/2006/main">
-  <p:cSld>
-    <p:spTree>
-      <p:nvGrpSpPr>
-        <p:cNvPr id="1" name=""/>
-        <p:cNvGrpSpPr/>
-        <p:nvPr/>
-      </p:nvGrpSpPr>
-      <p:grpSpPr>
-        <a:xfrm>
-          <a:off x="0" y="0"/>
-          <a:ext cx="0" cy="0"/>
-          <a:chOff x="0" y="0"/>
-          <a:chExt cx="0" cy="0"/>
-        </a:xfrm>
-      </p:grpSpPr>
-      <p:sp>
-        <p:nvSpPr>
-          <p:cNvPr id="3" name="Subtitle 2"/>
-          <p:cNvSpPr>
-            <a:spLocks noGrp="1"/>
-          </p:cNvSpPr>
-          <p:nvPr>
-            <p:ph type="subTitle" idx="1"/>
-          </p:nvPr>
-        </p:nvSpPr>
-        <p:spPr>
-          <a:xfrm>
-            <a:off x="231698" y="764704"/>
-            <a:ext cx="8640960" cy="6480720"/>
-          </a:xfrm>
-        </p:spPr>
-        <p:txBody>
-          <a:bodyPr>
-            <a:noAutofit/>
-          </a:bodyPr>
-          <a:lstStyle/>
-          <a:p>
-            <a:r>
-              <a:rPr lang="en-GB" sz="3600" dirty="0">
-                <a:solidFill>
-                  <a:schemeClr val="bg1"/>
-                </a:solidFill>
-              </a:rPr>
-              <a:t>So let go my soul and trust in Him</a:t>
-            </a:r>
-          </a:p>
-          <a:p>
-            <a:r>
-              <a:rPr lang="en-GB" sz="3600" dirty="0">
-                <a:solidFill>
-                  <a:schemeClr val="bg1"/>
-                </a:solidFill>
-              </a:rPr>
-              <a:t>The waves and wind still know His Name</a:t>
-            </a:r>
-          </a:p>
-          <a:p>
-            <a:r>
-              <a:rPr lang="en-GB" sz="3600" dirty="0">
-                <a:solidFill>
-                  <a:schemeClr val="bg1"/>
-                </a:solidFill>
-              </a:rPr>
-              <a:t>(REPEAT)</a:t>
-            </a:r>
-          </a:p>
-          <a:p>
-            <a:endParaRPr lang="en-GB" sz="3600" dirty="0">
-              <a:solidFill>
-                <a:schemeClr val="bg1"/>
-              </a:solidFill>
-            </a:endParaRPr>
-          </a:p>
-          <a:p>
-            <a:r>
-              <a:rPr lang="en-GB" sz="3600" dirty="0">
-                <a:solidFill>
-                  <a:schemeClr val="bg1"/>
-                </a:solidFill>
-              </a:rPr>
-              <a:t>The waves and wind still know His Name</a:t>
-            </a:r>
-          </a:p>
-        </p:txBody>
-      </p:sp>
-      <p:sp>
-        <p:nvSpPr>
-          <p:cNvPr id="4" name="TextBox 3"/>
-          <p:cNvSpPr txBox="1"/>
-          <p:nvPr/>
-        </p:nvSpPr>
-        <p:spPr>
-          <a:xfrm>
-            <a:off x="8529729" y="0"/>
-            <a:ext cx="628698" cy="461665"/>
-          </a:xfrm>
-          <a:prstGeom prst="rect">
-            <a:avLst/>
-          </a:prstGeom>
-          <a:noFill/>
-        </p:spPr>
-        <p:txBody>
-          <a:bodyPr wrap="none" rtlCol="0">
-            <a:spAutoFit/>
-          </a:bodyPr>
-          <a:lstStyle/>
-          <a:p>
-            <a:r>
-              <a:rPr lang="en-GB" sz="2400" b="1" dirty="0">
-                <a:solidFill>
-                  <a:schemeClr val="bg1"/>
-                </a:solidFill>
-              </a:rPr>
-              <a:t>5/7</a:t>
-            </a:r>
-          </a:p>
-        </p:txBody>
-      </p:sp>
-    </p:spTree>
-    <p:extLst>
-      <p:ext uri="{BB962C8B-B14F-4D97-AF65-F5344CB8AC3E}">
-        <p14:creationId xmlns:p14="http://schemas.microsoft.com/office/powerpoint/2010/main" val="2887928867"/>
-      </p:ext>
-    </p:extLst>
-  </p:cSld>
-  <p:clrMapOvr>
-    <a:masterClrMapping/>
-  </p:clrMapOvr>
-</p:sld>
-</file>
-
-<file path=ppt/slides/slide55.xml><?xml version="1.0" encoding="utf-8"?>
-<p:sld xmlns:a="http://schemas.openxmlformats.org/drawingml/2006/main" xmlns:r="http://schemas.openxmlformats.org/officeDocument/2006/relationships" xmlns:p="http://schemas.openxmlformats.org/presentationml/2006/main">
-  <p:cSld>
-    <p:spTree>
-      <p:nvGrpSpPr>
-        <p:cNvPr id="1" name=""/>
-        <p:cNvGrpSpPr/>
-        <p:nvPr/>
-      </p:nvGrpSpPr>
-      <p:grpSpPr>
-        <a:xfrm>
-          <a:off x="0" y="0"/>
-          <a:ext cx="0" cy="0"/>
-          <a:chOff x="0" y="0"/>
-          <a:chExt cx="0" cy="0"/>
-        </a:xfrm>
-      </p:grpSpPr>
-      <p:sp>
-        <p:nvSpPr>
-          <p:cNvPr id="3" name="Subtitle 2"/>
-          <p:cNvSpPr>
-            <a:spLocks noGrp="1"/>
-          </p:cNvSpPr>
-          <p:nvPr>
-            <p:ph type="subTitle" idx="1"/>
-          </p:nvPr>
-        </p:nvSpPr>
-        <p:spPr>
-          <a:xfrm>
             <a:off x="251520" y="764704"/>
             <a:ext cx="8640960" cy="6480720"/>
           </a:xfrm>
@@ -11167,7 +10421,7 @@
 </p:sld>
 </file>
 
-<file path=ppt/slides/slide56.xml><?xml version="1.0" encoding="utf-8"?>
+<file path=ppt/slides/slide51.xml><?xml version="1.0" encoding="utf-8"?>
 <p:sld xmlns:a="http://schemas.openxmlformats.org/drawingml/2006/main" xmlns:r="http://schemas.openxmlformats.org/officeDocument/2006/relationships" xmlns:p="http://schemas.openxmlformats.org/presentationml/2006/main">
   <p:cSld>
     <p:spTree>

--- a/docs/songs_2026-03-18.pptx
+++ b/docs/songs_2026-03-18.pptx
@@ -5,7 +5,7 @@
     <p:sldMasterId id="2147483648" r:id="rId1"/>
   </p:sldMasterIdLst>
   <p:notesMasterIdLst>
-    <p:notesMasterId r:id="rId53"/>
+    <p:notesMasterId r:id="rId56"/>
   </p:notesMasterIdLst>
   <p:sldIdLst>
     <p:sldId id="421" r:id="rId2"/>
@@ -29,36 +29,39 @@
     <p:sldId id="658" r:id="rId20"/>
     <p:sldId id="1228" r:id="rId21"/>
     <p:sldId id="659" r:id="rId22"/>
-    <p:sldId id="660" r:id="rId23"/>
-    <p:sldId id="713" r:id="rId24"/>
-    <p:sldId id="1229" r:id="rId25"/>
-    <p:sldId id="1230" r:id="rId26"/>
-    <p:sldId id="1226" r:id="rId27"/>
-    <p:sldId id="1306" r:id="rId28"/>
-    <p:sldId id="519" r:id="rId29"/>
-    <p:sldId id="520" r:id="rId30"/>
-    <p:sldId id="1307" r:id="rId31"/>
-    <p:sldId id="526" r:id="rId32"/>
-    <p:sldId id="1308" r:id="rId33"/>
-    <p:sldId id="1309" r:id="rId34"/>
-    <p:sldId id="527" r:id="rId35"/>
-    <p:sldId id="1492" r:id="rId36"/>
-    <p:sldId id="1493" r:id="rId37"/>
-    <p:sldId id="1496" r:id="rId38"/>
-    <p:sldId id="1494" r:id="rId39"/>
-    <p:sldId id="1500" r:id="rId40"/>
-    <p:sldId id="1495" r:id="rId41"/>
-    <p:sldId id="1501" r:id="rId42"/>
-    <p:sldId id="1497" r:id="rId43"/>
-    <p:sldId id="1498" r:id="rId44"/>
-    <p:sldId id="1502" r:id="rId45"/>
-    <p:sldId id="1503" r:id="rId46"/>
-    <p:sldId id="1504" r:id="rId47"/>
-    <p:sldId id="1505" r:id="rId48"/>
-    <p:sldId id="1506" r:id="rId49"/>
-    <p:sldId id="1507" r:id="rId50"/>
-    <p:sldId id="523" r:id="rId51"/>
-    <p:sldId id="525" r:id="rId52"/>
+    <p:sldId id="1508" r:id="rId23"/>
+    <p:sldId id="1509" r:id="rId24"/>
+    <p:sldId id="1510" r:id="rId25"/>
+    <p:sldId id="660" r:id="rId26"/>
+    <p:sldId id="713" r:id="rId27"/>
+    <p:sldId id="1229" r:id="rId28"/>
+    <p:sldId id="1230" r:id="rId29"/>
+    <p:sldId id="1226" r:id="rId30"/>
+    <p:sldId id="1306" r:id="rId31"/>
+    <p:sldId id="519" r:id="rId32"/>
+    <p:sldId id="520" r:id="rId33"/>
+    <p:sldId id="1307" r:id="rId34"/>
+    <p:sldId id="526" r:id="rId35"/>
+    <p:sldId id="1308" r:id="rId36"/>
+    <p:sldId id="1309" r:id="rId37"/>
+    <p:sldId id="527" r:id="rId38"/>
+    <p:sldId id="1492" r:id="rId39"/>
+    <p:sldId id="1493" r:id="rId40"/>
+    <p:sldId id="1496" r:id="rId41"/>
+    <p:sldId id="1494" r:id="rId42"/>
+    <p:sldId id="1500" r:id="rId43"/>
+    <p:sldId id="1495" r:id="rId44"/>
+    <p:sldId id="1501" r:id="rId45"/>
+    <p:sldId id="1497" r:id="rId46"/>
+    <p:sldId id="1498" r:id="rId47"/>
+    <p:sldId id="1502" r:id="rId48"/>
+    <p:sldId id="1503" r:id="rId49"/>
+    <p:sldId id="1504" r:id="rId50"/>
+    <p:sldId id="1505" r:id="rId51"/>
+    <p:sldId id="1506" r:id="rId52"/>
+    <p:sldId id="1507" r:id="rId53"/>
+    <p:sldId id="523" r:id="rId54"/>
+    <p:sldId id="525" r:id="rId55"/>
   </p:sldIdLst>
   <p:sldSz cx="9144000" cy="6858000" type="screen4x3"/>
   <p:notesSz cx="6858000" cy="9144000"/>
@@ -258,7 +261,7 @@
           <a:p>
             <a:fld id="{C57EAEFC-A9C7-464E-BE3F-33D4DD72E122}" type="datetimeFigureOut">
               <a:rPr lang="en-GB" smtClean="0"/>
-              <a:t>15/03/2026</a:t>
+              <a:t>17/03/2026</a:t>
             </a:fld>
             <a:endParaRPr lang="en-GB"/>
           </a:p>
@@ -591,7 +594,7 @@
           <a:p>
             <a:fld id="{E79B61DE-1D46-4752-AF65-FA2C4EB0D1D0}" type="slidenum">
               <a:rPr lang="en-GB" smtClean="0"/>
-              <a:t>43</a:t>
+              <a:t>46</a:t>
             </a:fld>
             <a:endParaRPr lang="en-GB"/>
           </a:p>
@@ -795,7 +798,7 @@
             <a:fld id="{26EA1CF3-4A15-4CBF-9A5A-6A56C368BE71}" type="datetimeFigureOut">
               <a:rPr lang="en-GB" smtClean="0"/>
               <a:pPr/>
-              <a:t>15/03/2026</a:t>
+              <a:t>17/03/2026</a:t>
             </a:fld>
             <a:endParaRPr lang="en-GB"/>
           </a:p>
@@ -960,7 +963,7 @@
             <a:fld id="{26EA1CF3-4A15-4CBF-9A5A-6A56C368BE71}" type="datetimeFigureOut">
               <a:rPr lang="en-GB" smtClean="0"/>
               <a:pPr/>
-              <a:t>15/03/2026</a:t>
+              <a:t>17/03/2026</a:t>
             </a:fld>
             <a:endParaRPr lang="en-GB"/>
           </a:p>
@@ -1135,7 +1138,7 @@
             <a:fld id="{26EA1CF3-4A15-4CBF-9A5A-6A56C368BE71}" type="datetimeFigureOut">
               <a:rPr lang="en-GB" smtClean="0"/>
               <a:pPr/>
-              <a:t>15/03/2026</a:t>
+              <a:t>17/03/2026</a:t>
             </a:fld>
             <a:endParaRPr lang="en-GB"/>
           </a:p>
@@ -1302,7 +1305,7 @@
             <a:fld id="{26EA1CF3-4A15-4CBF-9A5A-6A56C368BE71}" type="datetimeFigureOut">
               <a:rPr lang="en-GB" smtClean="0"/>
               <a:pPr/>
-              <a:t>15/03/2026</a:t>
+              <a:t>17/03/2026</a:t>
             </a:fld>
             <a:endParaRPr lang="en-GB"/>
           </a:p>
@@ -1544,7 +1547,7 @@
             <a:fld id="{26EA1CF3-4A15-4CBF-9A5A-6A56C368BE71}" type="datetimeFigureOut">
               <a:rPr lang="en-GB" smtClean="0"/>
               <a:pPr/>
-              <a:t>15/03/2026</a:t>
+              <a:t>17/03/2026</a:t>
             </a:fld>
             <a:endParaRPr lang="en-GB"/>
           </a:p>
@@ -1826,7 +1829,7 @@
             <a:fld id="{26EA1CF3-4A15-4CBF-9A5A-6A56C368BE71}" type="datetimeFigureOut">
               <a:rPr lang="en-GB" smtClean="0"/>
               <a:pPr/>
-              <a:t>15/03/2026</a:t>
+              <a:t>17/03/2026</a:t>
             </a:fld>
             <a:endParaRPr lang="en-GB"/>
           </a:p>
@@ -2242,7 +2245,7 @@
             <a:fld id="{26EA1CF3-4A15-4CBF-9A5A-6A56C368BE71}" type="datetimeFigureOut">
               <a:rPr lang="en-GB" smtClean="0"/>
               <a:pPr/>
-              <a:t>15/03/2026</a:t>
+              <a:t>17/03/2026</a:t>
             </a:fld>
             <a:endParaRPr lang="en-GB"/>
           </a:p>
@@ -2356,7 +2359,7 @@
             <a:fld id="{26EA1CF3-4A15-4CBF-9A5A-6A56C368BE71}" type="datetimeFigureOut">
               <a:rPr lang="en-GB" smtClean="0"/>
               <a:pPr/>
-              <a:t>15/03/2026</a:t>
+              <a:t>17/03/2026</a:t>
             </a:fld>
             <a:endParaRPr lang="en-GB"/>
           </a:p>
@@ -2448,7 +2451,7 @@
             <a:fld id="{26EA1CF3-4A15-4CBF-9A5A-6A56C368BE71}" type="datetimeFigureOut">
               <a:rPr lang="en-GB" smtClean="0"/>
               <a:pPr/>
-              <a:t>15/03/2026</a:t>
+              <a:t>17/03/2026</a:t>
             </a:fld>
             <a:endParaRPr lang="en-GB"/>
           </a:p>
@@ -2720,7 +2723,7 @@
             <a:fld id="{26EA1CF3-4A15-4CBF-9A5A-6A56C368BE71}" type="datetimeFigureOut">
               <a:rPr lang="en-GB" smtClean="0"/>
               <a:pPr/>
-              <a:t>15/03/2026</a:t>
+              <a:t>17/03/2026</a:t>
             </a:fld>
             <a:endParaRPr lang="en-GB"/>
           </a:p>
@@ -2972,7 +2975,7 @@
             <a:fld id="{26EA1CF3-4A15-4CBF-9A5A-6A56C368BE71}" type="datetimeFigureOut">
               <a:rPr lang="en-GB" smtClean="0"/>
               <a:pPr/>
-              <a:t>15/03/2026</a:t>
+              <a:t>17/03/2026</a:t>
             </a:fld>
             <a:endParaRPr lang="en-GB"/>
           </a:p>
@@ -3181,7 +3184,7 @@
             <a:fld id="{26EA1CF3-4A15-4CBF-9A5A-6A56C368BE71}" type="datetimeFigureOut">
               <a:rPr lang="en-GB" smtClean="0"/>
               <a:pPr/>
-              <a:t>15/03/2026</a:t>
+              <a:t>17/03/2026</a:t>
             </a:fld>
             <a:endParaRPr lang="en-GB"/>
           </a:p>
@@ -3696,6 +3699,14 @@
           </a:bodyPr>
           <a:lstStyle/>
           <a:p>
+            <a:r>
+              <a:rPr lang="en-GB" sz="9600" dirty="0">
+                <a:solidFill>
+                  <a:schemeClr val="bg1"/>
+                </a:solidFill>
+              </a:rPr>
+              <a:t/>
+            </a:r>
             <a:br>
               <a:rPr lang="en-GB" sz="9600" dirty="0">
                 <a:solidFill>
@@ -3875,6 +3886,13 @@
   <p:clrMapOvr>
     <a:masterClrMapping/>
   </p:clrMapOvr>
+  <p:timing>
+    <p:tnLst>
+      <p:par>
+        <p:cTn id="1" dur="indefinite" restart="never" nodeType="tmRoot"/>
+      </p:par>
+    </p:tnLst>
+  </p:timing>
 </p:sld>
 </file>
 
@@ -4041,6 +4059,13 @@
   <p:clrMapOvr>
     <a:masterClrMapping/>
   </p:clrMapOvr>
+  <p:timing>
+    <p:tnLst>
+      <p:par>
+        <p:cTn id="1" dur="indefinite" restart="never" nodeType="tmRoot"/>
+      </p:par>
+    </p:tnLst>
+  </p:timing>
 </p:sld>
 </file>
 
@@ -4195,6 +4220,13 @@
   <p:clrMapOvr>
     <a:masterClrMapping/>
   </p:clrMapOvr>
+  <p:timing>
+    <p:tnLst>
+      <p:par>
+        <p:cTn id="1" dur="indefinite" restart="never" nodeType="tmRoot"/>
+      </p:par>
+    </p:tnLst>
+  </p:timing>
 </p:sld>
 </file>
 
@@ -4359,6 +4391,13 @@
   <p:clrMapOvr>
     <a:masterClrMapping/>
   </p:clrMapOvr>
+  <p:timing>
+    <p:tnLst>
+      <p:par>
+        <p:cTn id="1" dur="indefinite" restart="never" nodeType="tmRoot"/>
+      </p:par>
+    </p:tnLst>
+  </p:timing>
 </p:sld>
 </file>
 
@@ -4513,6 +4552,13 @@
   <p:clrMapOvr>
     <a:masterClrMapping/>
   </p:clrMapOvr>
+  <p:timing>
+    <p:tnLst>
+      <p:par>
+        <p:cTn id="1" dur="indefinite" restart="never" nodeType="tmRoot"/>
+      </p:par>
+    </p:tnLst>
+  </p:timing>
 </p:sld>
 </file>
 
@@ -4637,6 +4683,13 @@
   <p:clrMapOvr>
     <a:masterClrMapping/>
   </p:clrMapOvr>
+  <p:timing>
+    <p:tnLst>
+      <p:par>
+        <p:cTn id="1" dur="indefinite" restart="never" nodeType="tmRoot"/>
+      </p:par>
+    </p:tnLst>
+  </p:timing>
 </p:sld>
 </file>
 
@@ -4717,6 +4770,14 @@
             </a:r>
           </a:p>
           <a:p>
+            <a:r>
+              <a:rPr lang="en-GB" sz="1200" dirty="0">
+                <a:solidFill>
+                  <a:schemeClr val="bg1"/>
+                </a:solidFill>
+              </a:rPr>
+              <a:t/>
+            </a:r>
             <a:br>
               <a:rPr lang="en-GB" sz="1200" dirty="0">
                 <a:solidFill>
@@ -4872,6 +4933,13 @@
   <p:clrMapOvr>
     <a:masterClrMapping/>
   </p:clrMapOvr>
+  <p:timing>
+    <p:tnLst>
+      <p:par>
+        <p:cTn id="1" dur="indefinite" restart="never" nodeType="tmRoot"/>
+      </p:par>
+    </p:tnLst>
+  </p:timing>
 </p:sld>
 </file>
 
@@ -4978,13 +5046,18 @@
           <a:lstStyle/>
           <a:p>
             <a:r>
-              <a:rPr lang="en-GB" sz="2400" b="1" dirty="0">
-                <a:solidFill>
-                  <a:schemeClr val="bg1"/>
-                </a:solidFill>
-              </a:rPr>
-              <a:t>1/11</a:t>
-            </a:r>
+              <a:rPr lang="en-GB" sz="2400" b="1" dirty="0" smtClean="0">
+                <a:solidFill>
+                  <a:schemeClr val="bg1"/>
+                </a:solidFill>
+              </a:rPr>
+              <a:t>1/14</a:t>
+            </a:r>
+            <a:endParaRPr lang="en-GB" sz="2400" b="1" dirty="0">
+              <a:solidFill>
+                <a:schemeClr val="bg1"/>
+              </a:solidFill>
+            </a:endParaRPr>
           </a:p>
         </p:txBody>
       </p:sp>
@@ -4998,6 +5071,13 @@
   <p:clrMapOvr>
     <a:masterClrMapping/>
   </p:clrMapOvr>
+  <p:timing>
+    <p:tnLst>
+      <p:par>
+        <p:cTn id="1" dur="indefinite" restart="never" nodeType="tmRoot"/>
+      </p:par>
+    </p:tnLst>
+  </p:timing>
 </p:sld>
 </file>
 
@@ -5130,13 +5210,18 @@
           <a:lstStyle/>
           <a:p>
             <a:r>
-              <a:rPr lang="en-GB" sz="2400" b="1" dirty="0">
-                <a:solidFill>
-                  <a:schemeClr val="bg1"/>
-                </a:solidFill>
-              </a:rPr>
-              <a:t>2/11</a:t>
-            </a:r>
+              <a:rPr lang="en-GB" sz="2400" b="1" dirty="0" smtClean="0">
+                <a:solidFill>
+                  <a:schemeClr val="bg1"/>
+                </a:solidFill>
+              </a:rPr>
+              <a:t>2/14</a:t>
+            </a:r>
+            <a:endParaRPr lang="en-GB" sz="2400" b="1" dirty="0">
+              <a:solidFill>
+                <a:schemeClr val="bg1"/>
+              </a:solidFill>
+            </a:endParaRPr>
           </a:p>
         </p:txBody>
       </p:sp>
@@ -5150,6 +5235,13 @@
   <p:clrMapOvr>
     <a:masterClrMapping/>
   </p:clrMapOvr>
+  <p:timing>
+    <p:tnLst>
+      <p:par>
+        <p:cTn id="1" dur="indefinite" restart="never" nodeType="tmRoot"/>
+      </p:par>
+    </p:tnLst>
+  </p:timing>
 </p:sld>
 </file>
 
@@ -5243,13 +5335,18 @@
           <a:lstStyle/>
           <a:p>
             <a:r>
-              <a:rPr lang="en-GB" sz="2400" b="1" dirty="0">
-                <a:solidFill>
-                  <a:schemeClr val="bg1"/>
-                </a:solidFill>
-              </a:rPr>
-              <a:t>3/11</a:t>
-            </a:r>
+              <a:rPr lang="en-GB" sz="2400" b="1" dirty="0" smtClean="0">
+                <a:solidFill>
+                  <a:schemeClr val="bg1"/>
+                </a:solidFill>
+              </a:rPr>
+              <a:t>3/14</a:t>
+            </a:r>
+            <a:endParaRPr lang="en-GB" sz="2400" b="1" dirty="0">
+              <a:solidFill>
+                <a:schemeClr val="bg1"/>
+              </a:solidFill>
+            </a:endParaRPr>
           </a:p>
         </p:txBody>
       </p:sp>
@@ -5263,6 +5360,13 @@
   <p:clrMapOvr>
     <a:masterClrMapping/>
   </p:clrMapOvr>
+  <p:timing>
+    <p:tnLst>
+      <p:par>
+        <p:cTn id="1" dur="indefinite" restart="never" nodeType="tmRoot"/>
+      </p:par>
+    </p:tnLst>
+  </p:timing>
 </p:sld>
 </file>
 
@@ -5369,13 +5473,18 @@
           <a:lstStyle/>
           <a:p>
             <a:r>
-              <a:rPr lang="en-GB" sz="2400" b="1" dirty="0">
-                <a:solidFill>
-                  <a:schemeClr val="bg1"/>
-                </a:solidFill>
-              </a:rPr>
-              <a:t>4/11</a:t>
-            </a:r>
+              <a:rPr lang="en-GB" sz="2400" b="1" dirty="0" smtClean="0">
+                <a:solidFill>
+                  <a:schemeClr val="bg1"/>
+                </a:solidFill>
+              </a:rPr>
+              <a:t>4/14</a:t>
+            </a:r>
+            <a:endParaRPr lang="en-GB" sz="2400" b="1" dirty="0">
+              <a:solidFill>
+                <a:schemeClr val="bg1"/>
+              </a:solidFill>
+            </a:endParaRPr>
           </a:p>
         </p:txBody>
       </p:sp>
@@ -5389,6 +5498,13 @@
   <p:clrMapOvr>
     <a:masterClrMapping/>
   </p:clrMapOvr>
+  <p:timing>
+    <p:tnLst>
+      <p:par>
+        <p:cTn id="1" dur="indefinite" restart="never" nodeType="tmRoot"/>
+      </p:par>
+    </p:tnLst>
+  </p:timing>
 </p:sld>
 </file>
 
@@ -5515,6 +5631,13 @@
   <p:clrMapOvr>
     <a:masterClrMapping/>
   </p:clrMapOvr>
+  <p:timing>
+    <p:tnLst>
+      <p:par>
+        <p:cTn id="1" dur="indefinite" restart="never" nodeType="tmRoot"/>
+      </p:par>
+    </p:tnLst>
+  </p:timing>
 </p:sld>
 </file>
 
@@ -5647,13 +5770,18 @@
           <a:lstStyle/>
           <a:p>
             <a:r>
-              <a:rPr lang="en-GB" sz="2400" b="1" dirty="0">
-                <a:solidFill>
-                  <a:schemeClr val="bg1"/>
-                </a:solidFill>
-              </a:rPr>
-              <a:t>5/11</a:t>
-            </a:r>
+              <a:rPr lang="en-GB" sz="2400" b="1" dirty="0" smtClean="0">
+                <a:solidFill>
+                  <a:schemeClr val="bg1"/>
+                </a:solidFill>
+              </a:rPr>
+              <a:t>5/14</a:t>
+            </a:r>
+            <a:endParaRPr lang="en-GB" sz="2400" b="1" dirty="0">
+              <a:solidFill>
+                <a:schemeClr val="bg1"/>
+              </a:solidFill>
+            </a:endParaRPr>
           </a:p>
         </p:txBody>
       </p:sp>
@@ -5667,6 +5795,13 @@
   <p:clrMapOvr>
     <a:masterClrMapping/>
   </p:clrMapOvr>
+  <p:timing>
+    <p:tnLst>
+      <p:par>
+        <p:cTn id="1" dur="indefinite" restart="never" nodeType="tmRoot"/>
+      </p:par>
+    </p:tnLst>
+  </p:timing>
 </p:sld>
 </file>
 
@@ -5750,8 +5885,38 @@
                   <a:schemeClr val="bg1"/>
                 </a:solidFill>
               </a:rPr>
-              <a:t>He won't fail</a:t>
-            </a:r>
+              <a:t>He won't </a:t>
+            </a:r>
+            <a:r>
+              <a:rPr lang="en-GB" sz="4000" dirty="0" smtClean="0">
+                <a:solidFill>
+                  <a:schemeClr val="bg1"/>
+                </a:solidFill>
+              </a:rPr>
+              <a:t>fail</a:t>
+            </a:r>
+          </a:p>
+          <a:p>
+            <a:endParaRPr lang="en-GB" sz="4000" dirty="0">
+              <a:solidFill>
+                <a:schemeClr val="bg1"/>
+              </a:solidFill>
+            </a:endParaRPr>
+          </a:p>
+          <a:p>
+            <a:r>
+              <a:rPr lang="en-GB" sz="4000" dirty="0" smtClean="0">
+                <a:solidFill>
+                  <a:schemeClr val="bg1"/>
+                </a:solidFill>
+              </a:rPr>
+              <a:t>(Repeat)</a:t>
+            </a:r>
+            <a:endParaRPr lang="en-GB" sz="4000" dirty="0">
+              <a:solidFill>
+                <a:schemeClr val="bg1"/>
+              </a:solidFill>
+            </a:endParaRPr>
           </a:p>
         </p:txBody>
       </p:sp>
@@ -5778,13 +5943,18 @@
           <a:lstStyle/>
           <a:p>
             <a:r>
-              <a:rPr lang="en-GB" sz="2400" b="1" dirty="0">
-                <a:solidFill>
-                  <a:schemeClr val="bg1"/>
-                </a:solidFill>
-              </a:rPr>
-              <a:t>6/11</a:t>
-            </a:r>
+              <a:rPr lang="en-GB" sz="2400" b="1" dirty="0" smtClean="0">
+                <a:solidFill>
+                  <a:schemeClr val="bg1"/>
+                </a:solidFill>
+              </a:rPr>
+              <a:t>6/14</a:t>
+            </a:r>
+            <a:endParaRPr lang="en-GB" sz="2400" b="1" dirty="0">
+              <a:solidFill>
+                <a:schemeClr val="bg1"/>
+              </a:solidFill>
+            </a:endParaRPr>
           </a:p>
         </p:txBody>
       </p:sp>
@@ -5798,6 +5968,13 @@
   <p:clrMapOvr>
     <a:masterClrMapping/>
   </p:clrMapOvr>
+  <p:timing>
+    <p:tnLst>
+      <p:par>
+        <p:cTn id="1" dur="indefinite" restart="never" nodeType="tmRoot"/>
+      </p:par>
+    </p:tnLst>
+  </p:timing>
 </p:sld>
 </file>
 
@@ -5830,7 +6007,7 @@
         </p:nvSpPr>
         <p:spPr>
           <a:xfrm>
-            <a:off x="323528" y="764704"/>
+            <a:off x="251520" y="692696"/>
             <a:ext cx="8640960" cy="6480720"/>
           </a:xfrm>
         </p:spPr>
@@ -5841,42 +6018,42 @@
           <a:lstStyle/>
           <a:p>
             <a:r>
-              <a:rPr lang="en-GB" sz="4000" dirty="0">
-                <a:solidFill>
-                  <a:schemeClr val="bg1"/>
-                </a:solidFill>
-              </a:rPr>
-              <a:t>Rain came and wind blew</a:t>
-            </a:r>
-          </a:p>
-          <a:p>
-            <a:r>
-              <a:rPr lang="en-GB" sz="4000" dirty="0">
-                <a:solidFill>
-                  <a:schemeClr val="bg1"/>
-                </a:solidFill>
-              </a:rPr>
-              <a:t>My house was built on You</a:t>
-            </a:r>
-          </a:p>
-          <a:p>
-            <a:r>
-              <a:rPr lang="en-GB" sz="4000" dirty="0">
-                <a:solidFill>
-                  <a:schemeClr val="bg1"/>
-                </a:solidFill>
-              </a:rPr>
-              <a:t>I'm safe with You</a:t>
-            </a:r>
-          </a:p>
-          <a:p>
-            <a:r>
-              <a:rPr lang="en-GB" sz="4000" dirty="0">
-                <a:solidFill>
-                  <a:schemeClr val="bg1"/>
-                </a:solidFill>
-              </a:rPr>
-              <a:t>I'm going to make it through</a:t>
+              <a:rPr lang="en-GB" sz="3600" dirty="0">
+                <a:solidFill>
+                  <a:schemeClr val="bg1"/>
+                </a:solidFill>
+              </a:rPr>
+              <a:t>Christ is my firm foundation</a:t>
+            </a:r>
+          </a:p>
+          <a:p>
+            <a:r>
+              <a:rPr lang="en-GB" sz="3600" dirty="0">
+                <a:solidFill>
+                  <a:schemeClr val="bg1"/>
+                </a:solidFill>
+              </a:rPr>
+              <a:t>The rock on which I stand</a:t>
+            </a:r>
+          </a:p>
+          <a:p>
+            <a:r>
+              <a:rPr lang="en-GB" sz="3600" dirty="0">
+                <a:solidFill>
+                  <a:schemeClr val="bg1"/>
+                </a:solidFill>
+              </a:rPr>
+              <a:t>When everything around me is shaken</a:t>
+            </a:r>
+          </a:p>
+          <a:p>
+            <a:r>
+              <a:rPr lang="en-GB" sz="3600" dirty="0">
+                <a:solidFill>
+                  <a:schemeClr val="bg1"/>
+                </a:solidFill>
+              </a:rPr>
+              <a:t>I've never been more glad</a:t>
             </a:r>
           </a:p>
         </p:txBody>
@@ -5889,7 +6066,7 @@
         </p:nvSpPr>
         <p:spPr>
           <a:xfrm>
-            <a:off x="8320530" y="-14941"/>
+            <a:off x="8388424" y="0"/>
             <a:ext cx="784189" cy="461665"/>
           </a:xfrm>
           <a:prstGeom prst="rect">
@@ -5904,30 +6081,206 @@
           <a:lstStyle/>
           <a:p>
             <a:r>
-              <a:rPr lang="en-GB" sz="2400" b="1" dirty="0">
-                <a:solidFill>
-                  <a:schemeClr val="bg1"/>
-                </a:solidFill>
-              </a:rPr>
-              <a:t>7/11</a:t>
-            </a:r>
+              <a:rPr lang="en-GB" sz="2400" b="1" dirty="0" smtClean="0">
+                <a:solidFill>
+                  <a:schemeClr val="bg1"/>
+                </a:solidFill>
+              </a:rPr>
+              <a:t>7/14</a:t>
+            </a:r>
+            <a:endParaRPr lang="en-GB" sz="2400" b="1" dirty="0">
+              <a:solidFill>
+                <a:schemeClr val="bg1"/>
+              </a:solidFill>
+            </a:endParaRPr>
           </a:p>
         </p:txBody>
       </p:sp>
     </p:spTree>
     <p:extLst>
       <p:ext uri="{BB962C8B-B14F-4D97-AF65-F5344CB8AC3E}">
-        <p14:creationId xmlns:p14="http://schemas.microsoft.com/office/powerpoint/2010/main" val="3141125249"/>
+        <p14:creationId xmlns:p14="http://schemas.microsoft.com/office/powerpoint/2010/main" val="1732579989"/>
       </p:ext>
     </p:extLst>
   </p:cSld>
   <p:clrMapOvr>
     <a:masterClrMapping/>
   </p:clrMapOvr>
+  <p:timing>
+    <p:tnLst>
+      <p:par>
+        <p:cTn id="1" dur="indefinite" restart="never" nodeType="tmRoot"/>
+      </p:par>
+    </p:tnLst>
+  </p:timing>
 </p:sld>
 </file>
 
 <file path=ppt/slides/slide23.xml><?xml version="1.0" encoding="utf-8"?>
+<p:sld xmlns:a="http://schemas.openxmlformats.org/drawingml/2006/main" xmlns:r="http://schemas.openxmlformats.org/officeDocument/2006/relationships" xmlns:p="http://schemas.openxmlformats.org/presentationml/2006/main">
+  <p:cSld>
+    <p:spTree>
+      <p:nvGrpSpPr>
+        <p:cNvPr id="1" name="">
+          <a:extLst>
+            <a:ext uri="{FF2B5EF4-FFF2-40B4-BE49-F238E27FC236}">
+              <a16:creationId xmlns:a16="http://schemas.microsoft.com/office/drawing/2014/main" id="{98F719FA-A440-CBC2-9F6F-00E8586602B8}"/>
+            </a:ext>
+          </a:extLst>
+        </p:cNvPr>
+        <p:cNvGrpSpPr/>
+        <p:nvPr/>
+      </p:nvGrpSpPr>
+      <p:grpSpPr>
+        <a:xfrm>
+          <a:off x="0" y="0"/>
+          <a:ext cx="0" cy="0"/>
+          <a:chOff x="0" y="0"/>
+          <a:chExt cx="0" cy="0"/>
+        </a:xfrm>
+      </p:grpSpPr>
+      <p:sp>
+        <p:nvSpPr>
+          <p:cNvPr id="3" name="Subtitle 2">
+            <a:extLst>
+              <a:ext uri="{FF2B5EF4-FFF2-40B4-BE49-F238E27FC236}">
+                <a16:creationId xmlns:a16="http://schemas.microsoft.com/office/drawing/2014/main" id="{60EBF4FF-D73F-0368-0A47-8DD10FB69641}"/>
+              </a:ext>
+            </a:extLst>
+          </p:cNvPr>
+          <p:cNvSpPr>
+            <a:spLocks noGrp="1"/>
+          </p:cNvSpPr>
+          <p:nvPr>
+            <p:ph type="subTitle" idx="1"/>
+          </p:nvPr>
+        </p:nvSpPr>
+        <p:spPr>
+          <a:xfrm>
+            <a:off x="251520" y="692696"/>
+            <a:ext cx="8640960" cy="6480720"/>
+          </a:xfrm>
+        </p:spPr>
+        <p:txBody>
+          <a:bodyPr>
+            <a:noAutofit/>
+          </a:bodyPr>
+          <a:lstStyle/>
+          <a:p>
+            <a:r>
+              <a:rPr lang="en-GB" sz="3600" dirty="0">
+                <a:solidFill>
+                  <a:schemeClr val="bg1"/>
+                </a:solidFill>
+              </a:rPr>
+              <a:t>That I put my faith in Jesus</a:t>
+            </a:r>
+          </a:p>
+          <a:p>
+            <a:r>
+              <a:rPr lang="en-GB" sz="3600" dirty="0" err="1">
+                <a:solidFill>
+                  <a:schemeClr val="bg1"/>
+                </a:solidFill>
+              </a:rPr>
+              <a:t>'Cause</a:t>
+            </a:r>
+            <a:r>
+              <a:rPr lang="en-GB" sz="3600" dirty="0">
+                <a:solidFill>
+                  <a:schemeClr val="bg1"/>
+                </a:solidFill>
+              </a:rPr>
+              <a:t> He's never let me down</a:t>
+            </a:r>
+          </a:p>
+          <a:p>
+            <a:r>
+              <a:rPr lang="en-GB" sz="3600" dirty="0">
+                <a:solidFill>
+                  <a:schemeClr val="bg1"/>
+                </a:solidFill>
+              </a:rPr>
+              <a:t>He's faithful through generations</a:t>
+            </a:r>
+          </a:p>
+          <a:p>
+            <a:r>
+              <a:rPr lang="en-GB" sz="3600" dirty="0">
+                <a:solidFill>
+                  <a:schemeClr val="bg1"/>
+                </a:solidFill>
+              </a:rPr>
+              <a:t>So why would He fail now</a:t>
+            </a:r>
+          </a:p>
+        </p:txBody>
+      </p:sp>
+      <p:sp>
+        <p:nvSpPr>
+          <p:cNvPr id="4" name="TextBox 3">
+            <a:extLst>
+              <a:ext uri="{FF2B5EF4-FFF2-40B4-BE49-F238E27FC236}">
+                <a16:creationId xmlns:a16="http://schemas.microsoft.com/office/drawing/2014/main" id="{D96B425B-D41C-24DD-3A5F-EBB18770A7BC}"/>
+              </a:ext>
+            </a:extLst>
+          </p:cNvPr>
+          <p:cNvSpPr txBox="1"/>
+          <p:nvPr/>
+        </p:nvSpPr>
+        <p:spPr>
+          <a:xfrm>
+            <a:off x="8460432" y="0"/>
+            <a:ext cx="784189" cy="461665"/>
+          </a:xfrm>
+          <a:prstGeom prst="rect">
+            <a:avLst/>
+          </a:prstGeom>
+          <a:noFill/>
+        </p:spPr>
+        <p:txBody>
+          <a:bodyPr wrap="none" rtlCol="0">
+            <a:spAutoFit/>
+          </a:bodyPr>
+          <a:lstStyle/>
+          <a:p>
+            <a:r>
+              <a:rPr lang="en-GB" sz="2400" b="1" dirty="0" smtClean="0">
+                <a:solidFill>
+                  <a:schemeClr val="bg1"/>
+                </a:solidFill>
+              </a:rPr>
+              <a:t>8/14</a:t>
+            </a:r>
+            <a:endParaRPr lang="en-GB" sz="2400" b="1" dirty="0">
+              <a:solidFill>
+                <a:schemeClr val="bg1"/>
+              </a:solidFill>
+            </a:endParaRPr>
+          </a:p>
+        </p:txBody>
+      </p:sp>
+    </p:spTree>
+    <p:extLst>
+      <p:ext uri="{BB962C8B-B14F-4D97-AF65-F5344CB8AC3E}">
+        <p14:creationId xmlns:p14="http://schemas.microsoft.com/office/powerpoint/2010/main" val="140975178"/>
+      </p:ext>
+    </p:extLst>
+  </p:cSld>
+  <p:clrMapOvr>
+    <a:masterClrMapping/>
+  </p:clrMapOvr>
+  <p:timing>
+    <p:tnLst>
+      <p:par>
+        <p:cTn id="1" dur="indefinite" restart="never" nodeType="tmRoot"/>
+      </p:par>
+    </p:tnLst>
+  </p:timing>
+</p:sld>
+</file>
+
+<file path=ppt/slides/slide24.xml><?xml version="1.0" encoding="utf-8"?>
 <p:sld xmlns:a="http://schemas.openxmlformats.org/drawingml/2006/main" xmlns:r="http://schemas.openxmlformats.org/officeDocument/2006/relationships" xmlns:p="http://schemas.openxmlformats.org/presentationml/2006/main">
   <p:cSld>
     <p:spTree>
@@ -5972,54 +6325,73 @@
                   <a:schemeClr val="bg1"/>
                 </a:solidFill>
               </a:rPr>
-              <a:t>I'm going to make it through</a:t>
-            </a:r>
-          </a:p>
-          <a:p>
-            <a:r>
-              <a:rPr lang="en-GB" sz="4000" dirty="0" err="1">
-                <a:solidFill>
-                  <a:schemeClr val="bg1"/>
-                </a:solidFill>
-              </a:rPr>
-              <a:t>‘Cause</a:t>
-            </a:r>
-            <a:r>
+              <a:t>He won’t</a:t>
+            </a:r>
+            <a:br>
               <a:rPr lang="en-GB" sz="4000" dirty="0">
                 <a:solidFill>
                   <a:schemeClr val="bg1"/>
                 </a:solidFill>
               </a:rPr>
-              <a:t> I’m standing strong on You</a:t>
-            </a:r>
-          </a:p>
-          <a:p>
+            </a:br>
             <a:r>
               <a:rPr lang="en-GB" sz="4000" dirty="0">
                 <a:solidFill>
                   <a:schemeClr val="bg1"/>
                 </a:solidFill>
               </a:rPr>
-              <a:t>I’m going to make it through</a:t>
-            </a:r>
-          </a:p>
-          <a:p>
-            <a:r>
-              <a:rPr lang="en-GB" sz="4000" dirty="0" err="1">
-                <a:solidFill>
-                  <a:schemeClr val="bg1"/>
-                </a:solidFill>
-              </a:rPr>
-              <a:t>‘Cause</a:t>
-            </a:r>
+              <a:t>He won't</a:t>
+            </a:r>
+          </a:p>
+          <a:p>
             <a:r>
               <a:rPr lang="en-GB" sz="4000" dirty="0">
                 <a:solidFill>
                   <a:schemeClr val="bg1"/>
                 </a:solidFill>
               </a:rPr>
-              <a:t> my house is built on You</a:t>
-            </a:r>
+              <a:t>He won't fail</a:t>
+            </a:r>
+          </a:p>
+          <a:p>
+            <a:r>
+              <a:rPr lang="en-GB" sz="4000" dirty="0">
+                <a:solidFill>
+                  <a:schemeClr val="bg1"/>
+                </a:solidFill>
+              </a:rPr>
+              <a:t>He won't </a:t>
+            </a:r>
+            <a:r>
+              <a:rPr lang="en-GB" sz="4000" dirty="0" smtClean="0">
+                <a:solidFill>
+                  <a:schemeClr val="bg1"/>
+                </a:solidFill>
+              </a:rPr>
+              <a:t>fail</a:t>
+            </a:r>
+          </a:p>
+          <a:p>
+            <a:endParaRPr lang="en-GB" sz="4000" dirty="0">
+              <a:solidFill>
+                <a:schemeClr val="bg1"/>
+              </a:solidFill>
+            </a:endParaRPr>
+          </a:p>
+          <a:p>
+            <a:r>
+              <a:rPr lang="en-GB" sz="4000" dirty="0" smtClean="0">
+                <a:solidFill>
+                  <a:schemeClr val="bg1"/>
+                </a:solidFill>
+              </a:rPr>
+              <a:t>(Repeat)</a:t>
+            </a:r>
+            <a:endParaRPr lang="en-GB" sz="4000" dirty="0">
+              <a:solidFill>
+                <a:schemeClr val="bg1"/>
+              </a:solidFill>
+            </a:endParaRPr>
           </a:p>
         </p:txBody>
       </p:sp>
@@ -6031,7 +6403,7 @@
         </p:nvSpPr>
         <p:spPr>
           <a:xfrm>
-            <a:off x="8370580" y="-14941"/>
+            <a:off x="8388424" y="0"/>
             <a:ext cx="784189" cy="461665"/>
           </a:xfrm>
           <a:prstGeom prst="rect">
@@ -6046,13 +6418,310 @@
           <a:lstStyle/>
           <a:p>
             <a:r>
-              <a:rPr lang="en-GB" sz="2400" b="1" dirty="0">
-                <a:solidFill>
-                  <a:schemeClr val="bg1"/>
-                </a:solidFill>
-              </a:rPr>
-              <a:t>8/11</a:t>
-            </a:r>
+              <a:rPr lang="en-GB" sz="2400" b="1" dirty="0" smtClean="0">
+                <a:solidFill>
+                  <a:schemeClr val="bg1"/>
+                </a:solidFill>
+              </a:rPr>
+              <a:t>9/14</a:t>
+            </a:r>
+            <a:endParaRPr lang="en-GB" sz="2400" b="1" dirty="0">
+              <a:solidFill>
+                <a:schemeClr val="bg1"/>
+              </a:solidFill>
+            </a:endParaRPr>
+          </a:p>
+        </p:txBody>
+      </p:sp>
+    </p:spTree>
+    <p:extLst>
+      <p:ext uri="{BB962C8B-B14F-4D97-AF65-F5344CB8AC3E}">
+        <p14:creationId xmlns:p14="http://schemas.microsoft.com/office/powerpoint/2010/main" val="4289977082"/>
+      </p:ext>
+    </p:extLst>
+  </p:cSld>
+  <p:clrMapOvr>
+    <a:masterClrMapping/>
+  </p:clrMapOvr>
+  <p:timing>
+    <p:tnLst>
+      <p:par>
+        <p:cTn id="1" dur="indefinite" restart="never" nodeType="tmRoot"/>
+      </p:par>
+    </p:tnLst>
+  </p:timing>
+</p:sld>
+</file>
+
+<file path=ppt/slides/slide25.xml><?xml version="1.0" encoding="utf-8"?>
+<p:sld xmlns:a="http://schemas.openxmlformats.org/drawingml/2006/main" xmlns:r="http://schemas.openxmlformats.org/officeDocument/2006/relationships" xmlns:p="http://schemas.openxmlformats.org/presentationml/2006/main">
+  <p:cSld>
+    <p:spTree>
+      <p:nvGrpSpPr>
+        <p:cNvPr id="1" name=""/>
+        <p:cNvGrpSpPr/>
+        <p:nvPr/>
+      </p:nvGrpSpPr>
+      <p:grpSpPr>
+        <a:xfrm>
+          <a:off x="0" y="0"/>
+          <a:ext cx="0" cy="0"/>
+          <a:chOff x="0" y="0"/>
+          <a:chExt cx="0" cy="0"/>
+        </a:xfrm>
+      </p:grpSpPr>
+      <p:sp>
+        <p:nvSpPr>
+          <p:cNvPr id="3" name="Subtitle 2"/>
+          <p:cNvSpPr>
+            <a:spLocks noGrp="1"/>
+          </p:cNvSpPr>
+          <p:nvPr>
+            <p:ph type="subTitle" idx="1"/>
+          </p:nvPr>
+        </p:nvSpPr>
+        <p:spPr>
+          <a:xfrm>
+            <a:off x="323528" y="764704"/>
+            <a:ext cx="8640960" cy="6480720"/>
+          </a:xfrm>
+        </p:spPr>
+        <p:txBody>
+          <a:bodyPr>
+            <a:noAutofit/>
+          </a:bodyPr>
+          <a:lstStyle/>
+          <a:p>
+            <a:r>
+              <a:rPr lang="en-GB" sz="4000" dirty="0">
+                <a:solidFill>
+                  <a:schemeClr val="bg1"/>
+                </a:solidFill>
+              </a:rPr>
+              <a:t>Rain came and wind blew</a:t>
+            </a:r>
+          </a:p>
+          <a:p>
+            <a:r>
+              <a:rPr lang="en-GB" sz="4000" dirty="0">
+                <a:solidFill>
+                  <a:schemeClr val="bg1"/>
+                </a:solidFill>
+              </a:rPr>
+              <a:t>My house was built on You</a:t>
+            </a:r>
+          </a:p>
+          <a:p>
+            <a:r>
+              <a:rPr lang="en-GB" sz="4000" dirty="0">
+                <a:solidFill>
+                  <a:schemeClr val="bg1"/>
+                </a:solidFill>
+              </a:rPr>
+              <a:t>I'm safe with You</a:t>
+            </a:r>
+          </a:p>
+          <a:p>
+            <a:r>
+              <a:rPr lang="en-GB" sz="4000" dirty="0">
+                <a:solidFill>
+                  <a:schemeClr val="bg1"/>
+                </a:solidFill>
+              </a:rPr>
+              <a:t>I'm going to make it through</a:t>
+            </a:r>
+          </a:p>
+        </p:txBody>
+      </p:sp>
+      <p:sp>
+        <p:nvSpPr>
+          <p:cNvPr id="4" name="TextBox 3"/>
+          <p:cNvSpPr txBox="1"/>
+          <p:nvPr/>
+        </p:nvSpPr>
+        <p:spPr>
+          <a:xfrm>
+            <a:off x="8204319" y="0"/>
+            <a:ext cx="939681" cy="461665"/>
+          </a:xfrm>
+          <a:prstGeom prst="rect">
+            <a:avLst/>
+          </a:prstGeom>
+          <a:noFill/>
+        </p:spPr>
+        <p:txBody>
+          <a:bodyPr wrap="none" rtlCol="0">
+            <a:spAutoFit/>
+          </a:bodyPr>
+          <a:lstStyle/>
+          <a:p>
+            <a:r>
+              <a:rPr lang="en-GB" sz="2400" b="1" dirty="0" smtClean="0">
+                <a:solidFill>
+                  <a:schemeClr val="bg1"/>
+                </a:solidFill>
+              </a:rPr>
+              <a:t>10/14</a:t>
+            </a:r>
+            <a:endParaRPr lang="en-GB" sz="2400" b="1" dirty="0">
+              <a:solidFill>
+                <a:schemeClr val="bg1"/>
+              </a:solidFill>
+            </a:endParaRPr>
+          </a:p>
+        </p:txBody>
+      </p:sp>
+    </p:spTree>
+    <p:extLst>
+      <p:ext uri="{BB962C8B-B14F-4D97-AF65-F5344CB8AC3E}">
+        <p14:creationId xmlns:p14="http://schemas.microsoft.com/office/powerpoint/2010/main" val="3141125249"/>
+      </p:ext>
+    </p:extLst>
+  </p:cSld>
+  <p:clrMapOvr>
+    <a:masterClrMapping/>
+  </p:clrMapOvr>
+  <p:timing>
+    <p:tnLst>
+      <p:par>
+        <p:cTn id="1" dur="indefinite" restart="never" nodeType="tmRoot"/>
+      </p:par>
+    </p:tnLst>
+  </p:timing>
+</p:sld>
+</file>
+
+<file path=ppt/slides/slide26.xml><?xml version="1.0" encoding="utf-8"?>
+<p:sld xmlns:a="http://schemas.openxmlformats.org/drawingml/2006/main" xmlns:r="http://schemas.openxmlformats.org/officeDocument/2006/relationships" xmlns:p="http://schemas.openxmlformats.org/presentationml/2006/main">
+  <p:cSld>
+    <p:spTree>
+      <p:nvGrpSpPr>
+        <p:cNvPr id="1" name=""/>
+        <p:cNvGrpSpPr/>
+        <p:nvPr/>
+      </p:nvGrpSpPr>
+      <p:grpSpPr>
+        <a:xfrm>
+          <a:off x="0" y="0"/>
+          <a:ext cx="0" cy="0"/>
+          <a:chOff x="0" y="0"/>
+          <a:chExt cx="0" cy="0"/>
+        </a:xfrm>
+      </p:grpSpPr>
+      <p:sp>
+        <p:nvSpPr>
+          <p:cNvPr id="3" name="Subtitle 2"/>
+          <p:cNvSpPr>
+            <a:spLocks noGrp="1"/>
+          </p:cNvSpPr>
+          <p:nvPr>
+            <p:ph type="subTitle" idx="1"/>
+          </p:nvPr>
+        </p:nvSpPr>
+        <p:spPr>
+          <a:xfrm>
+            <a:off x="251520" y="764704"/>
+            <a:ext cx="8640960" cy="6480720"/>
+          </a:xfrm>
+        </p:spPr>
+        <p:txBody>
+          <a:bodyPr>
+            <a:noAutofit/>
+          </a:bodyPr>
+          <a:lstStyle/>
+          <a:p>
+            <a:r>
+              <a:rPr lang="en-GB" sz="4000" dirty="0">
+                <a:solidFill>
+                  <a:schemeClr val="bg1"/>
+                </a:solidFill>
+              </a:rPr>
+              <a:t>I'm going to make it through</a:t>
+            </a:r>
+          </a:p>
+          <a:p>
+            <a:r>
+              <a:rPr lang="en-GB" sz="4000" dirty="0" err="1">
+                <a:solidFill>
+                  <a:schemeClr val="bg1"/>
+                </a:solidFill>
+              </a:rPr>
+              <a:t>‘Cause</a:t>
+            </a:r>
+            <a:r>
+              <a:rPr lang="en-GB" sz="4000" dirty="0">
+                <a:solidFill>
+                  <a:schemeClr val="bg1"/>
+                </a:solidFill>
+              </a:rPr>
+              <a:t> I’m standing strong on You</a:t>
+            </a:r>
+          </a:p>
+          <a:p>
+            <a:r>
+              <a:rPr lang="en-GB" sz="4000" dirty="0">
+                <a:solidFill>
+                  <a:schemeClr val="bg1"/>
+                </a:solidFill>
+              </a:rPr>
+              <a:t>I’m going to make it through</a:t>
+            </a:r>
+          </a:p>
+          <a:p>
+            <a:r>
+              <a:rPr lang="en-GB" sz="4000" dirty="0" err="1">
+                <a:solidFill>
+                  <a:schemeClr val="bg1"/>
+                </a:solidFill>
+              </a:rPr>
+              <a:t>‘Cause</a:t>
+            </a:r>
+            <a:r>
+              <a:rPr lang="en-GB" sz="4000" dirty="0">
+                <a:solidFill>
+                  <a:schemeClr val="bg1"/>
+                </a:solidFill>
+              </a:rPr>
+              <a:t> my house is built on You</a:t>
+            </a:r>
+          </a:p>
+        </p:txBody>
+      </p:sp>
+      <p:sp>
+        <p:nvSpPr>
+          <p:cNvPr id="4" name="TextBox 3"/>
+          <p:cNvSpPr txBox="1"/>
+          <p:nvPr/>
+        </p:nvSpPr>
+        <p:spPr>
+          <a:xfrm>
+            <a:off x="8204319" y="0"/>
+            <a:ext cx="939681" cy="461665"/>
+          </a:xfrm>
+          <a:prstGeom prst="rect">
+            <a:avLst/>
+          </a:prstGeom>
+          <a:noFill/>
+        </p:spPr>
+        <p:txBody>
+          <a:bodyPr wrap="none" rtlCol="0">
+            <a:spAutoFit/>
+          </a:bodyPr>
+          <a:lstStyle/>
+          <a:p>
+            <a:r>
+              <a:rPr lang="en-GB" sz="2400" b="1" dirty="0" smtClean="0">
+                <a:solidFill>
+                  <a:schemeClr val="bg1"/>
+                </a:solidFill>
+              </a:rPr>
+              <a:t>11/14</a:t>
+            </a:r>
+            <a:endParaRPr lang="en-GB" sz="2400" b="1" dirty="0">
+              <a:solidFill>
+                <a:schemeClr val="bg1"/>
+              </a:solidFill>
+            </a:endParaRPr>
           </a:p>
         </p:txBody>
       </p:sp>
@@ -6066,10 +6735,17 @@
   <p:clrMapOvr>
     <a:masterClrMapping/>
   </p:clrMapOvr>
+  <p:timing>
+    <p:tnLst>
+      <p:par>
+        <p:cTn id="1" dur="indefinite" restart="never" nodeType="tmRoot"/>
+      </p:par>
+    </p:tnLst>
+  </p:timing>
 </p:sld>
 </file>
 
-<file path=ppt/slides/slide24.xml><?xml version="1.0" encoding="utf-8"?>
+<file path=ppt/slides/slide27.xml><?xml version="1.0" encoding="utf-8"?>
 <p:sld xmlns:a="http://schemas.openxmlformats.org/drawingml/2006/main" xmlns:r="http://schemas.openxmlformats.org/officeDocument/2006/relationships" xmlns:p="http://schemas.openxmlformats.org/presentationml/2006/main">
   <p:cSld>
     <p:spTree>
@@ -6175,8 +6851,8 @@
         </p:nvSpPr>
         <p:spPr>
           <a:xfrm>
-            <a:off x="8388424" y="0"/>
-            <a:ext cx="784189" cy="461665"/>
+            <a:off x="8183815" y="9312"/>
+            <a:ext cx="939681" cy="461665"/>
           </a:xfrm>
           <a:prstGeom prst="rect">
             <a:avLst/>
@@ -6190,13 +6866,18 @@
           <a:lstStyle/>
           <a:p>
             <a:r>
-              <a:rPr lang="en-GB" sz="2400" b="1" dirty="0">
-                <a:solidFill>
-                  <a:schemeClr val="bg1"/>
-                </a:solidFill>
-              </a:rPr>
-              <a:t>9/11</a:t>
-            </a:r>
+              <a:rPr lang="en-GB" sz="2400" b="1" dirty="0" smtClean="0">
+                <a:solidFill>
+                  <a:schemeClr val="bg1"/>
+                </a:solidFill>
+              </a:rPr>
+              <a:t>12/14</a:t>
+            </a:r>
+            <a:endParaRPr lang="en-GB" sz="2400" b="1" dirty="0">
+              <a:solidFill>
+                <a:schemeClr val="bg1"/>
+              </a:solidFill>
+            </a:endParaRPr>
           </a:p>
         </p:txBody>
       </p:sp>
@@ -6210,10 +6891,17 @@
   <p:clrMapOvr>
     <a:masterClrMapping/>
   </p:clrMapOvr>
+  <p:timing>
+    <p:tnLst>
+      <p:par>
+        <p:cTn id="1" dur="indefinite" restart="never" nodeType="tmRoot"/>
+      </p:par>
+    </p:tnLst>
+  </p:timing>
 </p:sld>
 </file>
 
-<file path=ppt/slides/slide25.xml><?xml version="1.0" encoding="utf-8"?>
+<file path=ppt/slides/slide28.xml><?xml version="1.0" encoding="utf-8"?>
 <p:sld xmlns:a="http://schemas.openxmlformats.org/drawingml/2006/main" xmlns:r="http://schemas.openxmlformats.org/officeDocument/2006/relationships" xmlns:p="http://schemas.openxmlformats.org/presentationml/2006/main">
   <p:cSld>
     <p:spTree>
@@ -6342,13 +7030,18 @@
           <a:lstStyle/>
           <a:p>
             <a:r>
-              <a:rPr lang="en-GB" sz="2400" b="1" dirty="0">
-                <a:solidFill>
-                  <a:schemeClr val="bg1"/>
-                </a:solidFill>
-              </a:rPr>
-              <a:t>10/11</a:t>
-            </a:r>
+              <a:rPr lang="en-GB" sz="2400" b="1" dirty="0" smtClean="0">
+                <a:solidFill>
+                  <a:schemeClr val="bg1"/>
+                </a:solidFill>
+              </a:rPr>
+              <a:t>13/14</a:t>
+            </a:r>
+            <a:endParaRPr lang="en-GB" sz="2400" b="1" dirty="0">
+              <a:solidFill>
+                <a:schemeClr val="bg1"/>
+              </a:solidFill>
+            </a:endParaRPr>
           </a:p>
         </p:txBody>
       </p:sp>
@@ -6362,10 +7055,17 @@
   <p:clrMapOvr>
     <a:masterClrMapping/>
   </p:clrMapOvr>
+  <p:timing>
+    <p:tnLst>
+      <p:par>
+        <p:cTn id="1" dur="indefinite" restart="never" nodeType="tmRoot"/>
+      </p:par>
+    </p:tnLst>
+  </p:timing>
 </p:sld>
 </file>
 
-<file path=ppt/slides/slide26.xml><?xml version="1.0" encoding="utf-8"?>
+<file path=ppt/slides/slide29.xml><?xml version="1.0" encoding="utf-8"?>
 <p:sld xmlns:a="http://schemas.openxmlformats.org/drawingml/2006/main" xmlns:r="http://schemas.openxmlformats.org/officeDocument/2006/relationships" xmlns:p="http://schemas.openxmlformats.org/presentationml/2006/main">
   <p:cSld>
     <p:spTree>
@@ -6491,13 +7191,18 @@
           <a:lstStyle/>
           <a:p>
             <a:r>
-              <a:rPr lang="en-GB" sz="2400" b="1" dirty="0">
-                <a:solidFill>
-                  <a:schemeClr val="bg1"/>
-                </a:solidFill>
-              </a:rPr>
-              <a:t>11/11</a:t>
-            </a:r>
+              <a:rPr lang="en-GB" sz="2400" b="1" dirty="0" smtClean="0">
+                <a:solidFill>
+                  <a:schemeClr val="bg1"/>
+                </a:solidFill>
+              </a:rPr>
+              <a:t>14/14</a:t>
+            </a:r>
+            <a:endParaRPr lang="en-GB" sz="2400" b="1" dirty="0">
+              <a:solidFill>
+                <a:schemeClr val="bg1"/>
+              </a:solidFill>
+            </a:endParaRPr>
           </a:p>
         </p:txBody>
       </p:sp>
@@ -6511,452 +7216,13 @@
   <p:clrMapOvr>
     <a:masterClrMapping/>
   </p:clrMapOvr>
-</p:sld>
-</file>
-
-<file path=ppt/slides/slide27.xml><?xml version="1.0" encoding="utf-8"?>
-<p:sld xmlns:a="http://schemas.openxmlformats.org/drawingml/2006/main" xmlns:r="http://schemas.openxmlformats.org/officeDocument/2006/relationships" xmlns:p="http://schemas.openxmlformats.org/presentationml/2006/main">
-  <p:cSld>
-    <p:spTree>
-      <p:nvGrpSpPr>
-        <p:cNvPr id="1" name=""/>
-        <p:cNvGrpSpPr/>
-        <p:nvPr/>
-      </p:nvGrpSpPr>
-      <p:grpSpPr>
-        <a:xfrm>
-          <a:off x="0" y="0"/>
-          <a:ext cx="0" cy="0"/>
-          <a:chOff x="0" y="0"/>
-          <a:chExt cx="0" cy="0"/>
-        </a:xfrm>
-      </p:grpSpPr>
-      <p:sp>
-        <p:nvSpPr>
-          <p:cNvPr id="3" name="Subtitle 2"/>
-          <p:cNvSpPr>
-            <a:spLocks noGrp="1"/>
-          </p:cNvSpPr>
-          <p:nvPr>
-            <p:ph type="subTitle" idx="1"/>
-          </p:nvPr>
-        </p:nvSpPr>
-        <p:spPr>
-          <a:xfrm>
-            <a:off x="323528" y="188640"/>
-            <a:ext cx="8640960" cy="6480720"/>
-          </a:xfrm>
-        </p:spPr>
-        <p:txBody>
-          <a:bodyPr>
-            <a:noAutofit/>
-          </a:bodyPr>
-          <a:lstStyle/>
-          <a:p>
-            <a:endParaRPr lang="en-GB" sz="5400" dirty="0">
-              <a:solidFill>
-                <a:schemeClr val="bg1"/>
-              </a:solidFill>
-            </a:endParaRPr>
-          </a:p>
-          <a:p>
-            <a:r>
-              <a:rPr lang="en-GB" sz="4400" b="0" i="0" dirty="0">
-                <a:solidFill>
-                  <a:srgbClr val="00A3E0"/>
-                </a:solidFill>
-                <a:effectLst/>
-                <a:latin typeface="akagi_probook"/>
-              </a:rPr>
-              <a:t>Abide With Me</a:t>
-            </a:r>
-          </a:p>
-          <a:p>
-            <a:br>
-              <a:rPr lang="en-GB" sz="1200" dirty="0">
-                <a:solidFill>
-                  <a:schemeClr val="bg1"/>
-                </a:solidFill>
-              </a:rPr>
-            </a:br>
-            <a:br>
-              <a:rPr lang="en-GB" sz="1200" dirty="0">
-                <a:solidFill>
-                  <a:schemeClr val="bg1"/>
-                </a:solidFill>
-              </a:rPr>
-            </a:br>
-            <a:r>
-              <a:rPr lang="en-GB" sz="1200" dirty="0">
-                <a:solidFill>
-                  <a:schemeClr val="bg1"/>
-                </a:solidFill>
-              </a:rPr>
-              <a:t>CCLI Song # 7038447</a:t>
-            </a:r>
-          </a:p>
-          <a:p>
-            <a:r>
-              <a:rPr lang="en-GB" sz="1200" dirty="0">
-                <a:solidFill>
-                  <a:schemeClr val="bg1"/>
-                </a:solidFill>
-              </a:rPr>
-              <a:t>David Crowder | Jason Ingram | Matt Maher | Matt Redman</a:t>
-            </a:r>
-          </a:p>
-          <a:p>
-            <a:r>
-              <a:rPr lang="en-GB" sz="1200" dirty="0">
-                <a:solidFill>
-                  <a:schemeClr val="bg1"/>
-                </a:solidFill>
-              </a:rPr>
-              <a:t>© </a:t>
-            </a:r>
-            <a:r>
-              <a:rPr lang="en-GB" sz="1200" dirty="0" err="1">
-                <a:solidFill>
-                  <a:schemeClr val="bg1"/>
-                </a:solidFill>
-              </a:rPr>
-              <a:t>Inot</a:t>
-            </a:r>
-            <a:r>
-              <a:rPr lang="en-GB" sz="1200" dirty="0">
-                <a:solidFill>
-                  <a:schemeClr val="bg1"/>
-                </a:solidFill>
-              </a:rPr>
-              <a:t> Music; </a:t>
-            </a:r>
-            <a:r>
-              <a:rPr lang="en-GB" sz="1200" dirty="0" err="1">
-                <a:solidFill>
-                  <a:schemeClr val="bg1"/>
-                </a:solidFill>
-              </a:rPr>
-              <a:t>sixsteps</a:t>
-            </a:r>
-            <a:r>
-              <a:rPr lang="en-GB" sz="1200" dirty="0">
-                <a:solidFill>
-                  <a:schemeClr val="bg1"/>
-                </a:solidFill>
-              </a:rPr>
-              <a:t> Music; worshiptogether.com songs; Be Essential Songs; I Am A Pilgrim Songs; Open Hands Music; So Essential Tunes; Said And Done Music; Thankyou Music Ltd</a:t>
-            </a:r>
-          </a:p>
-          <a:p>
-            <a:r>
-              <a:rPr lang="en-GB" sz="1200" dirty="0">
-                <a:solidFill>
-                  <a:schemeClr val="bg1"/>
-                </a:solidFill>
-              </a:rPr>
-              <a:t>For use solely with the </a:t>
-            </a:r>
-            <a:r>
-              <a:rPr lang="en-GB" sz="1200" dirty="0" err="1">
-                <a:solidFill>
-                  <a:schemeClr val="bg1"/>
-                </a:solidFill>
-              </a:rPr>
-              <a:t>SongSelect</a:t>
-            </a:r>
-            <a:r>
-              <a:rPr lang="en-GB" sz="1200" dirty="0">
-                <a:solidFill>
-                  <a:schemeClr val="bg1"/>
-                </a:solidFill>
-              </a:rPr>
-              <a:t>® Terms of Use. All rights reserved. www.ccli.com</a:t>
-            </a:r>
-          </a:p>
-          <a:p>
-            <a:r>
-              <a:rPr lang="en-GB" sz="1200" dirty="0">
-                <a:solidFill>
-                  <a:schemeClr val="bg1"/>
-                </a:solidFill>
-              </a:rPr>
-              <a:t>CCLI Licence No. 33265</a:t>
-            </a:r>
-          </a:p>
-        </p:txBody>
-      </p:sp>
-    </p:spTree>
-    <p:extLst>
-      <p:ext uri="{BB962C8B-B14F-4D97-AF65-F5344CB8AC3E}">
-        <p14:creationId xmlns:p14="http://schemas.microsoft.com/office/powerpoint/2010/main" val="1409846879"/>
-      </p:ext>
-    </p:extLst>
-  </p:cSld>
-  <p:clrMapOvr>
-    <a:masterClrMapping/>
-  </p:clrMapOvr>
-</p:sld>
-</file>
-
-<file path=ppt/slides/slide28.xml><?xml version="1.0" encoding="utf-8"?>
-<p:sld xmlns:a="http://schemas.openxmlformats.org/drawingml/2006/main" xmlns:r="http://schemas.openxmlformats.org/officeDocument/2006/relationships" xmlns:p="http://schemas.openxmlformats.org/presentationml/2006/main">
-  <p:cSld>
-    <p:spTree>
-      <p:nvGrpSpPr>
-        <p:cNvPr id="1" name=""/>
-        <p:cNvGrpSpPr/>
-        <p:nvPr/>
-      </p:nvGrpSpPr>
-      <p:grpSpPr>
-        <a:xfrm>
-          <a:off x="0" y="0"/>
-          <a:ext cx="0" cy="0"/>
-          <a:chOff x="0" y="0"/>
-          <a:chExt cx="0" cy="0"/>
-        </a:xfrm>
-      </p:grpSpPr>
-      <p:sp>
-        <p:nvSpPr>
-          <p:cNvPr id="3" name="Subtitle 2"/>
-          <p:cNvSpPr>
-            <a:spLocks noGrp="1"/>
-          </p:cNvSpPr>
-          <p:nvPr>
-            <p:ph type="subTitle" idx="1"/>
-          </p:nvPr>
-        </p:nvSpPr>
-        <p:spPr>
-          <a:xfrm>
-            <a:off x="251520" y="836712"/>
-            <a:ext cx="8640960" cy="6480720"/>
-          </a:xfrm>
-        </p:spPr>
-        <p:txBody>
-          <a:bodyPr>
-            <a:noAutofit/>
-          </a:bodyPr>
-          <a:lstStyle/>
-          <a:p>
-            <a:r>
-              <a:rPr lang="en-GB" sz="3600" dirty="0">
-                <a:solidFill>
-                  <a:schemeClr val="bg1"/>
-                </a:solidFill>
-              </a:rPr>
-              <a:t>I have a home eternal home</a:t>
-            </a:r>
-          </a:p>
-          <a:p>
-            <a:r>
-              <a:rPr lang="en-GB" sz="3600" dirty="0">
-                <a:solidFill>
-                  <a:schemeClr val="bg1"/>
-                </a:solidFill>
-              </a:rPr>
-              <a:t>But for now I walk this broken world</a:t>
-            </a:r>
-          </a:p>
-          <a:p>
-            <a:r>
-              <a:rPr lang="en-GB" sz="3600" dirty="0">
-                <a:solidFill>
-                  <a:schemeClr val="bg1"/>
-                </a:solidFill>
-              </a:rPr>
-              <a:t>You walked it first You know our pain</a:t>
-            </a:r>
-          </a:p>
-          <a:p>
-            <a:r>
-              <a:rPr lang="en-GB" sz="3600" dirty="0">
-                <a:solidFill>
-                  <a:schemeClr val="bg1"/>
-                </a:solidFill>
-              </a:rPr>
-              <a:t>But You show hope can rise</a:t>
-            </a:r>
-          </a:p>
-          <a:p>
-            <a:r>
-              <a:rPr lang="en-GB" sz="3600" dirty="0">
-                <a:solidFill>
-                  <a:schemeClr val="bg1"/>
-                </a:solidFill>
-              </a:rPr>
-              <a:t>Again up from the grave</a:t>
-            </a:r>
-          </a:p>
-        </p:txBody>
-      </p:sp>
-      <p:sp>
-        <p:nvSpPr>
-          <p:cNvPr id="4" name="TextBox 3"/>
-          <p:cNvSpPr txBox="1"/>
-          <p:nvPr/>
-        </p:nvSpPr>
-        <p:spPr>
-          <a:xfrm>
-            <a:off x="8529729" y="0"/>
-            <a:ext cx="628698" cy="461665"/>
-          </a:xfrm>
-          <a:prstGeom prst="rect">
-            <a:avLst/>
-          </a:prstGeom>
-          <a:noFill/>
-        </p:spPr>
-        <p:txBody>
-          <a:bodyPr wrap="none" rtlCol="0">
-            <a:spAutoFit/>
-          </a:bodyPr>
-          <a:lstStyle/>
-          <a:p>
-            <a:r>
-              <a:rPr lang="en-GB" sz="2400" b="1" dirty="0">
-                <a:solidFill>
-                  <a:schemeClr val="bg1"/>
-                </a:solidFill>
-              </a:rPr>
-              <a:t>1/7</a:t>
-            </a:r>
-          </a:p>
-        </p:txBody>
-      </p:sp>
-    </p:spTree>
-    <p:extLst>
-      <p:ext uri="{BB962C8B-B14F-4D97-AF65-F5344CB8AC3E}">
-        <p14:creationId xmlns:p14="http://schemas.microsoft.com/office/powerpoint/2010/main" val="2175635830"/>
-      </p:ext>
-    </p:extLst>
-  </p:cSld>
-  <p:clrMapOvr>
-    <a:masterClrMapping/>
-  </p:clrMapOvr>
-</p:sld>
-</file>
-
-<file path=ppt/slides/slide29.xml><?xml version="1.0" encoding="utf-8"?>
-<p:sld xmlns:a="http://schemas.openxmlformats.org/drawingml/2006/main" xmlns:r="http://schemas.openxmlformats.org/officeDocument/2006/relationships" xmlns:p="http://schemas.openxmlformats.org/presentationml/2006/main">
-  <p:cSld>
-    <p:spTree>
-      <p:nvGrpSpPr>
-        <p:cNvPr id="1" name=""/>
-        <p:cNvGrpSpPr/>
-        <p:nvPr/>
-      </p:nvGrpSpPr>
-      <p:grpSpPr>
-        <a:xfrm>
-          <a:off x="0" y="0"/>
-          <a:ext cx="0" cy="0"/>
-          <a:chOff x="0" y="0"/>
-          <a:chExt cx="0" cy="0"/>
-        </a:xfrm>
-      </p:grpSpPr>
-      <p:sp>
-        <p:nvSpPr>
-          <p:cNvPr id="3" name="Subtitle 2"/>
-          <p:cNvSpPr>
-            <a:spLocks noGrp="1"/>
-          </p:cNvSpPr>
-          <p:nvPr>
-            <p:ph type="subTitle" idx="1"/>
-          </p:nvPr>
-        </p:nvSpPr>
-        <p:spPr>
-          <a:xfrm>
-            <a:off x="251520" y="764704"/>
-            <a:ext cx="8640960" cy="6480720"/>
-          </a:xfrm>
-        </p:spPr>
-        <p:txBody>
-          <a:bodyPr>
-            <a:noAutofit/>
-          </a:bodyPr>
-          <a:lstStyle/>
-          <a:p>
-            <a:r>
-              <a:rPr lang="en-GB" sz="3600" dirty="0">
-                <a:solidFill>
-                  <a:schemeClr val="bg1"/>
-                </a:solidFill>
-              </a:rPr>
-              <a:t>Abide with me abide with me</a:t>
-            </a:r>
-          </a:p>
-          <a:p>
-            <a:r>
-              <a:rPr lang="en-GB" sz="3600" dirty="0">
-                <a:solidFill>
-                  <a:schemeClr val="bg1"/>
-                </a:solidFill>
-              </a:rPr>
-              <a:t>Don't let me fall and don't let go</a:t>
-            </a:r>
-          </a:p>
-          <a:p>
-            <a:r>
-              <a:rPr lang="en-GB" sz="3600" dirty="0">
-                <a:solidFill>
-                  <a:schemeClr val="bg1"/>
-                </a:solidFill>
-              </a:rPr>
-              <a:t>Walk with me and never leave</a:t>
-            </a:r>
-          </a:p>
-          <a:p>
-            <a:r>
-              <a:rPr lang="en-GB" sz="3600" dirty="0">
-                <a:solidFill>
-                  <a:schemeClr val="bg1"/>
-                </a:solidFill>
-              </a:rPr>
-              <a:t>Ever close God abide with me</a:t>
-            </a:r>
-          </a:p>
-        </p:txBody>
-      </p:sp>
-      <p:sp>
-        <p:nvSpPr>
-          <p:cNvPr id="4" name="TextBox 3"/>
-          <p:cNvSpPr txBox="1"/>
-          <p:nvPr/>
-        </p:nvSpPr>
-        <p:spPr>
-          <a:xfrm>
-            <a:off x="8529729" y="0"/>
-            <a:ext cx="628698" cy="461665"/>
-          </a:xfrm>
-          <a:prstGeom prst="rect">
-            <a:avLst/>
-          </a:prstGeom>
-          <a:noFill/>
-        </p:spPr>
-        <p:txBody>
-          <a:bodyPr wrap="none" rtlCol="0">
-            <a:spAutoFit/>
-          </a:bodyPr>
-          <a:lstStyle/>
-          <a:p>
-            <a:r>
-              <a:rPr lang="en-GB" sz="2400" b="1" dirty="0">
-                <a:solidFill>
-                  <a:schemeClr val="bg1"/>
-                </a:solidFill>
-              </a:rPr>
-              <a:t>2/7</a:t>
-            </a:r>
-          </a:p>
-        </p:txBody>
-      </p:sp>
-    </p:spTree>
-    <p:extLst>
-      <p:ext uri="{BB962C8B-B14F-4D97-AF65-F5344CB8AC3E}">
-        <p14:creationId xmlns:p14="http://schemas.microsoft.com/office/powerpoint/2010/main" val="365095133"/>
-      </p:ext>
-    </p:extLst>
-  </p:cSld>
-  <p:clrMapOvr>
-    <a:masterClrMapping/>
-  </p:clrMapOvr>
+  <p:timing>
+    <p:tnLst>
+      <p:par>
+        <p:cTn id="1" dur="indefinite" restart="never" nodeType="tmRoot"/>
+      </p:par>
+    </p:tnLst>
+  </p:timing>
 </p:sld>
 </file>
 
@@ -7083,6 +7349,13 @@
   <p:clrMapOvr>
     <a:masterClrMapping/>
   </p:clrMapOvr>
+  <p:timing>
+    <p:tnLst>
+      <p:par>
+        <p:cTn id="1" dur="indefinite" restart="never" nodeType="tmRoot"/>
+      </p:par>
+    </p:tnLst>
+  </p:timing>
 </p:sld>
 </file>
 
@@ -7115,6 +7388,489 @@
         </p:nvSpPr>
         <p:spPr>
           <a:xfrm>
+            <a:off x="323528" y="188640"/>
+            <a:ext cx="8640960" cy="6480720"/>
+          </a:xfrm>
+        </p:spPr>
+        <p:txBody>
+          <a:bodyPr>
+            <a:noAutofit/>
+          </a:bodyPr>
+          <a:lstStyle/>
+          <a:p>
+            <a:endParaRPr lang="en-GB" sz="5400" dirty="0">
+              <a:solidFill>
+                <a:schemeClr val="bg1"/>
+              </a:solidFill>
+            </a:endParaRPr>
+          </a:p>
+          <a:p>
+            <a:r>
+              <a:rPr lang="en-GB" sz="4400" b="0" i="0" dirty="0">
+                <a:solidFill>
+                  <a:srgbClr val="00A3E0"/>
+                </a:solidFill>
+                <a:effectLst/>
+                <a:latin typeface="akagi_probook"/>
+              </a:rPr>
+              <a:t>Abide With Me</a:t>
+            </a:r>
+          </a:p>
+          <a:p>
+            <a:r>
+              <a:rPr lang="en-GB" sz="1200" dirty="0">
+                <a:solidFill>
+                  <a:schemeClr val="bg1"/>
+                </a:solidFill>
+              </a:rPr>
+              <a:t/>
+            </a:r>
+            <a:br>
+              <a:rPr lang="en-GB" sz="1200" dirty="0">
+                <a:solidFill>
+                  <a:schemeClr val="bg1"/>
+                </a:solidFill>
+              </a:rPr>
+            </a:br>
+            <a:r>
+              <a:rPr lang="en-GB" sz="1200" dirty="0">
+                <a:solidFill>
+                  <a:schemeClr val="bg1"/>
+                </a:solidFill>
+              </a:rPr>
+              <a:t/>
+            </a:r>
+            <a:br>
+              <a:rPr lang="en-GB" sz="1200" dirty="0">
+                <a:solidFill>
+                  <a:schemeClr val="bg1"/>
+                </a:solidFill>
+              </a:rPr>
+            </a:br>
+            <a:r>
+              <a:rPr lang="en-GB" sz="1200" dirty="0">
+                <a:solidFill>
+                  <a:schemeClr val="bg1"/>
+                </a:solidFill>
+              </a:rPr>
+              <a:t>CCLI Song # 7038447</a:t>
+            </a:r>
+          </a:p>
+          <a:p>
+            <a:r>
+              <a:rPr lang="en-GB" sz="1200" dirty="0">
+                <a:solidFill>
+                  <a:schemeClr val="bg1"/>
+                </a:solidFill>
+              </a:rPr>
+              <a:t>David Crowder | Jason Ingram | Matt Maher | Matt Redman</a:t>
+            </a:r>
+          </a:p>
+          <a:p>
+            <a:r>
+              <a:rPr lang="en-GB" sz="1200" dirty="0">
+                <a:solidFill>
+                  <a:schemeClr val="bg1"/>
+                </a:solidFill>
+              </a:rPr>
+              <a:t>© </a:t>
+            </a:r>
+            <a:r>
+              <a:rPr lang="en-GB" sz="1200" dirty="0" err="1">
+                <a:solidFill>
+                  <a:schemeClr val="bg1"/>
+                </a:solidFill>
+              </a:rPr>
+              <a:t>Inot</a:t>
+            </a:r>
+            <a:r>
+              <a:rPr lang="en-GB" sz="1200" dirty="0">
+                <a:solidFill>
+                  <a:schemeClr val="bg1"/>
+                </a:solidFill>
+              </a:rPr>
+              <a:t> Music; </a:t>
+            </a:r>
+            <a:r>
+              <a:rPr lang="en-GB" sz="1200" dirty="0" err="1">
+                <a:solidFill>
+                  <a:schemeClr val="bg1"/>
+                </a:solidFill>
+              </a:rPr>
+              <a:t>sixsteps</a:t>
+            </a:r>
+            <a:r>
+              <a:rPr lang="en-GB" sz="1200" dirty="0">
+                <a:solidFill>
+                  <a:schemeClr val="bg1"/>
+                </a:solidFill>
+              </a:rPr>
+              <a:t> Music; worshiptogether.com songs; Be Essential Songs; I Am A Pilgrim Songs; Open Hands Music; So Essential Tunes; Said And Done Music; Thankyou Music Ltd</a:t>
+            </a:r>
+          </a:p>
+          <a:p>
+            <a:r>
+              <a:rPr lang="en-GB" sz="1200" dirty="0">
+                <a:solidFill>
+                  <a:schemeClr val="bg1"/>
+                </a:solidFill>
+              </a:rPr>
+              <a:t>For use solely with the </a:t>
+            </a:r>
+            <a:r>
+              <a:rPr lang="en-GB" sz="1200" dirty="0" err="1">
+                <a:solidFill>
+                  <a:schemeClr val="bg1"/>
+                </a:solidFill>
+              </a:rPr>
+              <a:t>SongSelect</a:t>
+            </a:r>
+            <a:r>
+              <a:rPr lang="en-GB" sz="1200" dirty="0">
+                <a:solidFill>
+                  <a:schemeClr val="bg1"/>
+                </a:solidFill>
+              </a:rPr>
+              <a:t>® Terms of Use. All rights reserved. www.ccli.com</a:t>
+            </a:r>
+          </a:p>
+          <a:p>
+            <a:r>
+              <a:rPr lang="en-GB" sz="1200" dirty="0">
+                <a:solidFill>
+                  <a:schemeClr val="bg1"/>
+                </a:solidFill>
+              </a:rPr>
+              <a:t>CCLI Licence No. 33265</a:t>
+            </a:r>
+          </a:p>
+        </p:txBody>
+      </p:sp>
+    </p:spTree>
+    <p:extLst>
+      <p:ext uri="{BB962C8B-B14F-4D97-AF65-F5344CB8AC3E}">
+        <p14:creationId xmlns:p14="http://schemas.microsoft.com/office/powerpoint/2010/main" val="1409846879"/>
+      </p:ext>
+    </p:extLst>
+  </p:cSld>
+  <p:clrMapOvr>
+    <a:masterClrMapping/>
+  </p:clrMapOvr>
+  <p:timing>
+    <p:tnLst>
+      <p:par>
+        <p:cTn id="1" dur="indefinite" restart="never" nodeType="tmRoot"/>
+      </p:par>
+    </p:tnLst>
+  </p:timing>
+</p:sld>
+</file>
+
+<file path=ppt/slides/slide31.xml><?xml version="1.0" encoding="utf-8"?>
+<p:sld xmlns:a="http://schemas.openxmlformats.org/drawingml/2006/main" xmlns:r="http://schemas.openxmlformats.org/officeDocument/2006/relationships" xmlns:p="http://schemas.openxmlformats.org/presentationml/2006/main">
+  <p:cSld>
+    <p:spTree>
+      <p:nvGrpSpPr>
+        <p:cNvPr id="1" name=""/>
+        <p:cNvGrpSpPr/>
+        <p:nvPr/>
+      </p:nvGrpSpPr>
+      <p:grpSpPr>
+        <a:xfrm>
+          <a:off x="0" y="0"/>
+          <a:ext cx="0" cy="0"/>
+          <a:chOff x="0" y="0"/>
+          <a:chExt cx="0" cy="0"/>
+        </a:xfrm>
+      </p:grpSpPr>
+      <p:sp>
+        <p:nvSpPr>
+          <p:cNvPr id="3" name="Subtitle 2"/>
+          <p:cNvSpPr>
+            <a:spLocks noGrp="1"/>
+          </p:cNvSpPr>
+          <p:nvPr>
+            <p:ph type="subTitle" idx="1"/>
+          </p:nvPr>
+        </p:nvSpPr>
+        <p:spPr>
+          <a:xfrm>
+            <a:off x="251520" y="836712"/>
+            <a:ext cx="8640960" cy="6480720"/>
+          </a:xfrm>
+        </p:spPr>
+        <p:txBody>
+          <a:bodyPr>
+            <a:noAutofit/>
+          </a:bodyPr>
+          <a:lstStyle/>
+          <a:p>
+            <a:r>
+              <a:rPr lang="en-GB" sz="3600" dirty="0">
+                <a:solidFill>
+                  <a:schemeClr val="bg1"/>
+                </a:solidFill>
+              </a:rPr>
+              <a:t>I have a home eternal home</a:t>
+            </a:r>
+          </a:p>
+          <a:p>
+            <a:r>
+              <a:rPr lang="en-GB" sz="3600" dirty="0">
+                <a:solidFill>
+                  <a:schemeClr val="bg1"/>
+                </a:solidFill>
+              </a:rPr>
+              <a:t>But for now I walk this broken world</a:t>
+            </a:r>
+          </a:p>
+          <a:p>
+            <a:r>
+              <a:rPr lang="en-GB" sz="3600" dirty="0">
+                <a:solidFill>
+                  <a:schemeClr val="bg1"/>
+                </a:solidFill>
+              </a:rPr>
+              <a:t>You walked it first You know our pain</a:t>
+            </a:r>
+          </a:p>
+          <a:p>
+            <a:r>
+              <a:rPr lang="en-GB" sz="3600" dirty="0">
+                <a:solidFill>
+                  <a:schemeClr val="bg1"/>
+                </a:solidFill>
+              </a:rPr>
+              <a:t>But You show hope can rise</a:t>
+            </a:r>
+          </a:p>
+          <a:p>
+            <a:r>
+              <a:rPr lang="en-GB" sz="3600" dirty="0">
+                <a:solidFill>
+                  <a:schemeClr val="bg1"/>
+                </a:solidFill>
+              </a:rPr>
+              <a:t>Again up from the grave</a:t>
+            </a:r>
+          </a:p>
+        </p:txBody>
+      </p:sp>
+      <p:sp>
+        <p:nvSpPr>
+          <p:cNvPr id="4" name="TextBox 3"/>
+          <p:cNvSpPr txBox="1"/>
+          <p:nvPr/>
+        </p:nvSpPr>
+        <p:spPr>
+          <a:xfrm>
+            <a:off x="8529729" y="0"/>
+            <a:ext cx="628698" cy="461665"/>
+          </a:xfrm>
+          <a:prstGeom prst="rect">
+            <a:avLst/>
+          </a:prstGeom>
+          <a:noFill/>
+        </p:spPr>
+        <p:txBody>
+          <a:bodyPr wrap="none" rtlCol="0">
+            <a:spAutoFit/>
+          </a:bodyPr>
+          <a:lstStyle/>
+          <a:p>
+            <a:r>
+              <a:rPr lang="en-GB" sz="2400" b="1" dirty="0">
+                <a:solidFill>
+                  <a:schemeClr val="bg1"/>
+                </a:solidFill>
+              </a:rPr>
+              <a:t>1/7</a:t>
+            </a:r>
+          </a:p>
+        </p:txBody>
+      </p:sp>
+    </p:spTree>
+    <p:extLst>
+      <p:ext uri="{BB962C8B-B14F-4D97-AF65-F5344CB8AC3E}">
+        <p14:creationId xmlns:p14="http://schemas.microsoft.com/office/powerpoint/2010/main" val="2175635830"/>
+      </p:ext>
+    </p:extLst>
+  </p:cSld>
+  <p:clrMapOvr>
+    <a:masterClrMapping/>
+  </p:clrMapOvr>
+  <p:timing>
+    <p:tnLst>
+      <p:par>
+        <p:cTn id="1" dur="indefinite" restart="never" nodeType="tmRoot"/>
+      </p:par>
+    </p:tnLst>
+  </p:timing>
+</p:sld>
+</file>
+
+<file path=ppt/slides/slide32.xml><?xml version="1.0" encoding="utf-8"?>
+<p:sld xmlns:a="http://schemas.openxmlformats.org/drawingml/2006/main" xmlns:r="http://schemas.openxmlformats.org/officeDocument/2006/relationships" xmlns:p="http://schemas.openxmlformats.org/presentationml/2006/main">
+  <p:cSld>
+    <p:spTree>
+      <p:nvGrpSpPr>
+        <p:cNvPr id="1" name=""/>
+        <p:cNvGrpSpPr/>
+        <p:nvPr/>
+      </p:nvGrpSpPr>
+      <p:grpSpPr>
+        <a:xfrm>
+          <a:off x="0" y="0"/>
+          <a:ext cx="0" cy="0"/>
+          <a:chOff x="0" y="0"/>
+          <a:chExt cx="0" cy="0"/>
+        </a:xfrm>
+      </p:grpSpPr>
+      <p:sp>
+        <p:nvSpPr>
+          <p:cNvPr id="3" name="Subtitle 2"/>
+          <p:cNvSpPr>
+            <a:spLocks noGrp="1"/>
+          </p:cNvSpPr>
+          <p:nvPr>
+            <p:ph type="subTitle" idx="1"/>
+          </p:nvPr>
+        </p:nvSpPr>
+        <p:spPr>
+          <a:xfrm>
+            <a:off x="251520" y="764704"/>
+            <a:ext cx="8640960" cy="6480720"/>
+          </a:xfrm>
+        </p:spPr>
+        <p:txBody>
+          <a:bodyPr>
+            <a:noAutofit/>
+          </a:bodyPr>
+          <a:lstStyle/>
+          <a:p>
+            <a:r>
+              <a:rPr lang="en-GB" sz="3600" dirty="0">
+                <a:solidFill>
+                  <a:schemeClr val="bg1"/>
+                </a:solidFill>
+              </a:rPr>
+              <a:t>Abide with me abide with me</a:t>
+            </a:r>
+          </a:p>
+          <a:p>
+            <a:r>
+              <a:rPr lang="en-GB" sz="3600" dirty="0">
+                <a:solidFill>
+                  <a:schemeClr val="bg1"/>
+                </a:solidFill>
+              </a:rPr>
+              <a:t>Don't let me fall and don't let go</a:t>
+            </a:r>
+          </a:p>
+          <a:p>
+            <a:r>
+              <a:rPr lang="en-GB" sz="3600" dirty="0">
+                <a:solidFill>
+                  <a:schemeClr val="bg1"/>
+                </a:solidFill>
+              </a:rPr>
+              <a:t>Walk with me and never leave</a:t>
+            </a:r>
+          </a:p>
+          <a:p>
+            <a:r>
+              <a:rPr lang="en-GB" sz="3600" dirty="0">
+                <a:solidFill>
+                  <a:schemeClr val="bg1"/>
+                </a:solidFill>
+              </a:rPr>
+              <a:t>Ever close God abide with me</a:t>
+            </a:r>
+          </a:p>
+        </p:txBody>
+      </p:sp>
+      <p:sp>
+        <p:nvSpPr>
+          <p:cNvPr id="4" name="TextBox 3"/>
+          <p:cNvSpPr txBox="1"/>
+          <p:nvPr/>
+        </p:nvSpPr>
+        <p:spPr>
+          <a:xfrm>
+            <a:off x="8529729" y="0"/>
+            <a:ext cx="628698" cy="461665"/>
+          </a:xfrm>
+          <a:prstGeom prst="rect">
+            <a:avLst/>
+          </a:prstGeom>
+          <a:noFill/>
+        </p:spPr>
+        <p:txBody>
+          <a:bodyPr wrap="none" rtlCol="0">
+            <a:spAutoFit/>
+          </a:bodyPr>
+          <a:lstStyle/>
+          <a:p>
+            <a:r>
+              <a:rPr lang="en-GB" sz="2400" b="1" dirty="0">
+                <a:solidFill>
+                  <a:schemeClr val="bg1"/>
+                </a:solidFill>
+              </a:rPr>
+              <a:t>2/7</a:t>
+            </a:r>
+          </a:p>
+        </p:txBody>
+      </p:sp>
+    </p:spTree>
+    <p:extLst>
+      <p:ext uri="{BB962C8B-B14F-4D97-AF65-F5344CB8AC3E}">
+        <p14:creationId xmlns:p14="http://schemas.microsoft.com/office/powerpoint/2010/main" val="365095133"/>
+      </p:ext>
+    </p:extLst>
+  </p:cSld>
+  <p:clrMapOvr>
+    <a:masterClrMapping/>
+  </p:clrMapOvr>
+  <p:timing>
+    <p:tnLst>
+      <p:par>
+        <p:cTn id="1" dur="indefinite" restart="never" nodeType="tmRoot"/>
+      </p:par>
+    </p:tnLst>
+  </p:timing>
+</p:sld>
+</file>
+
+<file path=ppt/slides/slide33.xml><?xml version="1.0" encoding="utf-8"?>
+<p:sld xmlns:a="http://schemas.openxmlformats.org/drawingml/2006/main" xmlns:r="http://schemas.openxmlformats.org/officeDocument/2006/relationships" xmlns:p="http://schemas.openxmlformats.org/presentationml/2006/main">
+  <p:cSld>
+    <p:spTree>
+      <p:nvGrpSpPr>
+        <p:cNvPr id="1" name=""/>
+        <p:cNvGrpSpPr/>
+        <p:nvPr/>
+      </p:nvGrpSpPr>
+      <p:grpSpPr>
+        <a:xfrm>
+          <a:off x="0" y="0"/>
+          <a:ext cx="0" cy="0"/>
+          <a:chOff x="0" y="0"/>
+          <a:chExt cx="0" cy="0"/>
+        </a:xfrm>
+      </p:grpSpPr>
+      <p:sp>
+        <p:nvSpPr>
+          <p:cNvPr id="3" name="Subtitle 2"/>
+          <p:cNvSpPr>
+            <a:spLocks noGrp="1"/>
+          </p:cNvSpPr>
+          <p:nvPr>
+            <p:ph type="subTitle" idx="1"/>
+          </p:nvPr>
+        </p:nvSpPr>
+        <p:spPr>
+          <a:xfrm>
             <a:off x="251520" y="764704"/>
             <a:ext cx="8640960" cy="6480720"/>
           </a:xfrm>
@@ -7219,10 +7975,17 @@
   <p:clrMapOvr>
     <a:masterClrMapping/>
   </p:clrMapOvr>
+  <p:timing>
+    <p:tnLst>
+      <p:par>
+        <p:cTn id="1" dur="indefinite" restart="never" nodeType="tmRoot"/>
+      </p:par>
+    </p:tnLst>
+  </p:timing>
 </p:sld>
 </file>
 
-<file path=ppt/slides/slide31.xml><?xml version="1.0" encoding="utf-8"?>
+<file path=ppt/slides/slide34.xml><?xml version="1.0" encoding="utf-8"?>
 <p:sld xmlns:a="http://schemas.openxmlformats.org/drawingml/2006/main" xmlns:r="http://schemas.openxmlformats.org/officeDocument/2006/relationships" xmlns:p="http://schemas.openxmlformats.org/presentationml/2006/main">
   <p:cSld>
     <p:spTree>
@@ -7363,10 +8126,17 @@
   <p:clrMapOvr>
     <a:masterClrMapping/>
   </p:clrMapOvr>
+  <p:timing>
+    <p:tnLst>
+      <p:par>
+        <p:cTn id="1" dur="indefinite" restart="never" nodeType="tmRoot"/>
+      </p:par>
+    </p:tnLst>
+  </p:timing>
 </p:sld>
 </file>
 
-<file path=ppt/slides/slide32.xml><?xml version="1.0" encoding="utf-8"?>
+<file path=ppt/slides/slide35.xml><?xml version="1.0" encoding="utf-8"?>
 <p:sld xmlns:a="http://schemas.openxmlformats.org/drawingml/2006/main" xmlns:r="http://schemas.openxmlformats.org/officeDocument/2006/relationships" xmlns:p="http://schemas.openxmlformats.org/presentationml/2006/main">
   <p:cSld>
     <p:spTree>
@@ -7489,10 +8259,17 @@
   <p:clrMapOvr>
     <a:masterClrMapping/>
   </p:clrMapOvr>
+  <p:timing>
+    <p:tnLst>
+      <p:par>
+        <p:cTn id="1" dur="indefinite" restart="never" nodeType="tmRoot"/>
+      </p:par>
+    </p:tnLst>
+  </p:timing>
 </p:sld>
 </file>
 
-<file path=ppt/slides/slide33.xml><?xml version="1.0" encoding="utf-8"?>
+<file path=ppt/slides/slide36.xml><?xml version="1.0" encoding="utf-8"?>
 <p:sld xmlns:a="http://schemas.openxmlformats.org/drawingml/2006/main" xmlns:r="http://schemas.openxmlformats.org/officeDocument/2006/relationships" xmlns:p="http://schemas.openxmlformats.org/presentationml/2006/main">
   <p:cSld>
     <p:spTree>
@@ -7605,10 +8382,17 @@
   <p:clrMapOvr>
     <a:masterClrMapping/>
   </p:clrMapOvr>
+  <p:timing>
+    <p:tnLst>
+      <p:par>
+        <p:cTn id="1" dur="indefinite" restart="never" nodeType="tmRoot"/>
+      </p:par>
+    </p:tnLst>
+  </p:timing>
 </p:sld>
 </file>
 
-<file path=ppt/slides/slide34.xml><?xml version="1.0" encoding="utf-8"?>
+<file path=ppt/slides/slide37.xml><?xml version="1.0" encoding="utf-8"?>
 <p:sld xmlns:a="http://schemas.openxmlformats.org/drawingml/2006/main" xmlns:r="http://schemas.openxmlformats.org/officeDocument/2006/relationships" xmlns:p="http://schemas.openxmlformats.org/presentationml/2006/main">
   <p:cSld>
     <p:spTree>
@@ -7749,10 +8533,17 @@
   <p:clrMapOvr>
     <a:masterClrMapping/>
   </p:clrMapOvr>
+  <p:timing>
+    <p:tnLst>
+      <p:par>
+        <p:cTn id="1" dur="indefinite" restart="never" nodeType="tmRoot"/>
+      </p:par>
+    </p:tnLst>
+  </p:timing>
 </p:sld>
 </file>
 
-<file path=ppt/slides/slide35.xml><?xml version="1.0" encoding="utf-8"?>
+<file path=ppt/slides/slide38.xml><?xml version="1.0" encoding="utf-8"?>
 <p:sld xmlns:a="http://schemas.openxmlformats.org/drawingml/2006/main" xmlns:r="http://schemas.openxmlformats.org/officeDocument/2006/relationships" xmlns:p="http://schemas.openxmlformats.org/presentationml/2006/main">
   <p:cSld>
     <p:spTree>
@@ -7810,6 +8601,14 @@
             </a:r>
           </a:p>
           <a:p>
+            <a:r>
+              <a:rPr lang="en-GB" sz="1200" dirty="0">
+                <a:solidFill>
+                  <a:schemeClr val="bg1"/>
+                </a:solidFill>
+              </a:rPr>
+              <a:t/>
+            </a:r>
             <a:br>
               <a:rPr lang="en-GB" sz="1200" dirty="0">
                 <a:solidFill>
@@ -7817,6 +8616,14 @@
                 </a:solidFill>
               </a:rPr>
             </a:br>
+            <a:r>
+              <a:rPr lang="en-GB" sz="1200" dirty="0">
+                <a:solidFill>
+                  <a:schemeClr val="bg1"/>
+                </a:solidFill>
+              </a:rPr>
+              <a:t/>
+            </a:r>
             <a:br>
               <a:rPr lang="en-GB" sz="1200" dirty="0">
                 <a:solidFill>
@@ -7914,10 +8721,17 @@
   <p:clrMapOvr>
     <a:masterClrMapping/>
   </p:clrMapOvr>
+  <p:timing>
+    <p:tnLst>
+      <p:par>
+        <p:cTn id="1" dur="indefinite" restart="never" nodeType="tmRoot"/>
+      </p:par>
+    </p:tnLst>
+  </p:timing>
 </p:sld>
 </file>
 
-<file path=ppt/slides/slide36.xml><?xml version="1.0" encoding="utf-8"?>
+<file path=ppt/slides/slide39.xml><?xml version="1.0" encoding="utf-8"?>
 <p:sld xmlns:a="http://schemas.openxmlformats.org/drawingml/2006/main" xmlns:r="http://schemas.openxmlformats.org/officeDocument/2006/relationships" xmlns:p="http://schemas.openxmlformats.org/presentationml/2006/main">
   <p:cSld>
     <p:spTree>
@@ -8068,10 +8882,160 @@
   <p:clrMapOvr>
     <a:masterClrMapping/>
   </p:clrMapOvr>
+  <p:timing>
+    <p:tnLst>
+      <p:par>
+        <p:cTn id="1" dur="indefinite" restart="never" nodeType="tmRoot"/>
+      </p:par>
+    </p:tnLst>
+  </p:timing>
 </p:sld>
 </file>
 
-<file path=ppt/slides/slide37.xml><?xml version="1.0" encoding="utf-8"?>
+<file path=ppt/slides/slide4.xml><?xml version="1.0" encoding="utf-8"?>
+<p:sld xmlns:a="http://schemas.openxmlformats.org/drawingml/2006/main" xmlns:r="http://schemas.openxmlformats.org/officeDocument/2006/relationships" xmlns:p="http://schemas.openxmlformats.org/presentationml/2006/main">
+  <p:cSld>
+    <p:spTree>
+      <p:nvGrpSpPr>
+        <p:cNvPr id="1" name=""/>
+        <p:cNvGrpSpPr/>
+        <p:nvPr/>
+      </p:nvGrpSpPr>
+      <p:grpSpPr>
+        <a:xfrm>
+          <a:off x="0" y="0"/>
+          <a:ext cx="0" cy="0"/>
+          <a:chOff x="0" y="0"/>
+          <a:chExt cx="0" cy="0"/>
+        </a:xfrm>
+      </p:grpSpPr>
+      <p:sp>
+        <p:nvSpPr>
+          <p:cNvPr id="3" name="Subtitle 2"/>
+          <p:cNvSpPr>
+            <a:spLocks noGrp="1"/>
+          </p:cNvSpPr>
+          <p:nvPr>
+            <p:ph type="subTitle" idx="1"/>
+          </p:nvPr>
+        </p:nvSpPr>
+        <p:spPr>
+          <a:xfrm>
+            <a:off x="251520" y="692696"/>
+            <a:ext cx="8640960" cy="6480720"/>
+          </a:xfrm>
+        </p:spPr>
+        <p:txBody>
+          <a:bodyPr>
+            <a:noAutofit/>
+          </a:bodyPr>
+          <a:lstStyle/>
+          <a:p>
+            <a:r>
+              <a:rPr lang="en-GB" sz="3600" dirty="0">
+                <a:solidFill>
+                  <a:schemeClr val="bg1"/>
+                </a:solidFill>
+              </a:rPr>
+              <a:t>When darkness seems to hide His face</a:t>
+            </a:r>
+          </a:p>
+          <a:p>
+            <a:r>
+              <a:rPr lang="en-GB" sz="3600" dirty="0">
+                <a:solidFill>
+                  <a:schemeClr val="bg1"/>
+                </a:solidFill>
+              </a:rPr>
+              <a:t>I rest on His unchanging grace</a:t>
+            </a:r>
+          </a:p>
+          <a:p>
+            <a:r>
+              <a:rPr lang="en-GB" sz="3600" dirty="0">
+                <a:solidFill>
+                  <a:schemeClr val="bg1"/>
+                </a:solidFill>
+              </a:rPr>
+              <a:t>In every high and stormy gale</a:t>
+            </a:r>
+          </a:p>
+          <a:p>
+            <a:r>
+              <a:rPr lang="en-GB" sz="3600" dirty="0">
+                <a:solidFill>
+                  <a:schemeClr val="bg1"/>
+                </a:solidFill>
+              </a:rPr>
+              <a:t>My anchor holds within the veil</a:t>
+            </a:r>
+          </a:p>
+          <a:p>
+            <a:r>
+              <a:rPr lang="en-GB" sz="3600" dirty="0">
+                <a:solidFill>
+                  <a:schemeClr val="bg1"/>
+                </a:solidFill>
+              </a:rPr>
+              <a:t>My anchor holds within the veil</a:t>
+            </a:r>
+          </a:p>
+        </p:txBody>
+      </p:sp>
+      <p:sp>
+        <p:nvSpPr>
+          <p:cNvPr id="4" name="TextBox 3"/>
+          <p:cNvSpPr txBox="1"/>
+          <p:nvPr/>
+        </p:nvSpPr>
+        <p:spPr>
+          <a:xfrm>
+            <a:off x="8529729" y="0"/>
+            <a:ext cx="628698" cy="461665"/>
+          </a:xfrm>
+          <a:prstGeom prst="rect">
+            <a:avLst/>
+          </a:prstGeom>
+          <a:noFill/>
+        </p:spPr>
+        <p:txBody>
+          <a:bodyPr wrap="none" rtlCol="0">
+            <a:spAutoFit/>
+          </a:bodyPr>
+          <a:lstStyle/>
+          <a:p>
+            <a:r>
+              <a:rPr lang="en-GB" sz="2400" b="1" dirty="0">
+                <a:solidFill>
+                  <a:schemeClr val="bg1"/>
+                </a:solidFill>
+              </a:rPr>
+              <a:t>3/6</a:t>
+            </a:r>
+          </a:p>
+        </p:txBody>
+      </p:sp>
+    </p:spTree>
+    <p:extLst>
+      <p:ext uri="{BB962C8B-B14F-4D97-AF65-F5344CB8AC3E}">
+        <p14:creationId xmlns:p14="http://schemas.microsoft.com/office/powerpoint/2010/main" val="1729585009"/>
+      </p:ext>
+    </p:extLst>
+  </p:cSld>
+  <p:clrMapOvr>
+    <a:masterClrMapping/>
+  </p:clrMapOvr>
+  <p:timing>
+    <p:tnLst>
+      <p:par>
+        <p:cTn id="1" dur="indefinite" restart="never" nodeType="tmRoot"/>
+      </p:par>
+    </p:tnLst>
+  </p:timing>
+</p:sld>
+</file>
+
+<file path=ppt/slides/slide40.xml><?xml version="1.0" encoding="utf-8"?>
 <p:sld xmlns:a="http://schemas.openxmlformats.org/drawingml/2006/main" xmlns:r="http://schemas.openxmlformats.org/officeDocument/2006/relationships" xmlns:p="http://schemas.openxmlformats.org/presentationml/2006/main">
   <p:cSld>
     <p:spTree>
@@ -8212,10 +9176,17 @@
   <p:clrMapOvr>
     <a:masterClrMapping/>
   </p:clrMapOvr>
+  <p:timing>
+    <p:tnLst>
+      <p:par>
+        <p:cTn id="1" dur="indefinite" restart="never" nodeType="tmRoot"/>
+      </p:par>
+    </p:tnLst>
+  </p:timing>
 </p:sld>
 </file>
 
-<file path=ppt/slides/slide38.xml><?xml version="1.0" encoding="utf-8"?>
+<file path=ppt/slides/slide41.xml><?xml version="1.0" encoding="utf-8"?>
 <p:sld xmlns:a="http://schemas.openxmlformats.org/drawingml/2006/main" xmlns:r="http://schemas.openxmlformats.org/officeDocument/2006/relationships" xmlns:p="http://schemas.openxmlformats.org/presentationml/2006/main">
   <p:cSld>
     <p:spTree>
@@ -8384,10 +9355,17 @@
   <p:clrMapOvr>
     <a:masterClrMapping/>
   </p:clrMapOvr>
+  <p:timing>
+    <p:tnLst>
+      <p:par>
+        <p:cTn id="1" dur="indefinite" restart="never" nodeType="tmRoot"/>
+      </p:par>
+    </p:tnLst>
+  </p:timing>
 </p:sld>
 </file>
 
-<file path=ppt/slides/slide39.xml><?xml version="1.0" encoding="utf-8"?>
+<file path=ppt/slides/slide42.xml><?xml version="1.0" encoding="utf-8"?>
 <p:sld xmlns:a="http://schemas.openxmlformats.org/drawingml/2006/main" xmlns:r="http://schemas.openxmlformats.org/officeDocument/2006/relationships" xmlns:p="http://schemas.openxmlformats.org/presentationml/2006/main">
   <p:cSld>
     <p:spTree>
@@ -8528,146 +9506,17 @@
   <p:clrMapOvr>
     <a:masterClrMapping/>
   </p:clrMapOvr>
+  <p:timing>
+    <p:tnLst>
+      <p:par>
+        <p:cTn id="1" dur="indefinite" restart="never" nodeType="tmRoot"/>
+      </p:par>
+    </p:tnLst>
+  </p:timing>
 </p:sld>
 </file>
 
-<file path=ppt/slides/slide4.xml><?xml version="1.0" encoding="utf-8"?>
-<p:sld xmlns:a="http://schemas.openxmlformats.org/drawingml/2006/main" xmlns:r="http://schemas.openxmlformats.org/officeDocument/2006/relationships" xmlns:p="http://schemas.openxmlformats.org/presentationml/2006/main">
-  <p:cSld>
-    <p:spTree>
-      <p:nvGrpSpPr>
-        <p:cNvPr id="1" name=""/>
-        <p:cNvGrpSpPr/>
-        <p:nvPr/>
-      </p:nvGrpSpPr>
-      <p:grpSpPr>
-        <a:xfrm>
-          <a:off x="0" y="0"/>
-          <a:ext cx="0" cy="0"/>
-          <a:chOff x="0" y="0"/>
-          <a:chExt cx="0" cy="0"/>
-        </a:xfrm>
-      </p:grpSpPr>
-      <p:sp>
-        <p:nvSpPr>
-          <p:cNvPr id="3" name="Subtitle 2"/>
-          <p:cNvSpPr>
-            <a:spLocks noGrp="1"/>
-          </p:cNvSpPr>
-          <p:nvPr>
-            <p:ph type="subTitle" idx="1"/>
-          </p:nvPr>
-        </p:nvSpPr>
-        <p:spPr>
-          <a:xfrm>
-            <a:off x="251520" y="692696"/>
-            <a:ext cx="8640960" cy="6480720"/>
-          </a:xfrm>
-        </p:spPr>
-        <p:txBody>
-          <a:bodyPr>
-            <a:noAutofit/>
-          </a:bodyPr>
-          <a:lstStyle/>
-          <a:p>
-            <a:r>
-              <a:rPr lang="en-GB" sz="3600" dirty="0">
-                <a:solidFill>
-                  <a:schemeClr val="bg1"/>
-                </a:solidFill>
-              </a:rPr>
-              <a:t>When darkness seems to hide His face</a:t>
-            </a:r>
-          </a:p>
-          <a:p>
-            <a:r>
-              <a:rPr lang="en-GB" sz="3600" dirty="0">
-                <a:solidFill>
-                  <a:schemeClr val="bg1"/>
-                </a:solidFill>
-              </a:rPr>
-              <a:t>I rest on His unchanging grace</a:t>
-            </a:r>
-          </a:p>
-          <a:p>
-            <a:r>
-              <a:rPr lang="en-GB" sz="3600" dirty="0">
-                <a:solidFill>
-                  <a:schemeClr val="bg1"/>
-                </a:solidFill>
-              </a:rPr>
-              <a:t>In every high and stormy gale</a:t>
-            </a:r>
-          </a:p>
-          <a:p>
-            <a:r>
-              <a:rPr lang="en-GB" sz="3600" dirty="0">
-                <a:solidFill>
-                  <a:schemeClr val="bg1"/>
-                </a:solidFill>
-              </a:rPr>
-              <a:t>My anchor holds within the veil</a:t>
-            </a:r>
-          </a:p>
-          <a:p>
-            <a:r>
-              <a:rPr lang="en-GB" sz="3600" dirty="0">
-                <a:solidFill>
-                  <a:schemeClr val="bg1"/>
-                </a:solidFill>
-              </a:rPr>
-              <a:t>My anchor holds within the veil</a:t>
-            </a:r>
-          </a:p>
-        </p:txBody>
-      </p:sp>
-      <p:sp>
-        <p:nvSpPr>
-          <p:cNvPr id="4" name="TextBox 3"/>
-          <p:cNvSpPr txBox="1"/>
-          <p:nvPr/>
-        </p:nvSpPr>
-        <p:spPr>
-          <a:xfrm>
-            <a:off x="8529729" y="0"/>
-            <a:ext cx="628698" cy="461665"/>
-          </a:xfrm>
-          <a:prstGeom prst="rect">
-            <a:avLst/>
-          </a:prstGeom>
-          <a:noFill/>
-        </p:spPr>
-        <p:txBody>
-          <a:bodyPr wrap="none" rtlCol="0">
-            <a:spAutoFit/>
-          </a:bodyPr>
-          <a:lstStyle/>
-          <a:p>
-            <a:r>
-              <a:rPr lang="en-GB" sz="2400" b="1" dirty="0">
-                <a:solidFill>
-                  <a:schemeClr val="bg1"/>
-                </a:solidFill>
-              </a:rPr>
-              <a:t>3/6</a:t>
-            </a:r>
-          </a:p>
-        </p:txBody>
-      </p:sp>
-    </p:spTree>
-    <p:extLst>
-      <p:ext uri="{BB962C8B-B14F-4D97-AF65-F5344CB8AC3E}">
-        <p14:creationId xmlns:p14="http://schemas.microsoft.com/office/powerpoint/2010/main" val="1729585009"/>
-      </p:ext>
-    </p:extLst>
-  </p:cSld>
-  <p:clrMapOvr>
-    <a:masterClrMapping/>
-  </p:clrMapOvr>
-</p:sld>
-</file>
-
-<file path=ppt/slides/slide40.xml><?xml version="1.0" encoding="utf-8"?>
+<file path=ppt/slides/slide43.xml><?xml version="1.0" encoding="utf-8"?>
 <p:sld xmlns:a="http://schemas.openxmlformats.org/drawingml/2006/main" xmlns:r="http://schemas.openxmlformats.org/officeDocument/2006/relationships" xmlns:p="http://schemas.openxmlformats.org/presentationml/2006/main">
   <p:cSld>
     <p:spTree>
@@ -8818,10 +9667,17 @@
   <p:clrMapOvr>
     <a:masterClrMapping/>
   </p:clrMapOvr>
+  <p:timing>
+    <p:tnLst>
+      <p:par>
+        <p:cTn id="1" dur="indefinite" restart="never" nodeType="tmRoot"/>
+      </p:par>
+    </p:tnLst>
+  </p:timing>
 </p:sld>
 </file>
 
-<file path=ppt/slides/slide41.xml><?xml version="1.0" encoding="utf-8"?>
+<file path=ppt/slides/slide44.xml><?xml version="1.0" encoding="utf-8"?>
 <p:sld xmlns:a="http://schemas.openxmlformats.org/drawingml/2006/main" xmlns:r="http://schemas.openxmlformats.org/officeDocument/2006/relationships" xmlns:p="http://schemas.openxmlformats.org/presentationml/2006/main">
   <p:cSld>
     <p:spTree>
@@ -8962,10 +9818,17 @@
   <p:clrMapOvr>
     <a:masterClrMapping/>
   </p:clrMapOvr>
+  <p:timing>
+    <p:tnLst>
+      <p:par>
+        <p:cTn id="1" dur="indefinite" restart="never" nodeType="tmRoot"/>
+      </p:par>
+    </p:tnLst>
+  </p:timing>
 </p:sld>
 </file>
 
-<file path=ppt/slides/slide42.xml><?xml version="1.0" encoding="utf-8"?>
+<file path=ppt/slides/slide45.xml><?xml version="1.0" encoding="utf-8"?>
 <p:sld xmlns:a="http://schemas.openxmlformats.org/drawingml/2006/main" xmlns:r="http://schemas.openxmlformats.org/officeDocument/2006/relationships" xmlns:p="http://schemas.openxmlformats.org/presentationml/2006/main">
   <p:cSld>
     <p:spTree>
@@ -9111,10 +9974,17 @@
   <p:clrMapOvr>
     <a:masterClrMapping/>
   </p:clrMapOvr>
+  <p:timing>
+    <p:tnLst>
+      <p:par>
+        <p:cTn id="1" dur="indefinite" restart="never" nodeType="tmRoot"/>
+      </p:par>
+    </p:tnLst>
+  </p:timing>
 </p:sld>
 </file>
 
-<file path=ppt/slides/slide43.xml><?xml version="1.0" encoding="utf-8"?>
+<file path=ppt/slides/slide46.xml><?xml version="1.0" encoding="utf-8"?>
 <p:sld xmlns:a="http://schemas.openxmlformats.org/drawingml/2006/main" xmlns:r="http://schemas.openxmlformats.org/officeDocument/2006/relationships" xmlns:p="http://schemas.openxmlformats.org/presentationml/2006/main">
   <p:cSld>
     <p:spTree>
@@ -9275,440 +10145,13 @@
   <p:clrMapOvr>
     <a:masterClrMapping/>
   </p:clrMapOvr>
-</p:sld>
-</file>
-
-<file path=ppt/slides/slide44.xml><?xml version="1.0" encoding="utf-8"?>
-<p:sld xmlns:a="http://schemas.openxmlformats.org/drawingml/2006/main" xmlns:r="http://schemas.openxmlformats.org/officeDocument/2006/relationships" xmlns:p="http://schemas.openxmlformats.org/presentationml/2006/main">
-  <p:cSld>
-    <p:spTree>
-      <p:nvGrpSpPr>
-        <p:cNvPr id="1" name=""/>
-        <p:cNvGrpSpPr/>
-        <p:nvPr/>
-      </p:nvGrpSpPr>
-      <p:grpSpPr>
-        <a:xfrm>
-          <a:off x="0" y="0"/>
-          <a:ext cx="0" cy="0"/>
-          <a:chOff x="0" y="0"/>
-          <a:chExt cx="0" cy="0"/>
-        </a:xfrm>
-      </p:grpSpPr>
-      <p:sp>
-        <p:nvSpPr>
-          <p:cNvPr id="3" name="Subtitle 2"/>
-          <p:cNvSpPr>
-            <a:spLocks noGrp="1"/>
-          </p:cNvSpPr>
-          <p:nvPr>
-            <p:ph type="subTitle" idx="1"/>
-          </p:nvPr>
-        </p:nvSpPr>
-        <p:spPr>
-          <a:xfrm>
-            <a:off x="323528" y="188640"/>
-            <a:ext cx="8640960" cy="6480720"/>
-          </a:xfrm>
-        </p:spPr>
-        <p:txBody>
-          <a:bodyPr>
-            <a:noAutofit/>
-          </a:bodyPr>
-          <a:lstStyle/>
-          <a:p>
-            <a:endParaRPr lang="en-GB" sz="5400" dirty="0">
-              <a:solidFill>
-                <a:schemeClr val="bg1"/>
-              </a:solidFill>
-            </a:endParaRPr>
-          </a:p>
-          <a:p>
-            <a:r>
-              <a:rPr lang="en-GB" sz="4400" b="0" i="0" dirty="0">
-                <a:solidFill>
-                  <a:srgbClr val="00A3E0"/>
-                </a:solidFill>
-                <a:effectLst/>
-                <a:latin typeface="akagi_probook"/>
-              </a:rPr>
-              <a:t>It Is Well</a:t>
-            </a:r>
-          </a:p>
-          <a:p>
-            <a:br>
-              <a:rPr lang="en-GB" sz="1200" dirty="0">
-                <a:solidFill>
-                  <a:schemeClr val="bg1"/>
-                </a:solidFill>
-              </a:rPr>
-            </a:br>
-            <a:br>
-              <a:rPr lang="en-GB" sz="1200" dirty="0">
-                <a:solidFill>
-                  <a:schemeClr val="bg1"/>
-                </a:solidFill>
-              </a:rPr>
-            </a:br>
-            <a:r>
-              <a:rPr lang="en-GB" sz="1200" dirty="0">
-                <a:solidFill>
-                  <a:schemeClr val="bg1"/>
-                </a:solidFill>
-              </a:rPr>
-              <a:t>CCLI Song # 7021972</a:t>
-            </a:r>
-          </a:p>
-          <a:p>
-            <a:r>
-              <a:rPr lang="en-GB" sz="1200" dirty="0">
-                <a:solidFill>
-                  <a:schemeClr val="bg1"/>
-                </a:solidFill>
-              </a:rPr>
-              <a:t>Horatio Gates Spafford | Kristene DiMarco | Philip Paul Bliss</a:t>
-            </a:r>
-          </a:p>
-          <a:p>
-            <a:r>
-              <a:rPr lang="en-GB" sz="1200" dirty="0">
-                <a:solidFill>
-                  <a:schemeClr val="bg1"/>
-                </a:solidFill>
-              </a:rPr>
-              <a:t>© 2013 Bethel Music Publishing</a:t>
-            </a:r>
-          </a:p>
-          <a:p>
-            <a:r>
-              <a:rPr lang="en-GB" sz="1200" dirty="0">
-                <a:solidFill>
-                  <a:schemeClr val="bg1"/>
-                </a:solidFill>
-              </a:rPr>
-              <a:t>For use solely with the </a:t>
-            </a:r>
-            <a:r>
-              <a:rPr lang="en-GB" sz="1200" dirty="0" err="1">
-                <a:solidFill>
-                  <a:schemeClr val="bg1"/>
-                </a:solidFill>
-              </a:rPr>
-              <a:t>SongSelect</a:t>
-            </a:r>
-            <a:r>
-              <a:rPr lang="en-GB" sz="1200" dirty="0">
-                <a:solidFill>
-                  <a:schemeClr val="bg1"/>
-                </a:solidFill>
-              </a:rPr>
-              <a:t>® Terms of Use. All rights reserved. www.ccli.com</a:t>
-            </a:r>
-          </a:p>
-          <a:p>
-            <a:r>
-              <a:rPr lang="en-GB" sz="1200" dirty="0">
-                <a:solidFill>
-                  <a:schemeClr val="bg1"/>
-                </a:solidFill>
-              </a:rPr>
-              <a:t>CCLI Licence No. 33265</a:t>
-            </a:r>
-          </a:p>
-        </p:txBody>
-      </p:sp>
-    </p:spTree>
-    <p:extLst>
-      <p:ext uri="{BB962C8B-B14F-4D97-AF65-F5344CB8AC3E}">
-        <p14:creationId xmlns:p14="http://schemas.microsoft.com/office/powerpoint/2010/main" val="2692585411"/>
-      </p:ext>
-    </p:extLst>
-  </p:cSld>
-  <p:clrMapOvr>
-    <a:masterClrMapping/>
-  </p:clrMapOvr>
-</p:sld>
-</file>
-
-<file path=ppt/slides/slide45.xml><?xml version="1.0" encoding="utf-8"?>
-<p:sld xmlns:a="http://schemas.openxmlformats.org/drawingml/2006/main" xmlns:r="http://schemas.openxmlformats.org/officeDocument/2006/relationships" xmlns:p="http://schemas.openxmlformats.org/presentationml/2006/main">
-  <p:cSld>
-    <p:spTree>
-      <p:nvGrpSpPr>
-        <p:cNvPr id="1" name=""/>
-        <p:cNvGrpSpPr/>
-        <p:nvPr/>
-      </p:nvGrpSpPr>
-      <p:grpSpPr>
-        <a:xfrm>
-          <a:off x="0" y="0"/>
-          <a:ext cx="0" cy="0"/>
-          <a:chOff x="0" y="0"/>
-          <a:chExt cx="0" cy="0"/>
-        </a:xfrm>
-      </p:grpSpPr>
-      <p:sp>
-        <p:nvSpPr>
-          <p:cNvPr id="3" name="Subtitle 2"/>
-          <p:cNvSpPr>
-            <a:spLocks noGrp="1"/>
-          </p:cNvSpPr>
-          <p:nvPr>
-            <p:ph type="subTitle" idx="1"/>
-          </p:nvPr>
-        </p:nvSpPr>
-        <p:spPr>
-          <a:xfrm>
-            <a:off x="251520" y="836712"/>
-            <a:ext cx="8640960" cy="6480720"/>
-          </a:xfrm>
-        </p:spPr>
-        <p:txBody>
-          <a:bodyPr>
-            <a:noAutofit/>
-          </a:bodyPr>
-          <a:lstStyle/>
-          <a:p>
-            <a:r>
-              <a:rPr lang="en-GB" sz="3600" dirty="0">
-                <a:solidFill>
-                  <a:schemeClr val="bg1"/>
-                </a:solidFill>
-              </a:rPr>
-              <a:t>Grander earth has quaked before</a:t>
-            </a:r>
-          </a:p>
-          <a:p>
-            <a:r>
-              <a:rPr lang="en-GB" sz="3600" dirty="0">
-                <a:solidFill>
-                  <a:schemeClr val="bg1"/>
-                </a:solidFill>
-              </a:rPr>
-              <a:t>Moved by the sound of His voice</a:t>
-            </a:r>
-          </a:p>
-          <a:p>
-            <a:r>
-              <a:rPr lang="en-GB" sz="3600" dirty="0">
-                <a:solidFill>
-                  <a:schemeClr val="bg1"/>
-                </a:solidFill>
-              </a:rPr>
-              <a:t>Seas that are shaken and stirred</a:t>
-            </a:r>
-          </a:p>
-          <a:p>
-            <a:r>
-              <a:rPr lang="en-GB" sz="3600" dirty="0">
-                <a:solidFill>
-                  <a:schemeClr val="bg1"/>
-                </a:solidFill>
-              </a:rPr>
-              <a:t>Can be calmed and broken for my regard</a:t>
-            </a:r>
-          </a:p>
-        </p:txBody>
-      </p:sp>
-      <p:sp>
-        <p:nvSpPr>
-          <p:cNvPr id="4" name="TextBox 3"/>
-          <p:cNvSpPr txBox="1"/>
-          <p:nvPr/>
-        </p:nvSpPr>
-        <p:spPr>
-          <a:xfrm>
-            <a:off x="8529729" y="0"/>
-            <a:ext cx="628698" cy="461665"/>
-          </a:xfrm>
-          <a:prstGeom prst="rect">
-            <a:avLst/>
-          </a:prstGeom>
-          <a:noFill/>
-        </p:spPr>
-        <p:txBody>
-          <a:bodyPr wrap="none" rtlCol="0">
-            <a:spAutoFit/>
-          </a:bodyPr>
-          <a:lstStyle/>
-          <a:p>
-            <a:r>
-              <a:rPr lang="en-GB" sz="2400" b="1" dirty="0">
-                <a:solidFill>
-                  <a:schemeClr val="bg1"/>
-                </a:solidFill>
-              </a:rPr>
-              <a:t>1/7</a:t>
-            </a:r>
-          </a:p>
-        </p:txBody>
-      </p:sp>
-    </p:spTree>
-    <p:extLst>
-      <p:ext uri="{BB962C8B-B14F-4D97-AF65-F5344CB8AC3E}">
-        <p14:creationId xmlns:p14="http://schemas.microsoft.com/office/powerpoint/2010/main" val="1635143327"/>
-      </p:ext>
-    </p:extLst>
-  </p:cSld>
-  <p:clrMapOvr>
-    <a:masterClrMapping/>
-  </p:clrMapOvr>
-</p:sld>
-</file>
-
-<file path=ppt/slides/slide46.xml><?xml version="1.0" encoding="utf-8"?>
-<p:sld xmlns:a="http://schemas.openxmlformats.org/drawingml/2006/main" xmlns:r="http://schemas.openxmlformats.org/officeDocument/2006/relationships" xmlns:p="http://schemas.openxmlformats.org/presentationml/2006/main">
-  <p:cSld>
-    <p:spTree>
-      <p:nvGrpSpPr>
-        <p:cNvPr id="1" name=""/>
-        <p:cNvGrpSpPr/>
-        <p:nvPr/>
-      </p:nvGrpSpPr>
-      <p:grpSpPr>
-        <a:xfrm>
-          <a:off x="0" y="0"/>
-          <a:ext cx="0" cy="0"/>
-          <a:chOff x="0" y="0"/>
-          <a:chExt cx="0" cy="0"/>
-        </a:xfrm>
-      </p:grpSpPr>
-      <p:sp>
-        <p:nvSpPr>
-          <p:cNvPr id="3" name="Subtitle 2"/>
-          <p:cNvSpPr>
-            <a:spLocks noGrp="1"/>
-          </p:cNvSpPr>
-          <p:nvPr>
-            <p:ph type="subTitle" idx="1"/>
-          </p:nvPr>
-        </p:nvSpPr>
-        <p:spPr>
-          <a:xfrm>
-            <a:off x="251520" y="764704"/>
-            <a:ext cx="8640960" cy="6480720"/>
-          </a:xfrm>
-        </p:spPr>
-        <p:txBody>
-          <a:bodyPr>
-            <a:noAutofit/>
-          </a:bodyPr>
-          <a:lstStyle/>
-          <a:p>
-            <a:r>
-              <a:rPr lang="en-GB" sz="3600" dirty="0">
-                <a:solidFill>
-                  <a:schemeClr val="bg1"/>
-                </a:solidFill>
-              </a:rPr>
-              <a:t>Through it all through it all</a:t>
-            </a:r>
-          </a:p>
-          <a:p>
-            <a:r>
-              <a:rPr lang="en-GB" sz="3600" dirty="0">
-                <a:solidFill>
-                  <a:schemeClr val="bg1"/>
-                </a:solidFill>
-              </a:rPr>
-              <a:t>My eyes are on You</a:t>
-            </a:r>
-          </a:p>
-          <a:p>
-            <a:r>
-              <a:rPr lang="en-GB" sz="3600" dirty="0">
-                <a:solidFill>
-                  <a:schemeClr val="bg1"/>
-                </a:solidFill>
-              </a:rPr>
-              <a:t>Through it all through it all</a:t>
-            </a:r>
-          </a:p>
-          <a:p>
-            <a:r>
-              <a:rPr lang="en-GB" sz="3600" dirty="0">
-                <a:solidFill>
-                  <a:schemeClr val="bg1"/>
-                </a:solidFill>
-              </a:rPr>
-              <a:t>It is well</a:t>
-            </a:r>
-          </a:p>
-          <a:p>
-            <a:r>
-              <a:rPr lang="en-GB" sz="3600" dirty="0">
-                <a:solidFill>
-                  <a:schemeClr val="bg1"/>
-                </a:solidFill>
-              </a:rPr>
-              <a:t>Through it all through it all</a:t>
-            </a:r>
-          </a:p>
-          <a:p>
-            <a:r>
-              <a:rPr lang="en-GB" sz="3600" dirty="0">
-                <a:solidFill>
-                  <a:schemeClr val="bg1"/>
-                </a:solidFill>
-              </a:rPr>
-              <a:t>My eyes are on You</a:t>
-            </a:r>
-          </a:p>
-          <a:p>
-            <a:r>
-              <a:rPr lang="en-GB" sz="3600" dirty="0">
-                <a:solidFill>
-                  <a:schemeClr val="bg1"/>
-                </a:solidFill>
-              </a:rPr>
-              <a:t>And it is well with me</a:t>
-            </a:r>
-          </a:p>
-        </p:txBody>
-      </p:sp>
-      <p:sp>
-        <p:nvSpPr>
-          <p:cNvPr id="4" name="TextBox 3"/>
-          <p:cNvSpPr txBox="1"/>
-          <p:nvPr/>
-        </p:nvSpPr>
-        <p:spPr>
-          <a:xfrm>
-            <a:off x="8529729" y="0"/>
-            <a:ext cx="628698" cy="461665"/>
-          </a:xfrm>
-          <a:prstGeom prst="rect">
-            <a:avLst/>
-          </a:prstGeom>
-          <a:noFill/>
-        </p:spPr>
-        <p:txBody>
-          <a:bodyPr wrap="none" rtlCol="0">
-            <a:spAutoFit/>
-          </a:bodyPr>
-          <a:lstStyle/>
-          <a:p>
-            <a:r>
-              <a:rPr lang="en-GB" sz="2400" b="1" dirty="0">
-                <a:solidFill>
-                  <a:schemeClr val="bg1"/>
-                </a:solidFill>
-              </a:rPr>
-              <a:t>2/7</a:t>
-            </a:r>
-          </a:p>
-        </p:txBody>
-      </p:sp>
-    </p:spTree>
-    <p:extLst>
-      <p:ext uri="{BB962C8B-B14F-4D97-AF65-F5344CB8AC3E}">
-        <p14:creationId xmlns:p14="http://schemas.microsoft.com/office/powerpoint/2010/main" val="1986311286"/>
-      </p:ext>
-    </p:extLst>
-  </p:cSld>
-  <p:clrMapOvr>
-    <a:masterClrMapping/>
-  </p:clrMapOvr>
+  <p:timing>
+    <p:tnLst>
+      <p:par>
+        <p:cTn id="1" dur="indefinite" restart="never" nodeType="tmRoot"/>
+      </p:par>
+    </p:tnLst>
+  </p:timing>
 </p:sld>
 </file>
 
@@ -9741,7 +10184,7 @@
         </p:nvSpPr>
         <p:spPr>
           <a:xfrm>
-            <a:off x="251520" y="764704"/>
+            <a:off x="323528" y="188640"/>
             <a:ext cx="8640960" cy="6480720"/>
           </a:xfrm>
         </p:spPr>
@@ -9751,76 +10194,118 @@
           </a:bodyPr>
           <a:lstStyle/>
           <a:p>
-            <a:r>
-              <a:rPr lang="en-GB" sz="3600" dirty="0">
-                <a:solidFill>
-                  <a:schemeClr val="bg1"/>
-                </a:solidFill>
-              </a:rPr>
-              <a:t>Far be it from me to not believe</a:t>
-            </a:r>
-          </a:p>
-          <a:p>
-            <a:r>
-              <a:rPr lang="en-GB" sz="3600" dirty="0">
-                <a:solidFill>
-                  <a:schemeClr val="bg1"/>
-                </a:solidFill>
-              </a:rPr>
-              <a:t>Even when my eyes can't see</a:t>
-            </a:r>
-          </a:p>
-          <a:p>
-            <a:r>
-              <a:rPr lang="en-GB" sz="3600" dirty="0">
-                <a:solidFill>
-                  <a:schemeClr val="bg1"/>
-                </a:solidFill>
-              </a:rPr>
-              <a:t>And this mountain that's in front of me</a:t>
-            </a:r>
-          </a:p>
-          <a:p>
-            <a:r>
-              <a:rPr lang="en-GB" sz="3600" dirty="0">
-                <a:solidFill>
-                  <a:schemeClr val="bg1"/>
-                </a:solidFill>
-              </a:rPr>
-              <a:t>Will be thrown into the midst of the sea</a:t>
-            </a:r>
-          </a:p>
-        </p:txBody>
-      </p:sp>
-      <p:sp>
-        <p:nvSpPr>
-          <p:cNvPr id="4" name="TextBox 3"/>
-          <p:cNvSpPr txBox="1"/>
-          <p:nvPr/>
-        </p:nvSpPr>
-        <p:spPr>
-          <a:xfrm>
-            <a:off x="8529729" y="0"/>
-            <a:ext cx="628698" cy="461665"/>
-          </a:xfrm>
-          <a:prstGeom prst="rect">
-            <a:avLst/>
-          </a:prstGeom>
-          <a:noFill/>
-        </p:spPr>
-        <p:txBody>
-          <a:bodyPr wrap="none" rtlCol="0">
-            <a:spAutoFit/>
-          </a:bodyPr>
-          <a:lstStyle/>
-          <a:p>
-            <a:r>
-              <a:rPr lang="en-GB" sz="2400" b="1" dirty="0">
-                <a:solidFill>
-                  <a:schemeClr val="bg1"/>
-                </a:solidFill>
-              </a:rPr>
-              <a:t>3/7</a:t>
+            <a:endParaRPr lang="en-GB" sz="5400" dirty="0">
+              <a:solidFill>
+                <a:schemeClr val="bg1"/>
+              </a:solidFill>
+            </a:endParaRPr>
+          </a:p>
+          <a:p>
+            <a:r>
+              <a:rPr lang="en-GB" sz="4400" b="0" i="0" dirty="0">
+                <a:solidFill>
+                  <a:srgbClr val="00A3E0"/>
+                </a:solidFill>
+                <a:effectLst/>
+                <a:latin typeface="akagi_probook"/>
+              </a:rPr>
+              <a:t>It Is Well</a:t>
+            </a:r>
+          </a:p>
+          <a:p>
+            <a:r>
+              <a:rPr lang="en-GB" sz="1200" dirty="0">
+                <a:solidFill>
+                  <a:schemeClr val="bg1"/>
+                </a:solidFill>
+              </a:rPr>
+              <a:t/>
+            </a:r>
+            <a:br>
+              <a:rPr lang="en-GB" sz="1200" dirty="0">
+                <a:solidFill>
+                  <a:schemeClr val="bg1"/>
+                </a:solidFill>
+              </a:rPr>
+            </a:br>
+            <a:r>
+              <a:rPr lang="en-GB" sz="1200" dirty="0">
+                <a:solidFill>
+                  <a:schemeClr val="bg1"/>
+                </a:solidFill>
+              </a:rPr>
+              <a:t/>
+            </a:r>
+            <a:br>
+              <a:rPr lang="en-GB" sz="1200" dirty="0">
+                <a:solidFill>
+                  <a:schemeClr val="bg1"/>
+                </a:solidFill>
+              </a:rPr>
+            </a:br>
+            <a:r>
+              <a:rPr lang="en-GB" sz="1200" dirty="0">
+                <a:solidFill>
+                  <a:schemeClr val="bg1"/>
+                </a:solidFill>
+              </a:rPr>
+              <a:t>CCLI Song # 7021972</a:t>
+            </a:r>
+          </a:p>
+          <a:p>
+            <a:r>
+              <a:rPr lang="en-GB" sz="1200" dirty="0">
+                <a:solidFill>
+                  <a:schemeClr val="bg1"/>
+                </a:solidFill>
+              </a:rPr>
+              <a:t>Horatio Gates Spafford | Kristene DiMarco | Philip Paul Bliss</a:t>
+            </a:r>
+          </a:p>
+          <a:p>
+            <a:r>
+              <a:rPr lang="en-GB" sz="1200" dirty="0">
+                <a:solidFill>
+                  <a:schemeClr val="bg1"/>
+                </a:solidFill>
+              </a:rPr>
+              <a:t>© 2013 Bethel Music Publishing</a:t>
+            </a:r>
+          </a:p>
+          <a:p>
+            <a:r>
+              <a:rPr lang="en-GB" sz="1200" dirty="0">
+                <a:solidFill>
+                  <a:schemeClr val="bg1"/>
+                </a:solidFill>
+              </a:rPr>
+              <a:t>For use solely with the </a:t>
+            </a:r>
+            <a:r>
+              <a:rPr lang="en-GB" sz="1200" dirty="0" err="1">
+                <a:solidFill>
+                  <a:schemeClr val="bg1"/>
+                </a:solidFill>
+              </a:rPr>
+              <a:t>SongSelect</a:t>
+            </a:r>
+            <a:r>
+              <a:rPr lang="en-GB" sz="1200" dirty="0">
+                <a:solidFill>
+                  <a:schemeClr val="bg1"/>
+                </a:solidFill>
+              </a:rPr>
+              <a:t>® Terms of Use. All rights reserved. www.ccli.com</a:t>
+            </a:r>
+          </a:p>
+          <a:p>
+            <a:r>
+              <a:rPr lang="en-GB" sz="1200" dirty="0">
+                <a:solidFill>
+                  <a:schemeClr val="bg1"/>
+                </a:solidFill>
+              </a:rPr>
+              <a:t>CCLI Licence No. 33265</a:t>
             </a:r>
           </a:p>
         </p:txBody>
@@ -9828,13 +10313,20 @@
     </p:spTree>
     <p:extLst>
       <p:ext uri="{BB962C8B-B14F-4D97-AF65-F5344CB8AC3E}">
-        <p14:creationId xmlns:p14="http://schemas.microsoft.com/office/powerpoint/2010/main" val="3117841770"/>
+        <p14:creationId xmlns:p14="http://schemas.microsoft.com/office/powerpoint/2010/main" val="2692585411"/>
       </p:ext>
     </p:extLst>
   </p:cSld>
   <p:clrMapOvr>
     <a:masterClrMapping/>
   </p:clrMapOvr>
+  <p:timing>
+    <p:tnLst>
+      <p:par>
+        <p:cTn id="1" dur="indefinite" restart="never" nodeType="tmRoot"/>
+      </p:par>
+    </p:tnLst>
+  </p:timing>
 </p:sld>
 </file>
 
@@ -9867,7 +10359,7 @@
         </p:nvSpPr>
         <p:spPr>
           <a:xfrm>
-            <a:off x="395536" y="764704"/>
+            <a:off x="251520" y="836712"/>
             <a:ext cx="8640960" cy="6480720"/>
           </a:xfrm>
         </p:spPr>
@@ -9883,67 +10375,37 @@
                   <a:schemeClr val="bg1"/>
                 </a:solidFill>
               </a:rPr>
-              <a:t>Through it all through it all</a:t>
-            </a:r>
-          </a:p>
-          <a:p>
-            <a:r>
-              <a:rPr lang="en-GB" sz="3600" dirty="0">
-                <a:solidFill>
-                  <a:schemeClr val="bg1"/>
-                </a:solidFill>
-              </a:rPr>
-              <a:t>My eyes are on You</a:t>
-            </a:r>
-          </a:p>
-          <a:p>
-            <a:r>
-              <a:rPr lang="en-GB" sz="3600" dirty="0">
-                <a:solidFill>
-                  <a:schemeClr val="bg1"/>
-                </a:solidFill>
-              </a:rPr>
-              <a:t>Through it all through it all</a:t>
-            </a:r>
-          </a:p>
-          <a:p>
-            <a:r>
-              <a:rPr lang="en-GB" sz="3600" dirty="0">
-                <a:solidFill>
-                  <a:schemeClr val="bg1"/>
-                </a:solidFill>
-              </a:rPr>
-              <a:t>It is well</a:t>
-            </a:r>
-          </a:p>
-          <a:p>
-            <a:r>
-              <a:rPr lang="en-GB" sz="3600" dirty="0">
-                <a:solidFill>
-                  <a:schemeClr val="bg1"/>
-                </a:solidFill>
-              </a:rPr>
-              <a:t>Through it all through it all</a:t>
-            </a:r>
-          </a:p>
-          <a:p>
-            <a:r>
-              <a:rPr lang="en-GB" sz="3600" dirty="0">
-                <a:solidFill>
-                  <a:schemeClr val="bg1"/>
-                </a:solidFill>
-              </a:rPr>
-              <a:t>My eyes are on You</a:t>
-            </a:r>
-          </a:p>
-          <a:p>
-            <a:r>
-              <a:rPr lang="en-GB" sz="3600" dirty="0">
-                <a:solidFill>
-                  <a:schemeClr val="bg1"/>
-                </a:solidFill>
-              </a:rPr>
-              <a:t>And it is well it is well</a:t>
+              <a:t>Grander earth has quaked before</a:t>
+            </a:r>
+          </a:p>
+          <a:p>
+            <a:r>
+              <a:rPr lang="en-GB" sz="3600" dirty="0">
+                <a:solidFill>
+                  <a:schemeClr val="bg1"/>
+                </a:solidFill>
+              </a:rPr>
+              <a:t>Moved by the sound of His voice</a:t>
+            </a:r>
+          </a:p>
+          <a:p>
+            <a:r>
+              <a:rPr lang="en-GB" sz="3600" dirty="0">
+                <a:solidFill>
+                  <a:schemeClr val="bg1"/>
+                </a:solidFill>
+              </a:rPr>
+              <a:t>Seas that are shaken and stirred</a:t>
+            </a:r>
+          </a:p>
+          <a:p>
+            <a:r>
+              <a:rPr lang="en-GB" sz="3600" dirty="0">
+                <a:solidFill>
+                  <a:schemeClr val="bg1"/>
+                </a:solidFill>
+              </a:rPr>
+              <a:t>Can be calmed and broken for my regard</a:t>
             </a:r>
           </a:p>
         </p:txBody>
@@ -9976,7 +10438,7 @@
                   <a:schemeClr val="bg1"/>
                 </a:solidFill>
               </a:rPr>
-              <a:t>4/7</a:t>
+              <a:t>1/7</a:t>
             </a:r>
           </a:p>
         </p:txBody>
@@ -9984,13 +10446,20 @@
     </p:spTree>
     <p:extLst>
       <p:ext uri="{BB962C8B-B14F-4D97-AF65-F5344CB8AC3E}">
-        <p14:creationId xmlns:p14="http://schemas.microsoft.com/office/powerpoint/2010/main" val="2277284100"/>
+        <p14:creationId xmlns:p14="http://schemas.microsoft.com/office/powerpoint/2010/main" val="1635143327"/>
       </p:ext>
     </p:extLst>
   </p:cSld>
   <p:clrMapOvr>
     <a:masterClrMapping/>
   </p:clrMapOvr>
+  <p:timing>
+    <p:tnLst>
+      <p:par>
+        <p:cTn id="1" dur="indefinite" restart="never" nodeType="tmRoot"/>
+      </p:par>
+    </p:tnLst>
+  </p:timing>
 </p:sld>
 </file>
 
@@ -10023,7 +10492,7 @@
         </p:nvSpPr>
         <p:spPr>
           <a:xfrm>
-            <a:off x="231698" y="764704"/>
+            <a:off x="251520" y="764704"/>
             <a:ext cx="8640960" cy="6480720"/>
           </a:xfrm>
         </p:spPr>
@@ -10039,44 +10508,67 @@
                   <a:schemeClr val="bg1"/>
                 </a:solidFill>
               </a:rPr>
-              <a:t>So let go my soul and trust in Him</a:t>
-            </a:r>
-          </a:p>
-          <a:p>
-            <a:r>
-              <a:rPr lang="en-GB" sz="3600" dirty="0">
-                <a:solidFill>
-                  <a:schemeClr val="bg1"/>
-                </a:solidFill>
-              </a:rPr>
-              <a:t>The waves and wind still know His Name</a:t>
-            </a:r>
-          </a:p>
-          <a:p>
-            <a:r>
-              <a:rPr lang="en-GB" sz="3600" dirty="0">
-                <a:solidFill>
-                  <a:schemeClr val="bg1"/>
-                </a:solidFill>
-              </a:rPr>
-              <a:t>(REPEAT)</a:t>
-            </a:r>
-          </a:p>
-          <a:p>
-            <a:endParaRPr lang="en-GB" sz="3600" dirty="0">
-              <a:solidFill>
-                <a:schemeClr val="bg1"/>
-              </a:solidFill>
-            </a:endParaRPr>
-          </a:p>
-          <a:p>
-            <a:r>
-              <a:rPr lang="en-GB" sz="3600" dirty="0">
-                <a:solidFill>
-                  <a:schemeClr val="bg1"/>
-                </a:solidFill>
-              </a:rPr>
-              <a:t>The waves and wind still know His Name</a:t>
+              <a:t>Through it all through it all</a:t>
+            </a:r>
+          </a:p>
+          <a:p>
+            <a:r>
+              <a:rPr lang="en-GB" sz="3600" dirty="0">
+                <a:solidFill>
+                  <a:schemeClr val="bg1"/>
+                </a:solidFill>
+              </a:rPr>
+              <a:t>My eyes are on You</a:t>
+            </a:r>
+          </a:p>
+          <a:p>
+            <a:r>
+              <a:rPr lang="en-GB" sz="3600" dirty="0">
+                <a:solidFill>
+                  <a:schemeClr val="bg1"/>
+                </a:solidFill>
+              </a:rPr>
+              <a:t>Through it all through it all</a:t>
+            </a:r>
+          </a:p>
+          <a:p>
+            <a:r>
+              <a:rPr lang="en-GB" sz="3600" dirty="0">
+                <a:solidFill>
+                  <a:schemeClr val="bg1"/>
+                </a:solidFill>
+              </a:rPr>
+              <a:t>It is well</a:t>
+            </a:r>
+          </a:p>
+          <a:p>
+            <a:r>
+              <a:rPr lang="en-GB" sz="3600" dirty="0">
+                <a:solidFill>
+                  <a:schemeClr val="bg1"/>
+                </a:solidFill>
+              </a:rPr>
+              <a:t>Through it all through it all</a:t>
+            </a:r>
+          </a:p>
+          <a:p>
+            <a:r>
+              <a:rPr lang="en-GB" sz="3600" dirty="0">
+                <a:solidFill>
+                  <a:schemeClr val="bg1"/>
+                </a:solidFill>
+              </a:rPr>
+              <a:t>My eyes are on You</a:t>
+            </a:r>
+          </a:p>
+          <a:p>
+            <a:r>
+              <a:rPr lang="en-GB" sz="3600" dirty="0">
+                <a:solidFill>
+                  <a:schemeClr val="bg1"/>
+                </a:solidFill>
+              </a:rPr>
+              <a:t>And it is well with me</a:t>
             </a:r>
           </a:p>
         </p:txBody>
@@ -10109,7 +10601,7 @@
                   <a:schemeClr val="bg1"/>
                 </a:solidFill>
               </a:rPr>
-              <a:t>5/7</a:t>
+              <a:t>2/7</a:t>
             </a:r>
           </a:p>
         </p:txBody>
@@ -10117,13 +10609,20 @@
     </p:spTree>
     <p:extLst>
       <p:ext uri="{BB962C8B-B14F-4D97-AF65-F5344CB8AC3E}">
-        <p14:creationId xmlns:p14="http://schemas.microsoft.com/office/powerpoint/2010/main" val="2887928867"/>
+        <p14:creationId xmlns:p14="http://schemas.microsoft.com/office/powerpoint/2010/main" val="1986311286"/>
       </p:ext>
     </p:extLst>
   </p:cSld>
   <p:clrMapOvr>
     <a:masterClrMapping/>
   </p:clrMapOvr>
+  <p:timing>
+    <p:tnLst>
+      <p:par>
+        <p:cTn id="1" dur="indefinite" restart="never" nodeType="tmRoot"/>
+      </p:par>
+    </p:tnLst>
+  </p:timing>
 </p:sld>
 </file>
 
@@ -10250,6 +10749,13 @@
   <p:clrMapOvr>
     <a:masterClrMapping/>
   </p:clrMapOvr>
+  <p:timing>
+    <p:tnLst>
+      <p:par>
+        <p:cTn id="1" dur="indefinite" restart="never" nodeType="tmRoot"/>
+      </p:par>
+    </p:tnLst>
+  </p:timing>
 </p:sld>
 </file>
 
@@ -10298,79 +10804,37 @@
                   <a:schemeClr val="bg1"/>
                 </a:solidFill>
               </a:rPr>
-              <a:t>It is well with my soul</a:t>
-            </a:r>
-          </a:p>
-          <a:p>
-            <a:r>
-              <a:rPr lang="en-GB" sz="3600" dirty="0">
-                <a:solidFill>
-                  <a:schemeClr val="bg1"/>
-                </a:solidFill>
-              </a:rPr>
-              <a:t>It is well with my soul</a:t>
-            </a:r>
-          </a:p>
-          <a:p>
-            <a:r>
-              <a:rPr lang="en-GB" sz="3600" dirty="0">
-                <a:solidFill>
-                  <a:schemeClr val="bg1"/>
-                </a:solidFill>
-              </a:rPr>
-              <a:t>It is well with my soul</a:t>
-            </a:r>
-          </a:p>
-          <a:p>
-            <a:r>
-              <a:rPr lang="en-GB" sz="3600" dirty="0">
-                <a:solidFill>
-                  <a:schemeClr val="bg1"/>
-                </a:solidFill>
-              </a:rPr>
-              <a:t>It is well it is well with my soul</a:t>
-            </a:r>
-          </a:p>
-          <a:p>
-            <a:r>
-              <a:rPr lang="en-GB" sz="3600" dirty="0">
-                <a:solidFill>
-                  <a:schemeClr val="bg1"/>
-                </a:solidFill>
-              </a:rPr>
-              <a:t>(REPEAT)</a:t>
-            </a:r>
-            <a:br>
-              <a:rPr lang="en-GB" sz="3600" dirty="0">
-                <a:solidFill>
-                  <a:schemeClr val="bg1"/>
-                </a:solidFill>
-              </a:rPr>
-            </a:br>
-            <a:endParaRPr lang="en-GB" sz="3600" dirty="0">
-              <a:solidFill>
-                <a:schemeClr val="bg1"/>
-              </a:solidFill>
-            </a:endParaRPr>
-          </a:p>
-          <a:p>
-            <a:r>
-              <a:rPr lang="en-GB" sz="3600" dirty="0">
-                <a:solidFill>
-                  <a:schemeClr val="bg1"/>
-                </a:solidFill>
-              </a:rPr>
-              <a:t>It is well it is well with my soul</a:t>
-            </a:r>
-          </a:p>
-          <a:p>
-            <a:r>
-              <a:rPr lang="en-GB" sz="3600" dirty="0">
-                <a:solidFill>
-                  <a:schemeClr val="bg1"/>
-                </a:solidFill>
-              </a:rPr>
-              <a:t>It is well it is well with my soul</a:t>
+              <a:t>Far be it from me to not believe</a:t>
+            </a:r>
+          </a:p>
+          <a:p>
+            <a:r>
+              <a:rPr lang="en-GB" sz="3600" dirty="0">
+                <a:solidFill>
+                  <a:schemeClr val="bg1"/>
+                </a:solidFill>
+              </a:rPr>
+              <a:t>Even when my eyes can't see</a:t>
+            </a:r>
+          </a:p>
+          <a:p>
+            <a:r>
+              <a:rPr lang="en-GB" sz="3600" dirty="0">
+                <a:solidFill>
+                  <a:schemeClr val="bg1"/>
+                </a:solidFill>
+              </a:rPr>
+              <a:t>And this mountain that's in front of me</a:t>
+            </a:r>
+          </a:p>
+          <a:p>
+            <a:r>
+              <a:rPr lang="en-GB" sz="3600" dirty="0">
+                <a:solidFill>
+                  <a:schemeClr val="bg1"/>
+                </a:solidFill>
+              </a:rPr>
+              <a:t>Will be thrown into the midst of the sea</a:t>
             </a:r>
           </a:p>
         </p:txBody>
@@ -10403,7 +10867,7 @@
                   <a:schemeClr val="bg1"/>
                 </a:solidFill>
               </a:rPr>
-              <a:t>6/7</a:t>
+              <a:t>3/7</a:t>
             </a:r>
           </a:p>
         </p:txBody>
@@ -10411,13 +10875,20 @@
     </p:spTree>
     <p:extLst>
       <p:ext uri="{BB962C8B-B14F-4D97-AF65-F5344CB8AC3E}">
-        <p14:creationId xmlns:p14="http://schemas.microsoft.com/office/powerpoint/2010/main" val="1090371077"/>
+        <p14:creationId xmlns:p14="http://schemas.microsoft.com/office/powerpoint/2010/main" val="3117841770"/>
       </p:ext>
     </p:extLst>
   </p:cSld>
   <p:clrMapOvr>
     <a:masterClrMapping/>
   </p:clrMapOvr>
+  <p:timing>
+    <p:tnLst>
+      <p:par>
+        <p:cTn id="1" dur="indefinite" restart="never" nodeType="tmRoot"/>
+      </p:par>
+    </p:tnLst>
+  </p:timing>
 </p:sld>
 </file>
 
@@ -10450,6 +10921,484 @@
         </p:nvSpPr>
         <p:spPr>
           <a:xfrm>
+            <a:off x="395536" y="764704"/>
+            <a:ext cx="8640960" cy="6480720"/>
+          </a:xfrm>
+        </p:spPr>
+        <p:txBody>
+          <a:bodyPr>
+            <a:noAutofit/>
+          </a:bodyPr>
+          <a:lstStyle/>
+          <a:p>
+            <a:r>
+              <a:rPr lang="en-GB" sz="3600" dirty="0">
+                <a:solidFill>
+                  <a:schemeClr val="bg1"/>
+                </a:solidFill>
+              </a:rPr>
+              <a:t>Through it all through it all</a:t>
+            </a:r>
+          </a:p>
+          <a:p>
+            <a:r>
+              <a:rPr lang="en-GB" sz="3600" dirty="0">
+                <a:solidFill>
+                  <a:schemeClr val="bg1"/>
+                </a:solidFill>
+              </a:rPr>
+              <a:t>My eyes are on You</a:t>
+            </a:r>
+          </a:p>
+          <a:p>
+            <a:r>
+              <a:rPr lang="en-GB" sz="3600" dirty="0">
+                <a:solidFill>
+                  <a:schemeClr val="bg1"/>
+                </a:solidFill>
+              </a:rPr>
+              <a:t>Through it all through it all</a:t>
+            </a:r>
+          </a:p>
+          <a:p>
+            <a:r>
+              <a:rPr lang="en-GB" sz="3600" dirty="0">
+                <a:solidFill>
+                  <a:schemeClr val="bg1"/>
+                </a:solidFill>
+              </a:rPr>
+              <a:t>It is well</a:t>
+            </a:r>
+          </a:p>
+          <a:p>
+            <a:r>
+              <a:rPr lang="en-GB" sz="3600" dirty="0">
+                <a:solidFill>
+                  <a:schemeClr val="bg1"/>
+                </a:solidFill>
+              </a:rPr>
+              <a:t>Through it all through it all</a:t>
+            </a:r>
+          </a:p>
+          <a:p>
+            <a:r>
+              <a:rPr lang="en-GB" sz="3600" dirty="0">
+                <a:solidFill>
+                  <a:schemeClr val="bg1"/>
+                </a:solidFill>
+              </a:rPr>
+              <a:t>My eyes are on You</a:t>
+            </a:r>
+          </a:p>
+          <a:p>
+            <a:r>
+              <a:rPr lang="en-GB" sz="3600" dirty="0">
+                <a:solidFill>
+                  <a:schemeClr val="bg1"/>
+                </a:solidFill>
+              </a:rPr>
+              <a:t>And it is well it is well</a:t>
+            </a:r>
+          </a:p>
+        </p:txBody>
+      </p:sp>
+      <p:sp>
+        <p:nvSpPr>
+          <p:cNvPr id="4" name="TextBox 3"/>
+          <p:cNvSpPr txBox="1"/>
+          <p:nvPr/>
+        </p:nvSpPr>
+        <p:spPr>
+          <a:xfrm>
+            <a:off x="8529729" y="0"/>
+            <a:ext cx="628698" cy="461665"/>
+          </a:xfrm>
+          <a:prstGeom prst="rect">
+            <a:avLst/>
+          </a:prstGeom>
+          <a:noFill/>
+        </p:spPr>
+        <p:txBody>
+          <a:bodyPr wrap="none" rtlCol="0">
+            <a:spAutoFit/>
+          </a:bodyPr>
+          <a:lstStyle/>
+          <a:p>
+            <a:r>
+              <a:rPr lang="en-GB" sz="2400" b="1" dirty="0">
+                <a:solidFill>
+                  <a:schemeClr val="bg1"/>
+                </a:solidFill>
+              </a:rPr>
+              <a:t>4/7</a:t>
+            </a:r>
+          </a:p>
+        </p:txBody>
+      </p:sp>
+    </p:spTree>
+    <p:extLst>
+      <p:ext uri="{BB962C8B-B14F-4D97-AF65-F5344CB8AC3E}">
+        <p14:creationId xmlns:p14="http://schemas.microsoft.com/office/powerpoint/2010/main" val="2277284100"/>
+      </p:ext>
+    </p:extLst>
+  </p:cSld>
+  <p:clrMapOvr>
+    <a:masterClrMapping/>
+  </p:clrMapOvr>
+  <p:timing>
+    <p:tnLst>
+      <p:par>
+        <p:cTn id="1" dur="indefinite" restart="never" nodeType="tmRoot"/>
+      </p:par>
+    </p:tnLst>
+  </p:timing>
+</p:sld>
+</file>
+
+<file path=ppt/slides/slide52.xml><?xml version="1.0" encoding="utf-8"?>
+<p:sld xmlns:a="http://schemas.openxmlformats.org/drawingml/2006/main" xmlns:r="http://schemas.openxmlformats.org/officeDocument/2006/relationships" xmlns:p="http://schemas.openxmlformats.org/presentationml/2006/main">
+  <p:cSld>
+    <p:spTree>
+      <p:nvGrpSpPr>
+        <p:cNvPr id="1" name=""/>
+        <p:cNvGrpSpPr/>
+        <p:nvPr/>
+      </p:nvGrpSpPr>
+      <p:grpSpPr>
+        <a:xfrm>
+          <a:off x="0" y="0"/>
+          <a:ext cx="0" cy="0"/>
+          <a:chOff x="0" y="0"/>
+          <a:chExt cx="0" cy="0"/>
+        </a:xfrm>
+      </p:grpSpPr>
+      <p:sp>
+        <p:nvSpPr>
+          <p:cNvPr id="3" name="Subtitle 2"/>
+          <p:cNvSpPr>
+            <a:spLocks noGrp="1"/>
+          </p:cNvSpPr>
+          <p:nvPr>
+            <p:ph type="subTitle" idx="1"/>
+          </p:nvPr>
+        </p:nvSpPr>
+        <p:spPr>
+          <a:xfrm>
+            <a:off x="231698" y="764704"/>
+            <a:ext cx="8640960" cy="6480720"/>
+          </a:xfrm>
+        </p:spPr>
+        <p:txBody>
+          <a:bodyPr>
+            <a:noAutofit/>
+          </a:bodyPr>
+          <a:lstStyle/>
+          <a:p>
+            <a:r>
+              <a:rPr lang="en-GB" sz="3600" dirty="0">
+                <a:solidFill>
+                  <a:schemeClr val="bg1"/>
+                </a:solidFill>
+              </a:rPr>
+              <a:t>So let go my soul and trust in Him</a:t>
+            </a:r>
+          </a:p>
+          <a:p>
+            <a:r>
+              <a:rPr lang="en-GB" sz="3600" dirty="0">
+                <a:solidFill>
+                  <a:schemeClr val="bg1"/>
+                </a:solidFill>
+              </a:rPr>
+              <a:t>The waves and wind still know His Name</a:t>
+            </a:r>
+          </a:p>
+          <a:p>
+            <a:r>
+              <a:rPr lang="en-GB" sz="3600" dirty="0">
+                <a:solidFill>
+                  <a:schemeClr val="bg1"/>
+                </a:solidFill>
+              </a:rPr>
+              <a:t>(REPEAT)</a:t>
+            </a:r>
+          </a:p>
+          <a:p>
+            <a:endParaRPr lang="en-GB" sz="3600" dirty="0">
+              <a:solidFill>
+                <a:schemeClr val="bg1"/>
+              </a:solidFill>
+            </a:endParaRPr>
+          </a:p>
+          <a:p>
+            <a:r>
+              <a:rPr lang="en-GB" sz="3600" dirty="0">
+                <a:solidFill>
+                  <a:schemeClr val="bg1"/>
+                </a:solidFill>
+              </a:rPr>
+              <a:t>The waves and wind still know His Name</a:t>
+            </a:r>
+          </a:p>
+        </p:txBody>
+      </p:sp>
+      <p:sp>
+        <p:nvSpPr>
+          <p:cNvPr id="4" name="TextBox 3"/>
+          <p:cNvSpPr txBox="1"/>
+          <p:nvPr/>
+        </p:nvSpPr>
+        <p:spPr>
+          <a:xfrm>
+            <a:off x="8529729" y="0"/>
+            <a:ext cx="628698" cy="461665"/>
+          </a:xfrm>
+          <a:prstGeom prst="rect">
+            <a:avLst/>
+          </a:prstGeom>
+          <a:noFill/>
+        </p:spPr>
+        <p:txBody>
+          <a:bodyPr wrap="none" rtlCol="0">
+            <a:spAutoFit/>
+          </a:bodyPr>
+          <a:lstStyle/>
+          <a:p>
+            <a:r>
+              <a:rPr lang="en-GB" sz="2400" b="1" dirty="0">
+                <a:solidFill>
+                  <a:schemeClr val="bg1"/>
+                </a:solidFill>
+              </a:rPr>
+              <a:t>5/7</a:t>
+            </a:r>
+          </a:p>
+        </p:txBody>
+      </p:sp>
+    </p:spTree>
+    <p:extLst>
+      <p:ext uri="{BB962C8B-B14F-4D97-AF65-F5344CB8AC3E}">
+        <p14:creationId xmlns:p14="http://schemas.microsoft.com/office/powerpoint/2010/main" val="2887928867"/>
+      </p:ext>
+    </p:extLst>
+  </p:cSld>
+  <p:clrMapOvr>
+    <a:masterClrMapping/>
+  </p:clrMapOvr>
+  <p:timing>
+    <p:tnLst>
+      <p:par>
+        <p:cTn id="1" dur="indefinite" restart="never" nodeType="tmRoot"/>
+      </p:par>
+    </p:tnLst>
+  </p:timing>
+</p:sld>
+</file>
+
+<file path=ppt/slides/slide53.xml><?xml version="1.0" encoding="utf-8"?>
+<p:sld xmlns:a="http://schemas.openxmlformats.org/drawingml/2006/main" xmlns:r="http://schemas.openxmlformats.org/officeDocument/2006/relationships" xmlns:p="http://schemas.openxmlformats.org/presentationml/2006/main">
+  <p:cSld>
+    <p:spTree>
+      <p:nvGrpSpPr>
+        <p:cNvPr id="1" name=""/>
+        <p:cNvGrpSpPr/>
+        <p:nvPr/>
+      </p:nvGrpSpPr>
+      <p:grpSpPr>
+        <a:xfrm>
+          <a:off x="0" y="0"/>
+          <a:ext cx="0" cy="0"/>
+          <a:chOff x="0" y="0"/>
+          <a:chExt cx="0" cy="0"/>
+        </a:xfrm>
+      </p:grpSpPr>
+      <p:sp>
+        <p:nvSpPr>
+          <p:cNvPr id="3" name="Subtitle 2"/>
+          <p:cNvSpPr>
+            <a:spLocks noGrp="1"/>
+          </p:cNvSpPr>
+          <p:nvPr>
+            <p:ph type="subTitle" idx="1"/>
+          </p:nvPr>
+        </p:nvSpPr>
+        <p:spPr>
+          <a:xfrm>
+            <a:off x="251520" y="764704"/>
+            <a:ext cx="8640960" cy="6480720"/>
+          </a:xfrm>
+        </p:spPr>
+        <p:txBody>
+          <a:bodyPr>
+            <a:noAutofit/>
+          </a:bodyPr>
+          <a:lstStyle/>
+          <a:p>
+            <a:r>
+              <a:rPr lang="en-GB" sz="3600" dirty="0">
+                <a:solidFill>
+                  <a:schemeClr val="bg1"/>
+                </a:solidFill>
+              </a:rPr>
+              <a:t>It is well with my soul</a:t>
+            </a:r>
+          </a:p>
+          <a:p>
+            <a:r>
+              <a:rPr lang="en-GB" sz="3600" dirty="0">
+                <a:solidFill>
+                  <a:schemeClr val="bg1"/>
+                </a:solidFill>
+              </a:rPr>
+              <a:t>It is well with my soul</a:t>
+            </a:r>
+          </a:p>
+          <a:p>
+            <a:r>
+              <a:rPr lang="en-GB" sz="3600" dirty="0">
+                <a:solidFill>
+                  <a:schemeClr val="bg1"/>
+                </a:solidFill>
+              </a:rPr>
+              <a:t>It is well with my soul</a:t>
+            </a:r>
+          </a:p>
+          <a:p>
+            <a:r>
+              <a:rPr lang="en-GB" sz="3600" dirty="0">
+                <a:solidFill>
+                  <a:schemeClr val="bg1"/>
+                </a:solidFill>
+              </a:rPr>
+              <a:t>It is well it is well with my soul</a:t>
+            </a:r>
+          </a:p>
+          <a:p>
+            <a:r>
+              <a:rPr lang="en-GB" sz="3600" dirty="0">
+                <a:solidFill>
+                  <a:schemeClr val="bg1"/>
+                </a:solidFill>
+              </a:rPr>
+              <a:t>(REPEAT)</a:t>
+            </a:r>
+            <a:br>
+              <a:rPr lang="en-GB" sz="3600" dirty="0">
+                <a:solidFill>
+                  <a:schemeClr val="bg1"/>
+                </a:solidFill>
+              </a:rPr>
+            </a:br>
+            <a:endParaRPr lang="en-GB" sz="3600" dirty="0">
+              <a:solidFill>
+                <a:schemeClr val="bg1"/>
+              </a:solidFill>
+            </a:endParaRPr>
+          </a:p>
+          <a:p>
+            <a:r>
+              <a:rPr lang="en-GB" sz="3600" dirty="0">
+                <a:solidFill>
+                  <a:schemeClr val="bg1"/>
+                </a:solidFill>
+              </a:rPr>
+              <a:t>It is well it is well with my soul</a:t>
+            </a:r>
+          </a:p>
+          <a:p>
+            <a:r>
+              <a:rPr lang="en-GB" sz="3600" dirty="0">
+                <a:solidFill>
+                  <a:schemeClr val="bg1"/>
+                </a:solidFill>
+              </a:rPr>
+              <a:t>It is well it is well with my soul</a:t>
+            </a:r>
+          </a:p>
+        </p:txBody>
+      </p:sp>
+      <p:sp>
+        <p:nvSpPr>
+          <p:cNvPr id="4" name="TextBox 3"/>
+          <p:cNvSpPr txBox="1"/>
+          <p:nvPr/>
+        </p:nvSpPr>
+        <p:spPr>
+          <a:xfrm>
+            <a:off x="8529729" y="0"/>
+            <a:ext cx="628698" cy="461665"/>
+          </a:xfrm>
+          <a:prstGeom prst="rect">
+            <a:avLst/>
+          </a:prstGeom>
+          <a:noFill/>
+        </p:spPr>
+        <p:txBody>
+          <a:bodyPr wrap="none" rtlCol="0">
+            <a:spAutoFit/>
+          </a:bodyPr>
+          <a:lstStyle/>
+          <a:p>
+            <a:r>
+              <a:rPr lang="en-GB" sz="2400" b="1" dirty="0">
+                <a:solidFill>
+                  <a:schemeClr val="bg1"/>
+                </a:solidFill>
+              </a:rPr>
+              <a:t>6/7</a:t>
+            </a:r>
+          </a:p>
+        </p:txBody>
+      </p:sp>
+    </p:spTree>
+    <p:extLst>
+      <p:ext uri="{BB962C8B-B14F-4D97-AF65-F5344CB8AC3E}">
+        <p14:creationId xmlns:p14="http://schemas.microsoft.com/office/powerpoint/2010/main" val="1090371077"/>
+      </p:ext>
+    </p:extLst>
+  </p:cSld>
+  <p:clrMapOvr>
+    <a:masterClrMapping/>
+  </p:clrMapOvr>
+  <p:timing>
+    <p:tnLst>
+      <p:par>
+        <p:cTn id="1" dur="indefinite" restart="never" nodeType="tmRoot"/>
+      </p:par>
+    </p:tnLst>
+  </p:timing>
+</p:sld>
+</file>
+
+<file path=ppt/slides/slide54.xml><?xml version="1.0" encoding="utf-8"?>
+<p:sld xmlns:a="http://schemas.openxmlformats.org/drawingml/2006/main" xmlns:r="http://schemas.openxmlformats.org/officeDocument/2006/relationships" xmlns:p="http://schemas.openxmlformats.org/presentationml/2006/main">
+  <p:cSld>
+    <p:spTree>
+      <p:nvGrpSpPr>
+        <p:cNvPr id="1" name=""/>
+        <p:cNvGrpSpPr/>
+        <p:nvPr/>
+      </p:nvGrpSpPr>
+      <p:grpSpPr>
+        <a:xfrm>
+          <a:off x="0" y="0"/>
+          <a:ext cx="0" cy="0"/>
+          <a:chOff x="0" y="0"/>
+          <a:chExt cx="0" cy="0"/>
+        </a:xfrm>
+      </p:grpSpPr>
+      <p:sp>
+        <p:nvSpPr>
+          <p:cNvPr id="3" name="Subtitle 2"/>
+          <p:cNvSpPr>
+            <a:spLocks noGrp="1"/>
+          </p:cNvSpPr>
+          <p:nvPr>
+            <p:ph type="subTitle" idx="1"/>
+          </p:nvPr>
+        </p:nvSpPr>
+        <p:spPr>
+          <a:xfrm>
             <a:off x="251520" y="764704"/>
             <a:ext cx="8640960" cy="6480720"/>
           </a:xfrm>
@@ -10581,6 +11530,13 @@
   <p:clrMapOvr>
     <a:masterClrMapping/>
   </p:clrMapOvr>
+  <p:timing>
+    <p:tnLst>
+      <p:par>
+        <p:cTn id="1" dur="indefinite" restart="never" nodeType="tmRoot"/>
+      </p:par>
+    </p:tnLst>
+  </p:timing>
 </p:sld>
 </file>
 
@@ -10707,6 +11663,13 @@
   <p:clrMapOvr>
     <a:masterClrMapping/>
   </p:clrMapOvr>
+  <p:timing>
+    <p:tnLst>
+      <p:par>
+        <p:cTn id="1" dur="indefinite" restart="never" nodeType="tmRoot"/>
+      </p:par>
+    </p:tnLst>
+  </p:timing>
 </p:sld>
 </file>
 
@@ -10833,6 +11796,13 @@
   <p:clrMapOvr>
     <a:masterClrMapping/>
   </p:clrMapOvr>
+  <p:timing>
+    <p:tnLst>
+      <p:par>
+        <p:cTn id="1" dur="indefinite" restart="never" nodeType="tmRoot"/>
+      </p:par>
+    </p:tnLst>
+  </p:timing>
 </p:sld>
 </file>
 
@@ -10875,6 +11845,14 @@
           </a:bodyPr>
           <a:lstStyle/>
           <a:p>
+            <a:r>
+              <a:rPr lang="en-GB" sz="9600" dirty="0">
+                <a:solidFill>
+                  <a:schemeClr val="bg1"/>
+                </a:solidFill>
+              </a:rPr>
+              <a:t/>
+            </a:r>
             <a:br>
               <a:rPr lang="en-GB" sz="9600" dirty="0">
                 <a:solidFill>
@@ -10890,6 +11868,14 @@
               </a:rPr>
               <a:t>Living Hope</a:t>
             </a:r>
+            <a:r>
+              <a:rPr lang="en-GB" sz="9600" dirty="0">
+                <a:solidFill>
+                  <a:schemeClr val="bg1"/>
+                </a:solidFill>
+              </a:rPr>
+              <a:t/>
+            </a:r>
             <a:br>
               <a:rPr lang="en-GB" sz="9600" dirty="0">
                 <a:solidFill>
@@ -10897,6 +11883,14 @@
                 </a:solidFill>
               </a:rPr>
             </a:br>
+            <a:r>
+              <a:rPr lang="en-GB" sz="1200" dirty="0">
+                <a:solidFill>
+                  <a:schemeClr val="bg1"/>
+                </a:solidFill>
+              </a:rPr>
+              <a:t/>
+            </a:r>
             <a:br>
               <a:rPr lang="en-GB" sz="1200" dirty="0">
                 <a:solidFill>
@@ -10993,6 +11987,13 @@
   <p:clrMapOvr>
     <a:masterClrMapping/>
   </p:clrMapOvr>
+  <p:timing>
+    <p:tnLst>
+      <p:par>
+        <p:cTn id="1" dur="indefinite" restart="never" nodeType="tmRoot"/>
+      </p:par>
+    </p:tnLst>
+  </p:timing>
 </p:sld>
 </file>
 
@@ -11159,6 +12160,13 @@
   <p:clrMapOvr>
     <a:masterClrMapping/>
   </p:clrMapOvr>
+  <p:timing>
+    <p:tnLst>
+      <p:par>
+        <p:cTn id="1" dur="indefinite" restart="never" nodeType="tmRoot"/>
+      </p:par>
+    </p:tnLst>
+  </p:timing>
 </p:sld>
 </file>
 
